--- a/downloads/强生眼力健_Digital_PLS院方研讨会30分钟介绍PPT.pptx
+++ b/downloads/强生眼力健_Digital_PLS院方研讨会30分钟介绍PPT.pptx
@@ -2,28 +2,30 @@
 <file path=ppt/presentation.xml><?xml version="1.0" encoding="utf-8"?>
 <p:presentation xmlns:p="http://schemas.openxmlformats.org/presentationml/2006/main">
   <p:sldMasterIdLst>
-    <p:sldMasterId xmlns:r="http://schemas.openxmlformats.org/officeDocument/2006/relationships" id="2147483648" r:id="R70dab34fba9945e5"/>
+    <p:sldMasterId xmlns:r="http://schemas.openxmlformats.org/officeDocument/2006/relationships" id="2147483648" r:id="R520c599c2eb34603"/>
   </p:sldMasterIdLst>
   <p:notesMasterIdLst>
-    <p:notesMasterId xmlns:r="http://schemas.openxmlformats.org/officeDocument/2006/relationships" r:id="Re6bad6af87154871"/>
+    <p:notesMasterId xmlns:r="http://schemas.openxmlformats.org/officeDocument/2006/relationships" r:id="R8167fe03d2474bbb"/>
   </p:notesMasterIdLst>
   <p:sldIdLst>
-    <p:sldId xmlns:r="http://schemas.openxmlformats.org/officeDocument/2006/relationships" id="256" r:id="Rbd01798ea5e64694"/>
-    <p:sldId xmlns:r="http://schemas.openxmlformats.org/officeDocument/2006/relationships" id="257" r:id="R67352791fbd74b1f"/>
-    <p:sldId xmlns:r="http://schemas.openxmlformats.org/officeDocument/2006/relationships" id="258" r:id="R3d29bef61f014a00"/>
-    <p:sldId xmlns:r="http://schemas.openxmlformats.org/officeDocument/2006/relationships" id="259" r:id="R1d85805dd46744a9"/>
-    <p:sldId xmlns:r="http://schemas.openxmlformats.org/officeDocument/2006/relationships" id="260" r:id="R8d36c6a4418c4cb8"/>
-    <p:sldId xmlns:r="http://schemas.openxmlformats.org/officeDocument/2006/relationships" id="261" r:id="R280b79b8e7494b73"/>
-    <p:sldId xmlns:r="http://schemas.openxmlformats.org/officeDocument/2006/relationships" id="262" r:id="Rb6a14ccbeadd4b9e"/>
-    <p:sldId xmlns:r="http://schemas.openxmlformats.org/officeDocument/2006/relationships" id="263" r:id="R61d8a9072de54a11"/>
-    <p:sldId xmlns:r="http://schemas.openxmlformats.org/officeDocument/2006/relationships" id="264" r:id="Rd88327c281284d7f"/>
-    <p:sldId xmlns:r="http://schemas.openxmlformats.org/officeDocument/2006/relationships" id="265" r:id="Rc731a63d7da54731"/>
-    <p:sldId xmlns:r="http://schemas.openxmlformats.org/officeDocument/2006/relationships" id="266" r:id="Rf4eb63b38e6744dd"/>
-    <p:sldId xmlns:r="http://schemas.openxmlformats.org/officeDocument/2006/relationships" id="267" r:id="R49164063d2a9427e"/>
-    <p:sldId xmlns:r="http://schemas.openxmlformats.org/officeDocument/2006/relationships" id="268" r:id="Redc1ee59bef84540"/>
-    <p:sldId xmlns:r="http://schemas.openxmlformats.org/officeDocument/2006/relationships" id="269" r:id="R9533206f3dbf450c"/>
-    <p:sldId xmlns:r="http://schemas.openxmlformats.org/officeDocument/2006/relationships" id="270" r:id="Rdbcbc39060ab4f37"/>
-    <p:sldId xmlns:r="http://schemas.openxmlformats.org/officeDocument/2006/relationships" id="271" r:id="Raa9f7689c8594472"/>
+    <p:sldId xmlns:r="http://schemas.openxmlformats.org/officeDocument/2006/relationships" id="256" r:id="Ra13629cb8f4b4d7f"/>
+    <p:sldId xmlns:r="http://schemas.openxmlformats.org/officeDocument/2006/relationships" id="257" r:id="R94fe435d035c4a93"/>
+    <p:sldId xmlns:r="http://schemas.openxmlformats.org/officeDocument/2006/relationships" id="258" r:id="R8f553a962ef74bd5"/>
+    <p:sldId xmlns:r="http://schemas.openxmlformats.org/officeDocument/2006/relationships" id="259" r:id="R05164cd67f6b4abf"/>
+    <p:sldId xmlns:r="http://schemas.openxmlformats.org/officeDocument/2006/relationships" id="260" r:id="R60397d5ca24b4364"/>
+    <p:sldId xmlns:r="http://schemas.openxmlformats.org/officeDocument/2006/relationships" id="261" r:id="R712562b7e2c245e1"/>
+    <p:sldId xmlns:r="http://schemas.openxmlformats.org/officeDocument/2006/relationships" id="262" r:id="R0e68b33c889f451e"/>
+    <p:sldId xmlns:r="http://schemas.openxmlformats.org/officeDocument/2006/relationships" id="263" r:id="Rd8f9ea9be3a64eb3"/>
+    <p:sldId xmlns:r="http://schemas.openxmlformats.org/officeDocument/2006/relationships" id="264" r:id="R85f2645075bb485a"/>
+    <p:sldId xmlns:r="http://schemas.openxmlformats.org/officeDocument/2006/relationships" id="265" r:id="Rd30647e34ead4c70"/>
+    <p:sldId xmlns:r="http://schemas.openxmlformats.org/officeDocument/2006/relationships" id="266" r:id="Rc8e6b18d53bf44ad"/>
+    <p:sldId xmlns:r="http://schemas.openxmlformats.org/officeDocument/2006/relationships" id="267" r:id="R36d3079ae67d4a22"/>
+    <p:sldId xmlns:ns1="http://schemas.openxmlformats.org/officeDocument/2006/relationships" id="280" ns1:id="plsTeam17"/>
+    <p:sldId xmlns:r="http://schemas.openxmlformats.org/officeDocument/2006/relationships" id="268" r:id="Rc11b9a7dc69a488d"/>
+    <p:sldId xmlns:r="http://schemas.openxmlformats.org/officeDocument/2006/relationships" id="269" r:id="R4827d9b962854e0b"/>
+    <p:sldId xmlns:r="http://schemas.openxmlformats.org/officeDocument/2006/relationships" id="270" r:id="Rab71fc998d31450a"/>
+    <p:sldId xmlns:ns1="http://schemas.openxmlformats.org/officeDocument/2006/relationships" id="281" ns1:id="plsTeam18"/>
+    <p:sldId xmlns:r="http://schemas.openxmlformats.org/officeDocument/2006/relationships" id="271" r:id="R2ccf5b6c89cc4881"/>
   </p:sldIdLst>
   <p:sldSz cx="12192000" cy="6858000"/>
   <p:notesSz cx="6858000" cy="9144000"/>
@@ -455,16 +457,21 @@
         <p:txBody>
           <a:bodyPr xmlns:a="http://schemas.openxmlformats.org/drawingml/2006/main"/>
           <a:lstStyle xmlns:a="http://schemas.openxmlformats.org/drawingml/2006/main"/>
-          <a:p xmlns:a="http://schemas.openxmlformats.org/drawingml/2006/main">
-            <a:r>
-              <a:t>开场建议：患者的目标已经从视力表延伸到阅读、工作、驾驶和生活。今天讨论医院如何把这些目标转化为稳定、可信、可追踪的专业服务。</a:t>
-            </a:r>
-          </a:p>
-          <a:p xmlns:a="http://schemas.openxmlformats.org/drawingml/2006/main">
-            <a:r>
-              <a:t>合规提示：本次不是产品宣讲，不承诺疗效、手术量、收入或患者转化。</a:t>
-            </a:r>
-          </a:p>
+          <ns0:p xmlns:ns0="http://schemas.openxmlformats.org/drawingml/2006/main">
+            <ns0:r>
+              <ns0:t>30分钟议程：第1页，0–0.5分钟（本页0.5分钟）。</ns0:t>
+            </ns0:r>
+          </ns0:p>
+          <ns1:p xmlns:ns1="http://schemas.openxmlformats.org/drawingml/2006/main">
+            <ns1:r>
+              <ns1:t>开场建议：患者的目标已经从视力表延伸到阅读、工作、驾驶和生活。今天讨论医院如何把这些目标转化为稳定、可信、可追踪的专业服务。</ns1:t>
+            </ns1:r>
+          </ns1:p>
+          <ns2:p xmlns:ns2="http://schemas.openxmlformats.org/drawingml/2006/main">
+            <ns2:r>
+              <ns2:t>合规提示：本次不是产品宣讲，不承诺疗效、手术量、收入或患者转化。</ns2:t>
+            </ns2:r>
+          </ns2:p>
         </p:txBody>
       </p:sp>
       <p:sp>
@@ -530,11 +537,16 @@
         <p:txBody>
           <a:bodyPr xmlns:a="http://schemas.openxmlformats.org/drawingml/2006/main"/>
           <a:lstStyle xmlns:a="http://schemas.openxmlformats.org/drawingml/2006/main"/>
-          <a:p xmlns:a="http://schemas.openxmlformats.org/drawingml/2006/main">
-            <a:r>
-              <a:t>共同决策的完成标准不是团队讲完了，而是患者能用自己的话说出目标、局限、替代方案、费用属性和术后联系路径。</a:t>
-            </a:r>
-          </a:p>
+          <ns0:p xmlns:ns0="http://schemas.openxmlformats.org/drawingml/2006/main">
+            <ns0:r>
+              <ns0:t>30分钟议程：第10页，9.5–11.5分钟（本页2分钟）。</ns0:t>
+            </ns0:r>
+          </ns0:p>
+          <ns1:p xmlns:ns1="http://schemas.openxmlformats.org/drawingml/2006/main">
+            <ns1:r>
+              <ns1:t>共同决策的完成标准不是团队讲完了，而是患者能用自己的话说出目标、局限、替代方案、费用属性和术后联系路径。</ns1:t>
+            </ns1:r>
+          </ns1:p>
         </p:txBody>
       </p:sp>
       <p:sp>
@@ -600,11 +612,16 @@
         <p:txBody>
           <a:bodyPr xmlns:a="http://schemas.openxmlformats.org/drawingml/2006/main"/>
           <a:lstStyle xmlns:a="http://schemas.openxmlformats.org/drawingml/2006/main"/>
-          <a:p xmlns:a="http://schemas.openxmlformats.org/drawingml/2006/main">
-            <a:r>
-              <a:t>不要把基础医保路径与PLS路径讲成医疗质量高低。两条路径必须共享安全、质量和尊重患者的底线。</a:t>
-            </a:r>
-          </a:p>
+          <ns0:p xmlns:ns0="http://schemas.openxmlformats.org/drawingml/2006/main">
+            <ns0:r>
+              <ns0:t>30分钟议程：第11页，11.5–13.5分钟（本页2分钟）。</ns0:t>
+            </ns0:r>
+          </ns0:p>
+          <ns1:p xmlns:ns1="http://schemas.openxmlformats.org/drawingml/2006/main">
+            <ns1:r>
+              <ns1:t>不要把基础医保路径与PLS路径讲成医疗质量高低。两条路径必须共享安全、质量和尊重患者的底线。</ns1:t>
+            </ns1:r>
+          </ns1:p>
         </p:txBody>
       </p:sp>
       <p:sp>
@@ -670,11 +687,16 @@
         <p:txBody>
           <a:bodyPr xmlns:a="http://schemas.openxmlformats.org/drawingml/2006/main"/>
           <a:lstStyle xmlns:a="http://schemas.openxmlformats.org/drawingml/2006/main"/>
-          <a:p xmlns:a="http://schemas.openxmlformats.org/drawingml/2006/main">
-            <a:r>
-              <a:t>每一步都有明确输出。医院完成本阶段的责任、行动和证据后，再进入下一步。</a:t>
-            </a:r>
-          </a:p>
+          <ns0:p xmlns:ns0="http://schemas.openxmlformats.org/drawingml/2006/main">
+            <ns0:r>
+              <ns0:t>30分钟议程：第12页，13.5–15分钟（本页1.5分钟）。</ns0:t>
+            </ns0:r>
+          </ns0:p>
+          <ns1:p xmlns:ns1="http://schemas.openxmlformats.org/drawingml/2006/main">
+            <ns1:r>
+              <ns1:t>每一步都有明确输出。医院完成本阶段的责任、行动和证据后，再进入下一步。</ns1:t>
+            </ns1:r>
+          </ns1:p>
         </p:txBody>
       </p:sp>
       <p:sp>
@@ -740,11 +762,21 @@
         <p:txBody>
           <a:bodyPr xmlns:a="http://schemas.openxmlformats.org/drawingml/2006/main"/>
           <a:lstStyle xmlns:a="http://schemas.openxmlformats.org/drawingml/2006/main"/>
-          <a:p xmlns:a="http://schemas.openxmlformats.org/drawingml/2006/main">
-            <a:r>
-              <a:t>前30天不追求一次铺开全部工作。先跑通一条完整路径，让团队知道如何协作。</a:t>
-            </a:r>
-          </a:p>
+          <ns0:p xmlns:ns0="http://schemas.openxmlformats.org/drawingml/2006/main">
+            <ns0:r>
+              <ns0:t>30分钟议程：第14页，18–20分钟（本页2分钟）。</ns0:t>
+            </ns0:r>
+          </ns0:p>
+          <ns1:p xmlns:ns1="http://schemas.openxmlformats.org/drawingml/2006/main">
+            <ns1:r>
+              <ns1:t>前30天不追求一次铺开全部工作。先跑通一条完整路径，让团队知道如何协作。</ns1:t>
+            </ns1:r>
+          </ns1:p>
+          <ns2:p xmlns:ns2="http://schemas.openxmlformats.org/drawingml/2006/main">
+            <ns2:r>
+              <ns2:t>以今天现场指定的名单为基础启动，不再把团队任命留给下一次会议。</ns2:t>
+            </ns2:r>
+          </ns2:p>
         </p:txBody>
       </p:sp>
       <p:sp>
@@ -810,11 +842,16 @@
         <p:txBody>
           <a:bodyPr xmlns:a="http://schemas.openxmlformats.org/drawingml/2006/main"/>
           <a:lstStyle xmlns:a="http://schemas.openxmlformats.org/drawingml/2006/main"/>
-          <a:p xmlns:a="http://schemas.openxmlformats.org/drawingml/2006/main">
-            <a:r>
-              <a:t>试运行是找问题，不是展示成绩。出现医学红线、风险复核缺失或患者理解不足时，应暂停并回到临床判断。</a:t>
-            </a:r>
-          </a:p>
+          <ns0:p xmlns:ns0="http://schemas.openxmlformats.org/drawingml/2006/main">
+            <ns0:r>
+              <ns0:t>30分钟议程：第15页，20–22分钟（本页2分钟）。</ns0:t>
+            </ns0:r>
+          </ns0:p>
+          <ns1:p xmlns:ns1="http://schemas.openxmlformats.org/drawingml/2006/main">
+            <ns1:r>
+              <ns1:t>试运行是找问题，不是展示成绩。出现医学红线、风险复核缺失或患者理解不足时，应暂停并回到临床判断。</ns1:t>
+            </ns1:r>
+          </ns1:p>
         </p:txBody>
       </p:sp>
       <p:sp>
@@ -880,11 +917,16 @@
         <p:txBody>
           <a:bodyPr xmlns:a="http://schemas.openxmlformats.org/drawingml/2006/main"/>
           <a:lstStyle xmlns:a="http://schemas.openxmlformats.org/drawingml/2006/main"/>
-          <a:p xmlns:a="http://schemas.openxmlformats.org/drawingml/2006/main">
-            <a:r>
-              <a:t>CEO复盘顺序：本周期做了什么；是否真正应用；患者和团队发生什么变化；哪些流程需要调整；下一周期由谁完成。经营指标不能替代前三类结果。</a:t>
-            </a:r>
-          </a:p>
+          <ns0:p xmlns:ns0="http://schemas.openxmlformats.org/drawingml/2006/main">
+            <ns0:r>
+              <ns0:t>30分钟议程：第16页，22–24分钟（本页2分钟）。</ns0:t>
+            </ns0:r>
+          </ns0:p>
+          <ns1:p xmlns:ns1="http://schemas.openxmlformats.org/drawingml/2006/main">
+            <ns1:r>
+              <ns1:t>CEO复盘顺序：本周期做了什么；是否真正应用；患者和团队发生什么变化；哪些流程需要调整；下一周期由谁完成。经营指标不能替代前三类结果。</ns1:t>
+            </ns1:r>
+          </ns1:p>
         </p:txBody>
       </p:sp>
       <p:sp>
@@ -950,16 +992,166 @@
         <p:txBody>
           <a:bodyPr xmlns:a="http://schemas.openxmlformats.org/drawingml/2006/main"/>
           <a:lstStyle xmlns:a="http://schemas.openxmlformats.org/drawingml/2006/main"/>
-          <a:p xmlns:a="http://schemas.openxmlformats.org/drawingml/2006/main">
-            <a:r>
-              <a:t>收尾建议：邀请院方选择一个具体院区或门诊场景进入诊断，不把下一步说成采购或销量目标。</a:t>
-            </a:r>
-          </a:p>
-          <a:p xmlns:a="http://schemas.openxmlformats.org/drawingml/2006/main">
-            <a:r>
-              <a:t>眼力健可支持项目框架、团队学习、工具使用与阶段复盘；医院承担项目主体责任，医生保留临床决策权，患者保留最终选择权。</a:t>
-            </a:r>
-          </a:p>
+          <ns0:p xmlns:ns0="http://schemas.openxmlformats.org/drawingml/2006/main">
+            <ns0:r>
+              <ns0:t>30分钟议程：第18页，29–30分钟（本页1分钟）。</ns0:t>
+            </ns0:r>
+          </ns0:p>
+          <ns1:p xmlns:ns1="http://schemas.openxmlformats.org/drawingml/2006/main">
+            <ns1:r>
+              <ns1:t>收尾1分钟。由记录人读回六类角色的成员名单及待落实事项；再确认三至五项行动的责任人、完成日期和验收证据，现场约定第30天复盘日期及召集人。会后院方项目负责人发送内部纪要，并组织成员逐一确认。强生眼力健PLS团队提供共创支持，院方保留管理、医疗与患者选择责任。</ns1:t>
+            </ns1:r>
+          </ns1:p>
+        </p:txBody>
+      </p:sp>
+      <p:sp>
+        <p:nvSpPr>
+          <p:cNvPr id="4" name="Slide Number Placeholder 3"/>
+          <p:cNvSpPr>
+            <a:spLocks xmlns:a="http://schemas.openxmlformats.org/drawingml/2006/main" noGrp="1"/>
+          </p:cNvSpPr>
+          <p:nvPr>
+            <p:ph type="sldNum" idx="5"/>
+          </p:nvPr>
+        </p:nvSpPr>
+        <p:spPr/>
+        <p:txBody>
+          <a:bodyPr xmlns:a="http://schemas.openxmlformats.org/drawingml/2006/main"/>
+          <a:lstStyle xmlns:a="http://schemas.openxmlformats.org/drawingml/2006/main"/>
+          <a:p xmlns:a="http://schemas.openxmlformats.org/drawingml/2006/main"/>
+        </p:txBody>
+      </p:sp>
+    </p:spTree>
+  </p:cSld>
+  <p:clrMapOvr>
+    <a:masterClrMapping xmlns:a="http://schemas.openxmlformats.org/drawingml/2006/main"/>
+  </p:clrMapOvr>
+</p:notes>
+</file>
+
+<file path=ppt/notesSlides/notesSlide17.xml><?xml version="1.0" encoding="utf-8"?>
+<p:notes xmlns:p="http://schemas.openxmlformats.org/presentationml/2006/main">
+  <p:cSld>
+    <p:spTree>
+      <p:nvGrpSpPr>
+        <p:cNvPr id="1" name=""/>
+        <p:cNvGrpSpPr/>
+        <p:nvPr/>
+      </p:nvGrpSpPr>
+      <p:grpSpPr>
+        <a:xfrm xmlns:a="http://schemas.openxmlformats.org/drawingml/2006/main"/>
+      </p:grpSpPr>
+      <p:sp>
+        <p:nvSpPr>
+          <p:cNvPr id="2" name="Slide Image Placeholder 1"/>
+          <p:cNvSpPr>
+            <a:spLocks xmlns:a="http://schemas.openxmlformats.org/drawingml/2006/main" noGrp="1"/>
+          </p:cNvSpPr>
+          <p:nvPr>
+            <p:ph type="sldImg" idx="0"/>
+          </p:nvPr>
+        </p:nvSpPr>
+        <p:spPr/>
+      </p:sp>
+      <p:sp>
+        <p:nvSpPr>
+          <p:cNvPr id="3" name="Notes Placeholder 2"/>
+          <p:cNvSpPr>
+            <a:spLocks xmlns:a="http://schemas.openxmlformats.org/drawingml/2006/main" noGrp="1"/>
+          </p:cNvSpPr>
+          <p:nvPr>
+            <p:ph type="body" idx="1"/>
+          </p:nvPr>
+        </p:nvSpPr>
+        <p:spPr/>
+        <p:txBody>
+          <a:bodyPr xmlns:a="http://schemas.openxmlformats.org/drawingml/2006/main"/>
+          <a:lstStyle xmlns:a="http://schemas.openxmlformats.org/drawingml/2006/main"/>
+          <ns0:p xmlns:ns0="http://schemas.openxmlformats.org/drawingml/2006/main">
+            <ns0:r>
+              <ns0:t>30分钟议程：第13页，15–18分钟（本页3分钟）。</ns0:t>
+            </ns0:r>
+          </ns0:p>
+          <ns1:p xmlns:ns1="http://schemas.openxmlformats.org/drawingml/2006/main">
+            <ns1:r>
+              <ns1:t>讲解3分钟。院方团队为1位项目负责人加5类核心角色，并非要求新招六人。逐项解释责任与交接。谈话、咨询、患教、客服和医助中的协调职能整合为患者旅程管理师。视光与检查可共同承担评估责任，护理负责医疗随访，旅程管理师负责提醒与完成追踪。兼任须具备资质、合理工作量及备岗。内容依据院方PLS团队设计及Digital PLS网站PLS试点团队模块。</ns1:t>
+            </ns1:r>
+          </ns1:p>
+        </p:txBody>
+      </p:sp>
+      <p:sp>
+        <p:nvSpPr>
+          <p:cNvPr id="4" name="Slide Number Placeholder 3"/>
+          <p:cNvSpPr>
+            <a:spLocks xmlns:a="http://schemas.openxmlformats.org/drawingml/2006/main" noGrp="1"/>
+          </p:cNvSpPr>
+          <p:nvPr>
+            <p:ph type="sldNum" idx="5"/>
+          </p:nvPr>
+        </p:nvSpPr>
+        <p:spPr/>
+        <p:txBody>
+          <a:bodyPr xmlns:a="http://schemas.openxmlformats.org/drawingml/2006/main"/>
+          <a:lstStyle xmlns:a="http://schemas.openxmlformats.org/drawingml/2006/main"/>
+          <a:p xmlns:a="http://schemas.openxmlformats.org/drawingml/2006/main"/>
+        </p:txBody>
+      </p:sp>
+    </p:spTree>
+  </p:cSld>
+  <p:clrMapOvr>
+    <a:masterClrMapping xmlns:a="http://schemas.openxmlformats.org/drawingml/2006/main"/>
+  </p:clrMapOvr>
+</p:notes>
+</file>
+
+<file path=ppt/notesSlides/notesSlide18.xml><?xml version="1.0" encoding="utf-8"?>
+<p:notes xmlns:p="http://schemas.openxmlformats.org/presentationml/2006/main">
+  <p:cSld>
+    <p:spTree>
+      <p:nvGrpSpPr>
+        <p:cNvPr id="1" name=""/>
+        <p:cNvGrpSpPr/>
+        <p:nvPr/>
+      </p:nvGrpSpPr>
+      <p:grpSpPr>
+        <a:xfrm xmlns:a="http://schemas.openxmlformats.org/drawingml/2006/main"/>
+      </p:grpSpPr>
+      <p:sp>
+        <p:nvSpPr>
+          <p:cNvPr id="2" name="Slide Image Placeholder 1"/>
+          <p:cNvSpPr>
+            <a:spLocks xmlns:a="http://schemas.openxmlformats.org/drawingml/2006/main" noGrp="1"/>
+          </p:cNvSpPr>
+          <p:nvPr>
+            <p:ph type="sldImg" idx="0"/>
+          </p:nvPr>
+        </p:nvSpPr>
+        <p:spPr/>
+      </p:sp>
+      <p:sp>
+        <p:nvSpPr>
+          <p:cNvPr id="3" name="Notes Placeholder 2"/>
+          <p:cNvSpPr>
+            <a:spLocks xmlns:a="http://schemas.openxmlformats.org/drawingml/2006/main" noGrp="1"/>
+          </p:cNvSpPr>
+          <p:nvPr>
+            <p:ph type="body" idx="1"/>
+          </p:nvPr>
+        </p:nvSpPr>
+        <p:spPr/>
+        <p:txBody>
+          <a:bodyPr xmlns:a="http://schemas.openxmlformats.org/drawingml/2006/main"/>
+          <a:lstStyle xmlns:a="http://schemas.openxmlformats.org/drawingml/2006/main"/>
+          <ns0:p xmlns:ns0="http://schemas.openxmlformats.org/drawingml/2006/main">
+            <ns0:r>
+              <ns0:t>30分钟议程：第17页，24–29分钟（本页5分钟）。</ns0:t>
+            </ns0:r>
+          </ns0:p>
+          <ns1:p xmlns:ns1="http://schemas.openxmlformats.org/drawingml/2006/main">
+            <ns1:r>
+              <ns1:t>现场指定与记录5分钟。请CEO与院长逐行指定主责成员的姓名、部门职务、备岗及到位日期，记录人直接填写本页原生表格。多人共同承担时在主责单元格补写协作成员及分工；每类仍需一个主责人。询问被指定成员能否承担、服务时段与专业授权是否满足。尚待落实时记录待定事项、落实责任人及明确日期，不能把待定写成已到位。记录人逐项读回，CEO或院长确认后保存截图或PPT至会议纪要。建议会前准备可参与的院方人员名单，以便现场指定。</ns1:t>
+            </ns1:r>
+          </ns1:p>
         </p:txBody>
       </p:sp>
       <p:sp>
@@ -1025,11 +1217,16 @@
         <p:txBody>
           <a:bodyPr xmlns:a="http://schemas.openxmlformats.org/drawingml/2006/main"/>
           <a:lstStyle xmlns:a="http://schemas.openxmlformats.org/drawingml/2006/main"/>
-          <a:p xmlns:a="http://schemas.openxmlformats.org/drawingml/2006/main">
-            <a:r>
-              <a:t>这页建立全场决策主线。请院长先选一个最想讨论的问题，后面的内容都会回到这五个判断。</a:t>
-            </a:r>
-          </a:p>
+          <ns0:p xmlns:ns0="http://schemas.openxmlformats.org/drawingml/2006/main">
+            <ns0:r>
+              <ns0:t>30分钟议程：第2页，0.5–1分钟（本页0.5分钟）。</ns0:t>
+            </ns0:r>
+          </ns0:p>
+          <ns1:p xmlns:ns1="http://schemas.openxmlformats.org/drawingml/2006/main">
+            <ns1:r>
+              <ns1:t>这页建立全场决策主线。请院长先选一个最想讨论的问题，后面的内容都会回到这五个判断。</ns1:t>
+            </ns1:r>
+          </ns1:p>
         </p:txBody>
       </p:sp>
       <p:sp>
@@ -1095,11 +1292,16 @@
         <p:txBody>
           <a:bodyPr xmlns:a="http://schemas.openxmlformats.org/drawingml/2006/main"/>
           <a:lstStyle xmlns:a="http://schemas.openxmlformats.org/drawingml/2006/main"/>
-          <a:p xmlns:a="http://schemas.openxmlformats.org/drawingml/2006/main">
-            <a:r>
-              <a:t>定义时先讲中文名称和医院能力，再说明医疗边界。白内障和CLE/RLE共享能力系统，但适应证、替代方案与风险收益判断必须分别把关。</a:t>
-            </a:r>
-          </a:p>
+          <ns0:p xmlns:ns0="http://schemas.openxmlformats.org/drawingml/2006/main">
+            <ns0:r>
+              <ns0:t>30分钟议程：第3页，1–2.5分钟（本页1.5分钟）。</ns0:t>
+            </ns0:r>
+          </ns0:p>
+          <ns1:p xmlns:ns1="http://schemas.openxmlformats.org/drawingml/2006/main">
+            <ns1:r>
+              <ns1:t>定义时先讲中文名称和医院能力，再说明医疗边界。白内障和CLE/RLE共享能力系统，但适应证、替代方案与风险收益判断必须分别把关。</ns1:t>
+            </ns1:r>
+          </ns1:p>
         </p:txBody>
       </p:sp>
       <p:sp>
@@ -1165,11 +1367,16 @@
         <p:txBody>
           <a:bodyPr xmlns:a="http://schemas.openxmlformats.org/drawingml/2006/main"/>
           <a:lstStyle xmlns:a="http://schemas.openxmlformats.org/drawingml/2006/main"/>
-          <a:p xmlns:a="http://schemas.openxmlformats.org/drawingml/2006/main">
-            <a:r>
-              <a:t>这一页不使用未经核实的市场数字。把变化讲成院方能够观察到的患者问题和组织问题。</a:t>
-            </a:r>
-          </a:p>
+          <ns0:p xmlns:ns0="http://schemas.openxmlformats.org/drawingml/2006/main">
+            <ns0:r>
+              <ns0:t>30分钟议程：第4页，2.5–3.5分钟（本页1分钟）。</ns0:t>
+            </ns0:r>
+          </ns0:p>
+          <ns1:p xmlns:ns1="http://schemas.openxmlformats.org/drawingml/2006/main">
+            <ns1:r>
+              <ns1:t>这一页不使用未经核实的市场数字。把变化讲成院方能够观察到的患者问题和组织问题。</ns1:t>
+            </ns1:r>
+          </ns1:p>
         </p:txBody>
       </p:sp>
       <p:sp>
@@ -1235,11 +1442,16 @@
         <p:txBody>
           <a:bodyPr xmlns:a="http://schemas.openxmlformats.org/drawingml/2006/main"/>
           <a:lstStyle xmlns:a="http://schemas.openxmlformats.org/drawingml/2006/main"/>
-          <a:p xmlns:a="http://schemas.openxmlformats.org/drawingml/2006/main">
-            <a:r>
-              <a:t>依次解释：生活目标被记录；收益、局限、风险、费用与替代方案被说清；检查和手术标准可验证；患者可以选择、暂缓或改变方案；术后问题有人负责。</a:t>
-            </a:r>
-          </a:p>
+          <ns0:p xmlns:ns0="http://schemas.openxmlformats.org/drawingml/2006/main">
+            <ns0:r>
+              <ns0:t>30分钟议程：第5页，3.5–4.5分钟（本页1分钟）。</ns0:t>
+            </ns0:r>
+          </ns0:p>
+          <ns1:p xmlns:ns1="http://schemas.openxmlformats.org/drawingml/2006/main">
+            <ns1:r>
+              <ns1:t>依次解释：生活目标被记录；收益、局限、风险、费用与替代方案被说清；检查和手术标准可验证；患者可以选择、暂缓或改变方案；术后问题有人负责。</ns1:t>
+            </ns1:r>
+          </ns1:p>
         </p:txBody>
       </p:sp>
       <p:sp>
@@ -1305,11 +1517,16 @@
         <p:txBody>
           <a:bodyPr xmlns:a="http://schemas.openxmlformats.org/drawingml/2006/main"/>
           <a:lstStyle xmlns:a="http://schemas.openxmlformats.org/drawingml/2006/main"/>
-          <a:p xmlns:a="http://schemas.openxmlformats.org/drawingml/2006/main">
-            <a:r>
-              <a:t>经营价值必须放在患者价值之后。不要把自费比例或某一产品使用量作为唯一成功指标。</a:t>
-            </a:r>
-          </a:p>
+          <ns0:p xmlns:ns0="http://schemas.openxmlformats.org/drawingml/2006/main">
+            <ns0:r>
+              <ns0:t>30分钟议程：第6页，4.5–5.5分钟（本页1分钟）。</ns0:t>
+            </ns0:r>
+          </ns0:p>
+          <ns1:p xmlns:ns1="http://schemas.openxmlformats.org/drawingml/2006/main">
+            <ns1:r>
+              <ns1:t>经营价值必须放在患者价值之后。不要把自费比例或某一产品使用量作为唯一成功指标。</ns1:t>
+            </ns1:r>
+          </ns1:p>
         </p:txBody>
       </p:sp>
       <p:sp>
@@ -1375,11 +1592,16 @@
         <p:txBody>
           <a:bodyPr xmlns:a="http://schemas.openxmlformats.org/drawingml/2006/main"/>
           <a:lstStyle xmlns:a="http://schemas.openxmlformats.org/drawingml/2006/main"/>
-          <a:p xmlns:a="http://schemas.openxmlformats.org/drawingml/2006/main">
-            <a:r>
-              <a:t>医生价值不等于商业转化。重点是临床信心、可信团队输入和可复盘的专业成长。</a:t>
-            </a:r>
-          </a:p>
+          <ns0:p xmlns:ns0="http://schemas.openxmlformats.org/drawingml/2006/main">
+            <ns0:r>
+              <ns0:t>30分钟议程：第7页，5.5–6.5分钟（本页1分钟）。</ns0:t>
+            </ns0:r>
+          </ns0:p>
+          <ns1:p xmlns:ns1="http://schemas.openxmlformats.org/drawingml/2006/main">
+            <ns1:r>
+              <ns1:t>医生价值不等于商业转化。重点是临床信心、可信团队输入和可复盘的专业成长。</ns1:t>
+            </ns1:r>
+          </ns1:p>
         </p:txBody>
       </p:sp>
       <p:sp>
@@ -1445,11 +1667,16 @@
         <p:txBody>
           <a:bodyPr xmlns:a="http://schemas.openxmlformats.org/drawingml/2006/main"/>
           <a:lstStyle xmlns:a="http://schemas.openxmlformats.org/drawingml/2006/main"/>
-          <a:p xmlns:a="http://schemas.openxmlformats.org/drawingml/2006/main">
-            <a:r>
-              <a:t>这一页主动讲清眼力健的商业身份和合作边界。透明比回避更能建立管理层信任。</a:t>
-            </a:r>
-          </a:p>
+          <ns0:p xmlns:ns0="http://schemas.openxmlformats.org/drawingml/2006/main">
+            <ns0:r>
+              <ns0:t>30分钟议程：第8页，6.5–7.5分钟（本页1分钟）。</ns0:t>
+            </ns0:r>
+          </ns0:p>
+          <ns1:p xmlns:ns1="http://schemas.openxmlformats.org/drawingml/2006/main">
+            <ns1:r>
+              <ns1:t>这一页主动讲清眼力健的商业身份和合作边界。透明比回避更能建立管理层信任。</ns1:t>
+            </ns1:r>
+          </ns1:p>
         </p:txBody>
       </p:sp>
       <p:sp>
@@ -1515,11 +1742,16 @@
         <p:txBody>
           <a:bodyPr xmlns:a="http://schemas.openxmlformats.org/drawingml/2006/main"/>
           <a:lstStyle xmlns:a="http://schemas.openxmlformats.org/drawingml/2006/main"/>
-          <a:p xmlns:a="http://schemas.openxmlformats.org/drawingml/2006/main">
-            <a:r>
-              <a:t>六大支柱是本套材料的核心骨架。可根据院方时间选择展开程度。</a:t>
-            </a:r>
-          </a:p>
+          <ns0:p xmlns:ns0="http://schemas.openxmlformats.org/drawingml/2006/main">
+            <ns0:r>
+              <ns0:t>30分钟议程：第9页，7.5–9.5分钟（本页2分钟）。</ns0:t>
+            </ns0:r>
+          </ns0:p>
+          <ns1:p xmlns:ns1="http://schemas.openxmlformats.org/drawingml/2006/main">
+            <ns1:r>
+              <ns1:t>六大支柱是本套材料的核心骨架。可根据院方时间选择展开程度。</ns1:t>
+            </ns1:r>
+          </ns1:p>
         </p:txBody>
       </p:sp>
       <p:sp>
@@ -1585,7 +1817,7 @@
   </p:cSld>
   <p:clrMap bg1="lt1" tx1="dk1" bg2="lt2" tx2="dk2" accent1="accent1" accent2="accent2" accent3="accent3" accent4="accent4" accent5="accent5" accent6="accent6" hlink="hlink" folHlink="folHlink"/>
   <p:sldLayoutIdLst>
-    <p:sldLayoutId xmlns:r="http://schemas.openxmlformats.org/officeDocument/2006/relationships" id="2147483649" r:id="Ra1cb8c8121e04fdd"/>
+    <p:sldLayoutId xmlns:r="http://schemas.openxmlformats.org/officeDocument/2006/relationships" id="2147483649" r:id="Rfa7b94d0c8c14526"/>
   </p:sldLayoutIdLst>
   <p:txStyles>
     <p:titleStyle>
@@ -2136,7 +2368,7 @@
           <p:cNvPr id="10" name="">
             <a:extLst xmlns:a="http://schemas.openxmlformats.org/drawingml/2006/main">
               <a:ext uri="{FF2B5EF4-FFF2-40B4-BE49-F238E27FC236}">
-                <a16:creationId xmlns:a16="http://schemas.microsoft.com/office/drawing/2014/main" id="{443416EB-4ABF-4A2D-BF63-562B92AC758E}"/>
+                <a16:creationId xmlns:a16="http://schemas.microsoft.com/office/drawing/2014/main" id="{ABF42493-1DBD-48D6-A819-C2A9A31CBCEC}"/>
               </a:ext>
             </a:extLst>
           </p:cNvPr>
@@ -2168,7 +2400,7 @@
           <p:cNvPr id="2" name="">
             <a:extLst xmlns:a="http://schemas.openxmlformats.org/drawingml/2006/main">
               <a:ext uri="{FF2B5EF4-FFF2-40B4-BE49-F238E27FC236}">
-                <a16:creationId xmlns:a16="http://schemas.microsoft.com/office/drawing/2014/main" id="{C8954922-EA40-4C67-A83E-D289CD84DB51}"/>
+                <a16:creationId xmlns:a16="http://schemas.microsoft.com/office/drawing/2014/main" id="{ECC6594E-3DED-45BD-8455-C826A5C75830}"/>
               </a:ext>
             </a:extLst>
           </p:cNvPr>
@@ -2200,7 +2432,7 @@
           <p:cNvPr id="3" name="">
             <a:extLst xmlns:a="http://schemas.openxmlformats.org/drawingml/2006/main">
               <a:ext uri="{FF2B5EF4-FFF2-40B4-BE49-F238E27FC236}">
-                <a16:creationId xmlns:a16="http://schemas.microsoft.com/office/drawing/2014/main" id="{31E55EE6-F887-48B4-9A5E-7055795839C6}"/>
+                <a16:creationId xmlns:a16="http://schemas.microsoft.com/office/drawing/2014/main" id="{53D7D4F9-3076-407A-A426-CB5E0DDE1AA8}"/>
               </a:ext>
             </a:extLst>
           </p:cNvPr>
@@ -2257,7 +2489,7 @@
           <p:cNvPr id="4" name="">
             <a:extLst xmlns:a="http://schemas.openxmlformats.org/drawingml/2006/main">
               <a:ext uri="{FF2B5EF4-FFF2-40B4-BE49-F238E27FC236}">
-                <a16:creationId xmlns:a16="http://schemas.microsoft.com/office/drawing/2014/main" id="{7864A0DD-0836-4452-8F7A-D9409BD2C05D}"/>
+                <a16:creationId xmlns:a16="http://schemas.microsoft.com/office/drawing/2014/main" id="{FF0041D1-7AF6-4D75-9BAD-D2C5B2A74355}"/>
               </a:ext>
             </a:extLst>
           </p:cNvPr>
@@ -2314,7 +2546,7 @@
           <p:cNvPr id="5" name="">
             <a:extLst xmlns:a="http://schemas.openxmlformats.org/drawingml/2006/main">
               <a:ext uri="{FF2B5EF4-FFF2-40B4-BE49-F238E27FC236}">
-                <a16:creationId xmlns:a16="http://schemas.microsoft.com/office/drawing/2014/main" id="{17286632-434A-4CDC-953F-943989A82F90}"/>
+                <a16:creationId xmlns:a16="http://schemas.microsoft.com/office/drawing/2014/main" id="{79CE625C-52AD-486F-A365-A22A4BD42407}"/>
               </a:ext>
             </a:extLst>
           </p:cNvPr>
@@ -2371,7 +2603,7 @@
           <p:cNvPr id="6" name="">
             <a:extLst xmlns:a="http://schemas.openxmlformats.org/drawingml/2006/main">
               <a:ext uri="{FF2B5EF4-FFF2-40B4-BE49-F238E27FC236}">
-                <a16:creationId xmlns:a16="http://schemas.microsoft.com/office/drawing/2014/main" id="{9617F493-A8C4-4A7A-9E0C-BD43F78AC7FF}"/>
+                <a16:creationId xmlns:a16="http://schemas.microsoft.com/office/drawing/2014/main" id="{85ABF005-A5CC-4A4A-B18E-6B42E1F92218}"/>
               </a:ext>
             </a:extLst>
           </p:cNvPr>
@@ -2401,7 +2633,7 @@
           <p:cNvPr id="7" name="">
             <a:extLst xmlns:a="http://schemas.openxmlformats.org/drawingml/2006/main">
               <a:ext uri="{FF2B5EF4-FFF2-40B4-BE49-F238E27FC236}">
-                <a16:creationId xmlns:a16="http://schemas.microsoft.com/office/drawing/2014/main" id="{899A03CB-8ACA-48DC-97F2-EE88C0BE2214}"/>
+                <a16:creationId xmlns:a16="http://schemas.microsoft.com/office/drawing/2014/main" id="{D3D1314D-DBE9-49A8-BC05-9DA13B329091}"/>
               </a:ext>
             </a:extLst>
           </p:cNvPr>
@@ -2462,16 +2694,13 @@
           <p:nvPr/>
         </p:nvPicPr>
         <p:blipFill>
-          <a:blip xmlns:r="http://schemas.openxmlformats.org/officeDocument/2006/relationships" xmlns:a="http://schemas.openxmlformats.org/drawingml/2006/main" r:embed="R66dca81b901d4993"/>
-          <a:srcRect xmlns:a="http://schemas.openxmlformats.org/drawingml/2006/main" l="0" t="15663" r="0" b="15663"/>
-          <a:stretch xmlns:a="http://schemas.openxmlformats.org/drawingml/2006/main">
-            <a:fillRect l="0" t="0" r="0" b="0"/>
-          </a:stretch>
+          <a:blip xmlns:r="http://schemas.openxmlformats.org/officeDocument/2006/relationships" xmlns:a="http://schemas.openxmlformats.org/drawingml/2006/main" r:embed="Rd27cbc32c7fe4a5f"/>
+          <a:stretch xmlns:a="http://schemas.openxmlformats.org/drawingml/2006/main"/>
         </p:blipFill>
         <p:spPr>
           <a:xfrm xmlns:a="http://schemas.openxmlformats.org/drawingml/2006/main">
-            <a:off x="10039350" y="323850"/>
-            <a:ext cx="1581150" cy="361950"/>
+            <a:off x="10287000" y="352758"/>
+            <a:ext cx="1333500" cy="380333"/>
           </a:xfrm>
           <a:prstGeom xmlns:a="http://schemas.openxmlformats.org/drawingml/2006/main" prst="rect">
             <a:avLst/>
@@ -2483,7 +2712,7 @@
           <p:cNvPr id="9" name="">
             <a:extLst xmlns:a="http://schemas.openxmlformats.org/drawingml/2006/main">
               <a:ext uri="{FF2B5EF4-FFF2-40B4-BE49-F238E27FC236}">
-                <a16:creationId xmlns:a16="http://schemas.microsoft.com/office/drawing/2014/main" id="{AECC3398-2AC2-4197-8EBA-C79A757582FF}"/>
+                <a16:creationId xmlns:a16="http://schemas.microsoft.com/office/drawing/2014/main" id="{DDCABFC5-E310-44F9-9EAA-37937597056B}"/>
               </a:ext>
             </a:extLst>
           </p:cNvPr>
@@ -2538,7 +2767,7 @@
     </p:spTree>
     <p:extLst>
       <p:ext uri="{BB962C8B-B14F-4D97-AF65-F5344CB8AC3E}">
-        <p14:creationId xmlns:p14="http://schemas.microsoft.com/office/powerpoint/2010/main" val="1824081268"/>
+        <p14:creationId xmlns:p14="http://schemas.microsoft.com/office/powerpoint/2010/main" val="1635119192"/>
       </p:ext>
     </p:extLst>
   </p:cSld>
@@ -2569,7 +2798,7 @@
           <p:cNvPr id="21" name="">
             <a:extLst xmlns:a="http://schemas.openxmlformats.org/drawingml/2006/main">
               <a:ext uri="{FF2B5EF4-FFF2-40B4-BE49-F238E27FC236}">
-                <a16:creationId xmlns:a16="http://schemas.microsoft.com/office/drawing/2014/main" id="{27387A4A-45B8-4683-AEB7-E8E0C4A2DDBC}"/>
+                <a16:creationId xmlns:a16="http://schemas.microsoft.com/office/drawing/2014/main" id="{5433AA92-341E-4F21-8A9F-12F2E7C01FF7}"/>
               </a:ext>
             </a:extLst>
           </p:cNvPr>
@@ -2601,7 +2830,7 @@
           <p:cNvPr id="2" name="">
             <a:extLst xmlns:a="http://schemas.openxmlformats.org/drawingml/2006/main">
               <a:ext uri="{FF2B5EF4-FFF2-40B4-BE49-F238E27FC236}">
-                <a16:creationId xmlns:a16="http://schemas.microsoft.com/office/drawing/2014/main" id="{E5731EEF-0D28-494D-9BCC-821F8EA307F1}"/>
+                <a16:creationId xmlns:a16="http://schemas.microsoft.com/office/drawing/2014/main" id="{49717720-D5AB-4ABB-9EFA-AD55D23876F5}"/>
               </a:ext>
             </a:extLst>
           </p:cNvPr>
@@ -2662,16 +2891,13 @@
           <p:nvPr/>
         </p:nvPicPr>
         <p:blipFill>
-          <a:blip xmlns:r="http://schemas.openxmlformats.org/officeDocument/2006/relationships" xmlns:a="http://schemas.openxmlformats.org/drawingml/2006/main" r:embed="Rd88e724338b84c4f"/>
-          <a:srcRect xmlns:a="http://schemas.openxmlformats.org/drawingml/2006/main" l="0" t="15663" r="0" b="15663"/>
-          <a:stretch xmlns:a="http://schemas.openxmlformats.org/drawingml/2006/main">
-            <a:fillRect l="0" t="0" r="0" b="0"/>
-          </a:stretch>
+          <a:blip xmlns:r="http://schemas.openxmlformats.org/officeDocument/2006/relationships" xmlns:a="http://schemas.openxmlformats.org/drawingml/2006/main" r:embed="Rab51bb2a50364250"/>
+          <a:stretch xmlns:a="http://schemas.openxmlformats.org/drawingml/2006/main"/>
         </p:blipFill>
         <p:spPr>
           <a:xfrm xmlns:a="http://schemas.openxmlformats.org/drawingml/2006/main">
-            <a:off x="10039350" y="323850"/>
-            <a:ext cx="1581150" cy="361950"/>
+            <a:off x="10287000" y="352758"/>
+            <a:ext cx="1333500" cy="380333"/>
           </a:xfrm>
           <a:prstGeom xmlns:a="http://schemas.openxmlformats.org/drawingml/2006/main" prst="rect">
             <a:avLst/>
@@ -2683,7 +2909,7 @@
           <p:cNvPr id="4" name="">
             <a:extLst xmlns:a="http://schemas.openxmlformats.org/drawingml/2006/main">
               <a:ext uri="{FF2B5EF4-FFF2-40B4-BE49-F238E27FC236}">
-                <a16:creationId xmlns:a16="http://schemas.microsoft.com/office/drawing/2014/main" id="{3CF1BC2E-F2A1-4757-B37F-10135F73AA51}"/>
+                <a16:creationId xmlns:a16="http://schemas.microsoft.com/office/drawing/2014/main" id="{EAF1FE3E-9169-4D5D-827A-1E6AAC6156B4}"/>
               </a:ext>
             </a:extLst>
           </p:cNvPr>
@@ -2740,7 +2966,7 @@
           <p:cNvPr id="5" name="">
             <a:extLst xmlns:a="http://schemas.openxmlformats.org/drawingml/2006/main">
               <a:ext uri="{FF2B5EF4-FFF2-40B4-BE49-F238E27FC236}">
-                <a16:creationId xmlns:a16="http://schemas.microsoft.com/office/drawing/2014/main" id="{B4629F99-07C2-4A69-B32D-F344A80E09D1}"/>
+                <a16:creationId xmlns:a16="http://schemas.microsoft.com/office/drawing/2014/main" id="{D1A7B39E-E5E1-45FF-8DE7-9C545A0AB755}"/>
               </a:ext>
             </a:extLst>
           </p:cNvPr>
@@ -2772,7 +2998,7 @@
           <p:cNvPr id="6" name="">
             <a:extLst xmlns:a="http://schemas.openxmlformats.org/drawingml/2006/main">
               <a:ext uri="{FF2B5EF4-FFF2-40B4-BE49-F238E27FC236}">
-                <a16:creationId xmlns:a16="http://schemas.microsoft.com/office/drawing/2014/main" id="{8E9B7E57-C8FA-4B32-A00C-944C72F6D37E}"/>
+                <a16:creationId xmlns:a16="http://schemas.microsoft.com/office/drawing/2014/main" id="{82997CED-2F45-45E2-A343-D3E6E45FC93C}"/>
               </a:ext>
             </a:extLst>
           </p:cNvPr>
@@ -2829,7 +3055,7 @@
           <p:cNvPr id="7" name="">
             <a:extLst xmlns:a="http://schemas.openxmlformats.org/drawingml/2006/main">
               <a:ext uri="{FF2B5EF4-FFF2-40B4-BE49-F238E27FC236}">
-                <a16:creationId xmlns:a16="http://schemas.microsoft.com/office/drawing/2014/main" id="{5FD0F7C2-72C9-49DE-8015-561398091D8F}"/>
+                <a16:creationId xmlns:a16="http://schemas.microsoft.com/office/drawing/2014/main" id="{2101B932-C83E-41D3-A559-D39B6D0DDCC1}"/>
               </a:ext>
             </a:extLst>
           </p:cNvPr>
@@ -2886,7 +3112,7 @@
           <p:cNvPr id="8" name="">
             <a:extLst xmlns:a="http://schemas.openxmlformats.org/drawingml/2006/main">
               <a:ext uri="{FF2B5EF4-FFF2-40B4-BE49-F238E27FC236}">
-                <a16:creationId xmlns:a16="http://schemas.microsoft.com/office/drawing/2014/main" id="{34C6BCF0-F2C6-4564-912A-AE373908E34F}"/>
+                <a16:creationId xmlns:a16="http://schemas.microsoft.com/office/drawing/2014/main" id="{D065E642-E1A4-40C3-A82D-1DAC7FC0B251}"/>
               </a:ext>
             </a:extLst>
           </p:cNvPr>
@@ -2918,7 +3144,7 @@
           <p:cNvPr id="9" name="">
             <a:extLst xmlns:a="http://schemas.openxmlformats.org/drawingml/2006/main">
               <a:ext uri="{FF2B5EF4-FFF2-40B4-BE49-F238E27FC236}">
-                <a16:creationId xmlns:a16="http://schemas.microsoft.com/office/drawing/2014/main" id="{5C550819-E013-4C35-B9B4-A1916BCF7F4B}"/>
+                <a16:creationId xmlns:a16="http://schemas.microsoft.com/office/drawing/2014/main" id="{F540C0DB-03C8-4191-9211-5BA86EACC060}"/>
               </a:ext>
             </a:extLst>
           </p:cNvPr>
@@ -2975,7 +3201,7 @@
           <p:cNvPr id="10" name="">
             <a:extLst xmlns:a="http://schemas.openxmlformats.org/drawingml/2006/main">
               <a:ext uri="{FF2B5EF4-FFF2-40B4-BE49-F238E27FC236}">
-                <a16:creationId xmlns:a16="http://schemas.microsoft.com/office/drawing/2014/main" id="{E768066E-38AF-406E-8547-5BD879825850}"/>
+                <a16:creationId xmlns:a16="http://schemas.microsoft.com/office/drawing/2014/main" id="{B9C9E020-CD53-4D5A-A76F-E0D233B04070}"/>
               </a:ext>
             </a:extLst>
           </p:cNvPr>
@@ -3032,7 +3258,7 @@
           <p:cNvPr id="11" name="">
             <a:extLst xmlns:a="http://schemas.openxmlformats.org/drawingml/2006/main">
               <a:ext uri="{FF2B5EF4-FFF2-40B4-BE49-F238E27FC236}">
-                <a16:creationId xmlns:a16="http://schemas.microsoft.com/office/drawing/2014/main" id="{49EC75C7-527E-4BAD-8588-4E0A5AD85DDB}"/>
+                <a16:creationId xmlns:a16="http://schemas.microsoft.com/office/drawing/2014/main" id="{5D73BD1E-1216-4399-B3EA-E96D0F7559AB}"/>
               </a:ext>
             </a:extLst>
           </p:cNvPr>
@@ -3064,7 +3290,7 @@
           <p:cNvPr id="12" name="">
             <a:extLst xmlns:a="http://schemas.openxmlformats.org/drawingml/2006/main">
               <a:ext uri="{FF2B5EF4-FFF2-40B4-BE49-F238E27FC236}">
-                <a16:creationId xmlns:a16="http://schemas.microsoft.com/office/drawing/2014/main" id="{A75E4049-8EBC-435E-B1FB-7EF8006EA482}"/>
+                <a16:creationId xmlns:a16="http://schemas.microsoft.com/office/drawing/2014/main" id="{2DE69C82-1A51-459C-954C-3469DC2BD38A}"/>
               </a:ext>
             </a:extLst>
           </p:cNvPr>
@@ -3121,7 +3347,7 @@
           <p:cNvPr id="13" name="">
             <a:extLst xmlns:a="http://schemas.openxmlformats.org/drawingml/2006/main">
               <a:ext uri="{FF2B5EF4-FFF2-40B4-BE49-F238E27FC236}">
-                <a16:creationId xmlns:a16="http://schemas.microsoft.com/office/drawing/2014/main" id="{34298D2F-0C71-4577-86D0-E7D80A7B7B07}"/>
+                <a16:creationId xmlns:a16="http://schemas.microsoft.com/office/drawing/2014/main" id="{E5542946-F9FA-4C32-AC76-419A20D1F290}"/>
               </a:ext>
             </a:extLst>
           </p:cNvPr>
@@ -3178,7 +3404,7 @@
           <p:cNvPr id="14" name="">
             <a:extLst xmlns:a="http://schemas.openxmlformats.org/drawingml/2006/main">
               <a:ext uri="{FF2B5EF4-FFF2-40B4-BE49-F238E27FC236}">
-                <a16:creationId xmlns:a16="http://schemas.microsoft.com/office/drawing/2014/main" id="{F4739B00-8290-4F1A-B6BF-2C460D3458B5}"/>
+                <a16:creationId xmlns:a16="http://schemas.microsoft.com/office/drawing/2014/main" id="{6504F3AB-FDD9-4D88-9B65-5B624C63385B}"/>
               </a:ext>
             </a:extLst>
           </p:cNvPr>
@@ -3210,7 +3436,7 @@
           <p:cNvPr id="15" name="">
             <a:extLst xmlns:a="http://schemas.openxmlformats.org/drawingml/2006/main">
               <a:ext uri="{FF2B5EF4-FFF2-40B4-BE49-F238E27FC236}">
-                <a16:creationId xmlns:a16="http://schemas.microsoft.com/office/drawing/2014/main" id="{19F5B706-2526-41EA-8634-00CC7AA10AE0}"/>
+                <a16:creationId xmlns:a16="http://schemas.microsoft.com/office/drawing/2014/main" id="{B9893D64-6EB3-41FA-B915-E5666284A515}"/>
               </a:ext>
             </a:extLst>
           </p:cNvPr>
@@ -3267,7 +3493,7 @@
           <p:cNvPr id="16" name="">
             <a:extLst xmlns:a="http://schemas.openxmlformats.org/drawingml/2006/main">
               <a:ext uri="{FF2B5EF4-FFF2-40B4-BE49-F238E27FC236}">
-                <a16:creationId xmlns:a16="http://schemas.microsoft.com/office/drawing/2014/main" id="{1FECAE8D-402A-42F7-9857-7C7221871F53}"/>
+                <a16:creationId xmlns:a16="http://schemas.microsoft.com/office/drawing/2014/main" id="{6DF6BA1D-DA50-46DF-B4D5-071CACEC6D97}"/>
               </a:ext>
             </a:extLst>
           </p:cNvPr>
@@ -3324,7 +3550,7 @@
           <p:cNvPr id="17" name="">
             <a:extLst xmlns:a="http://schemas.openxmlformats.org/drawingml/2006/main">
               <a:ext uri="{FF2B5EF4-FFF2-40B4-BE49-F238E27FC236}">
-                <a16:creationId xmlns:a16="http://schemas.microsoft.com/office/drawing/2014/main" id="{58BA7298-29DB-494E-AB0D-67F7E7465959}"/>
+                <a16:creationId xmlns:a16="http://schemas.microsoft.com/office/drawing/2014/main" id="{F329763A-8562-4150-B85A-CCABBA5F2329}"/>
               </a:ext>
             </a:extLst>
           </p:cNvPr>
@@ -3356,7 +3582,7 @@
           <p:cNvPr id="18" name="">
             <a:extLst xmlns:a="http://schemas.openxmlformats.org/drawingml/2006/main">
               <a:ext uri="{FF2B5EF4-FFF2-40B4-BE49-F238E27FC236}">
-                <a16:creationId xmlns:a16="http://schemas.microsoft.com/office/drawing/2014/main" id="{4524C50F-35D5-40E9-9570-CD933F776AF6}"/>
+                <a16:creationId xmlns:a16="http://schemas.microsoft.com/office/drawing/2014/main" id="{FA2CB686-E980-4A61-B580-85AFE006BD51}"/>
               </a:ext>
             </a:extLst>
           </p:cNvPr>
@@ -3413,7 +3639,7 @@
           <p:cNvPr id="19" name="">
             <a:extLst xmlns:a="http://schemas.openxmlformats.org/drawingml/2006/main">
               <a:ext uri="{FF2B5EF4-FFF2-40B4-BE49-F238E27FC236}">
-                <a16:creationId xmlns:a16="http://schemas.microsoft.com/office/drawing/2014/main" id="{B287C2DA-9F38-49E3-B5C8-7793737FE111}"/>
+                <a16:creationId xmlns:a16="http://schemas.microsoft.com/office/drawing/2014/main" id="{8E2A503F-40BD-46EE-A3BD-C66F05C29421}"/>
               </a:ext>
             </a:extLst>
           </p:cNvPr>
@@ -3470,7 +3696,7 @@
           <p:cNvPr id="20" name="">
             <a:extLst xmlns:a="http://schemas.openxmlformats.org/drawingml/2006/main">
               <a:ext uri="{FF2B5EF4-FFF2-40B4-BE49-F238E27FC236}">
-                <a16:creationId xmlns:a16="http://schemas.microsoft.com/office/drawing/2014/main" id="{8143F0D5-9091-449E-94B5-3F545106E62B}"/>
+                <a16:creationId xmlns:a16="http://schemas.microsoft.com/office/drawing/2014/main" id="{A9592CBA-C807-481D-A3E4-48F05BFEAEE9}"/>
               </a:ext>
             </a:extLst>
           </p:cNvPr>
@@ -3525,7 +3751,7 @@
     </p:spTree>
     <p:extLst>
       <p:ext uri="{BB962C8B-B14F-4D97-AF65-F5344CB8AC3E}">
-        <p14:creationId xmlns:p14="http://schemas.microsoft.com/office/powerpoint/2010/main" val="1720346417"/>
+        <p14:creationId xmlns:p14="http://schemas.microsoft.com/office/powerpoint/2010/main" val="122415136"/>
       </p:ext>
     </p:extLst>
   </p:cSld>
@@ -3556,7 +3782,7 @@
           <p:cNvPr id="6" name="">
             <a:extLst xmlns:a="http://schemas.openxmlformats.org/drawingml/2006/main">
               <a:ext uri="{FF2B5EF4-FFF2-40B4-BE49-F238E27FC236}">
-                <a16:creationId xmlns:a16="http://schemas.microsoft.com/office/drawing/2014/main" id="{87A1FA88-6B55-429A-A0E5-D75A43B346F5}"/>
+                <a16:creationId xmlns:a16="http://schemas.microsoft.com/office/drawing/2014/main" id="{B538BE89-1666-42EE-8068-91554D71319A}"/>
               </a:ext>
             </a:extLst>
           </p:cNvPr>
@@ -3588,7 +3814,7 @@
           <p:cNvPr id="2" name="">
             <a:extLst xmlns:a="http://schemas.openxmlformats.org/drawingml/2006/main">
               <a:ext uri="{FF2B5EF4-FFF2-40B4-BE49-F238E27FC236}">
-                <a16:creationId xmlns:a16="http://schemas.microsoft.com/office/drawing/2014/main" id="{76A74420-38A4-4DF7-842A-79EA53F86D04}"/>
+                <a16:creationId xmlns:a16="http://schemas.microsoft.com/office/drawing/2014/main" id="{DDAD78D0-AEF4-43DB-AFAB-A0B16E917FAE}"/>
               </a:ext>
             </a:extLst>
           </p:cNvPr>
@@ -3649,16 +3875,13 @@
           <p:nvPr/>
         </p:nvPicPr>
         <p:blipFill>
-          <a:blip xmlns:r="http://schemas.openxmlformats.org/officeDocument/2006/relationships" xmlns:a="http://schemas.openxmlformats.org/drawingml/2006/main" r:embed="R640f0b42e2024fef"/>
-          <a:srcRect xmlns:a="http://schemas.openxmlformats.org/drawingml/2006/main" l="0" t="15663" r="0" b="15663"/>
-          <a:stretch xmlns:a="http://schemas.openxmlformats.org/drawingml/2006/main">
-            <a:fillRect l="0" t="0" r="0" b="0"/>
-          </a:stretch>
+          <a:blip xmlns:r="http://schemas.openxmlformats.org/officeDocument/2006/relationships" xmlns:a="http://schemas.openxmlformats.org/drawingml/2006/main" r:embed="Rfa342ac70c3b4d07"/>
+          <a:stretch xmlns:a="http://schemas.openxmlformats.org/drawingml/2006/main"/>
         </p:blipFill>
         <p:spPr>
           <a:xfrm xmlns:a="http://schemas.openxmlformats.org/drawingml/2006/main">
-            <a:off x="10039350" y="323850"/>
-            <a:ext cx="1581150" cy="361950"/>
+            <a:off x="10287000" y="352758"/>
+            <a:ext cx="1333500" cy="380333"/>
           </a:xfrm>
           <a:prstGeom xmlns:a="http://schemas.openxmlformats.org/drawingml/2006/main" prst="rect">
             <a:avLst/>
@@ -3670,7 +3893,7 @@
           <p:cNvPr id="4" name="">
             <a:extLst xmlns:a="http://schemas.openxmlformats.org/drawingml/2006/main">
               <a:ext uri="{FF2B5EF4-FFF2-40B4-BE49-F238E27FC236}">
-                <a16:creationId xmlns:a16="http://schemas.microsoft.com/office/drawing/2014/main" id="{2E1AF833-B135-4774-A1EA-941BC03AB743}"/>
+                <a16:creationId xmlns:a16="http://schemas.microsoft.com/office/drawing/2014/main" id="{2EB5F05F-9ADE-4B26-8DFA-D8EC2F53D96F}"/>
               </a:ext>
             </a:extLst>
           </p:cNvPr>
@@ -3727,7 +3950,7 @@
           <p:cNvPr id="5" name="">
             <a:extLst xmlns:a="http://schemas.openxmlformats.org/drawingml/2006/main">
               <a:ext uri="{FF2B5EF4-FFF2-40B4-BE49-F238E27FC236}">
-                <a16:creationId xmlns:a16="http://schemas.microsoft.com/office/drawing/2014/main" id="{811F7F1C-3DFA-4FB1-BA66-8008E2CB5DDF}"/>
+                <a16:creationId xmlns:a16="http://schemas.microsoft.com/office/drawing/2014/main" id="{E4B8F120-F514-4815-995E-0383628F900A}"/>
               </a:ext>
             </a:extLst>
           </p:cNvPr>
@@ -3840,7 +4063,7 @@
     </p:spTree>
     <p:extLst>
       <p:ext uri="{BB962C8B-B14F-4D97-AF65-F5344CB8AC3E}">
-        <p14:creationId xmlns:p14="http://schemas.microsoft.com/office/powerpoint/2010/main" val="951057789"/>
+        <p14:creationId xmlns:p14="http://schemas.microsoft.com/office/powerpoint/2010/main" val="887330424"/>
       </p:ext>
     </p:extLst>
   </p:cSld>
@@ -3871,7 +4094,7 @@
           <p:cNvPr id="6" name="">
             <a:extLst xmlns:a="http://schemas.openxmlformats.org/drawingml/2006/main">
               <a:ext uri="{FF2B5EF4-FFF2-40B4-BE49-F238E27FC236}">
-                <a16:creationId xmlns:a16="http://schemas.microsoft.com/office/drawing/2014/main" id="{7D14BFC1-8907-4E68-B6D9-C0DC8618FA0A}"/>
+                <a16:creationId xmlns:a16="http://schemas.microsoft.com/office/drawing/2014/main" id="{429B0BE1-80DD-4A08-887E-161E791851EA}"/>
               </a:ext>
             </a:extLst>
           </p:cNvPr>
@@ -3903,7 +4126,7 @@
           <p:cNvPr id="2" name="">
             <a:extLst xmlns:a="http://schemas.openxmlformats.org/drawingml/2006/main">
               <a:ext uri="{FF2B5EF4-FFF2-40B4-BE49-F238E27FC236}">
-                <a16:creationId xmlns:a16="http://schemas.microsoft.com/office/drawing/2014/main" id="{4C3ECB31-7F90-42DF-9E80-A186571EC3FB}"/>
+                <a16:creationId xmlns:a16="http://schemas.microsoft.com/office/drawing/2014/main" id="{A5A92A65-011B-4A6C-933D-A97698709770}"/>
               </a:ext>
             </a:extLst>
           </p:cNvPr>
@@ -3964,16 +4187,13 @@
           <p:nvPr/>
         </p:nvPicPr>
         <p:blipFill>
-          <a:blip xmlns:r="http://schemas.openxmlformats.org/officeDocument/2006/relationships" xmlns:a="http://schemas.openxmlformats.org/drawingml/2006/main" r:embed="Rb9e79123b8914b45"/>
-          <a:srcRect xmlns:a="http://schemas.openxmlformats.org/drawingml/2006/main" l="0" t="15663" r="0" b="15663"/>
-          <a:stretch xmlns:a="http://schemas.openxmlformats.org/drawingml/2006/main">
-            <a:fillRect l="0" t="0" r="0" b="0"/>
-          </a:stretch>
+          <a:blip xmlns:r="http://schemas.openxmlformats.org/officeDocument/2006/relationships" xmlns:a="http://schemas.openxmlformats.org/drawingml/2006/main" r:embed="R1db527da4ccd4986"/>
+          <a:stretch xmlns:a="http://schemas.openxmlformats.org/drawingml/2006/main"/>
         </p:blipFill>
         <p:spPr>
           <a:xfrm xmlns:a="http://schemas.openxmlformats.org/drawingml/2006/main">
-            <a:off x="10039350" y="323850"/>
-            <a:ext cx="1581150" cy="361950"/>
+            <a:off x="10287000" y="352758"/>
+            <a:ext cx="1333500" cy="380333"/>
           </a:xfrm>
           <a:prstGeom xmlns:a="http://schemas.openxmlformats.org/drawingml/2006/main" prst="rect">
             <a:avLst/>
@@ -3985,7 +4205,7 @@
           <p:cNvPr id="4" name="">
             <a:extLst xmlns:a="http://schemas.openxmlformats.org/drawingml/2006/main">
               <a:ext uri="{FF2B5EF4-FFF2-40B4-BE49-F238E27FC236}">
-                <a16:creationId xmlns:a16="http://schemas.microsoft.com/office/drawing/2014/main" id="{78693E81-6E33-4A03-AD1B-5A7B6FEA5B16}"/>
+                <a16:creationId xmlns:a16="http://schemas.microsoft.com/office/drawing/2014/main" id="{3813716F-71D0-416D-8F6B-96DDAC45AF14}"/>
               </a:ext>
             </a:extLst>
           </p:cNvPr>
@@ -4042,7 +4262,7 @@
           <p:cNvPr id="5" name="">
             <a:extLst xmlns:a="http://schemas.openxmlformats.org/drawingml/2006/main">
               <a:ext uri="{FF2B5EF4-FFF2-40B4-BE49-F238E27FC236}">
-                <a16:creationId xmlns:a16="http://schemas.microsoft.com/office/drawing/2014/main" id="{F22D8725-42DB-41BD-B50C-E3ABF372A6E8}"/>
+                <a16:creationId xmlns:a16="http://schemas.microsoft.com/office/drawing/2014/main" id="{6900914C-EDF7-421D-A125-22EC8C8ECF4A}"/>
               </a:ext>
             </a:extLst>
           </p:cNvPr>
@@ -4120,7 +4340,7 @@
                 <a:ea typeface="Microsoft YaHei"/>
                 <a:cs typeface="Microsoft YaHei"/>
               </a:rPr>
-              <a:t>项目启动：负责人和MDT到位</a:t>
+              <a:t>项目启动：CEO与院长现场指定六类责任成员</a:t>
             </a:r>
           </a:p>
           <a:p xmlns:a="http://schemas.openxmlformats.org/drawingml/2006/main">
@@ -4263,7 +4483,7 @@
     </p:spTree>
     <p:extLst>
       <p:ext uri="{BB962C8B-B14F-4D97-AF65-F5344CB8AC3E}">
-        <p14:creationId xmlns:p14="http://schemas.microsoft.com/office/powerpoint/2010/main" val="300677791"/>
+        <p14:creationId xmlns:p14="http://schemas.microsoft.com/office/powerpoint/2010/main" val="485914974"/>
       </p:ext>
     </p:extLst>
   </p:cSld>
@@ -4294,7 +4514,7 @@
           <p:cNvPr id="6" name="">
             <a:extLst xmlns:a="http://schemas.openxmlformats.org/drawingml/2006/main">
               <a:ext uri="{FF2B5EF4-FFF2-40B4-BE49-F238E27FC236}">
-                <a16:creationId xmlns:a16="http://schemas.microsoft.com/office/drawing/2014/main" id="{62BDD65F-6302-4DF9-AC11-C5E93EE85DAB}"/>
+                <a16:creationId xmlns:a16="http://schemas.microsoft.com/office/drawing/2014/main" id="{6B0F5DF3-D822-48C9-8C38-B9B4005EE562}"/>
               </a:ext>
             </a:extLst>
           </p:cNvPr>
@@ -4326,7 +4546,7 @@
           <p:cNvPr id="2" name="">
             <a:extLst xmlns:a="http://schemas.openxmlformats.org/drawingml/2006/main">
               <a:ext uri="{FF2B5EF4-FFF2-40B4-BE49-F238E27FC236}">
-                <a16:creationId xmlns:a16="http://schemas.microsoft.com/office/drawing/2014/main" id="{D21BFB4F-4F4A-4C87-9B73-370069F320FC}"/>
+                <a16:creationId xmlns:a16="http://schemas.microsoft.com/office/drawing/2014/main" id="{1E5600DB-F5A3-4160-9C1B-51840EACA4B4}"/>
               </a:ext>
             </a:extLst>
           </p:cNvPr>
@@ -4387,16 +4607,13 @@
           <p:nvPr/>
         </p:nvPicPr>
         <p:blipFill>
-          <a:blip xmlns:r="http://schemas.openxmlformats.org/officeDocument/2006/relationships" xmlns:a="http://schemas.openxmlformats.org/drawingml/2006/main" r:embed="R2b395dbbd386411a"/>
-          <a:srcRect xmlns:a="http://schemas.openxmlformats.org/drawingml/2006/main" l="0" t="15663" r="0" b="15663"/>
-          <a:stretch xmlns:a="http://schemas.openxmlformats.org/drawingml/2006/main">
-            <a:fillRect l="0" t="0" r="0" b="0"/>
-          </a:stretch>
+          <a:blip xmlns:r="http://schemas.openxmlformats.org/officeDocument/2006/relationships" xmlns:a="http://schemas.openxmlformats.org/drawingml/2006/main" r:embed="R862010f0dd7b411c"/>
+          <a:stretch xmlns:a="http://schemas.openxmlformats.org/drawingml/2006/main"/>
         </p:blipFill>
         <p:spPr>
           <a:xfrm xmlns:a="http://schemas.openxmlformats.org/drawingml/2006/main">
-            <a:off x="10039350" y="323850"/>
-            <a:ext cx="1581150" cy="361950"/>
+            <a:off x="10287000" y="352758"/>
+            <a:ext cx="1333500" cy="380333"/>
           </a:xfrm>
           <a:prstGeom xmlns:a="http://schemas.openxmlformats.org/drawingml/2006/main" prst="rect">
             <a:avLst/>
@@ -4408,7 +4625,7 @@
           <p:cNvPr id="4" name="">
             <a:extLst xmlns:a="http://schemas.openxmlformats.org/drawingml/2006/main">
               <a:ext uri="{FF2B5EF4-FFF2-40B4-BE49-F238E27FC236}">
-                <a16:creationId xmlns:a16="http://schemas.microsoft.com/office/drawing/2014/main" id="{ADFCB72B-0BA6-40FA-9062-470ACB1C4A44}"/>
+                <a16:creationId xmlns:a16="http://schemas.microsoft.com/office/drawing/2014/main" id="{8922AEA4-FE78-4FDC-A68C-80190C7E55D2}"/>
               </a:ext>
             </a:extLst>
           </p:cNvPr>
@@ -4465,7 +4682,7 @@
           <p:cNvPr id="5" name="">
             <a:extLst xmlns:a="http://schemas.openxmlformats.org/drawingml/2006/main">
               <a:ext uri="{FF2B5EF4-FFF2-40B4-BE49-F238E27FC236}">
-                <a16:creationId xmlns:a16="http://schemas.microsoft.com/office/drawing/2014/main" id="{48FD63D8-8ECB-45A1-AEC9-DCF5048A81FF}"/>
+                <a16:creationId xmlns:a16="http://schemas.microsoft.com/office/drawing/2014/main" id="{C6F45952-E830-45A4-878B-2E863D99AFF2}"/>
               </a:ext>
             </a:extLst>
           </p:cNvPr>
@@ -4516,7 +4733,7 @@
                 <a:ea typeface="Microsoft YaHei"/>
                 <a:cs typeface="Microsoft YaHei"/>
               </a:rPr>
-              <a:t>组建MDT并明确院方负责人，完成六大支柱基线自评</a:t>
+              <a:t>按现场确认名单落实主责、备岗与服务时段，完成基线自评</a:t>
             </a:r>
           </a:p>
           <a:p xmlns:a="http://schemas.openxmlformats.org/drawingml/2006/main">
@@ -4543,7 +4760,7 @@
                 <a:ea typeface="Microsoft YaHei"/>
                 <a:cs typeface="Microsoft YaHei"/>
               </a:rPr>
-              <a:t>选择三至五项重点，例如患者分流、IDEAL访谈、检查清单、岗位交接或随访升级</a:t>
+              <a:t>选择三至五项重点，试运行需求访谈、检查复核、交接与随访升级</a:t>
             </a:r>
           </a:p>
           <a:p xmlns:a="http://schemas.openxmlformats.org/drawingml/2006/main">
@@ -4578,7 +4795,7 @@
     </p:spTree>
     <p:extLst>
       <p:ext uri="{BB962C8B-B14F-4D97-AF65-F5344CB8AC3E}">
-        <p14:creationId xmlns:p14="http://schemas.microsoft.com/office/powerpoint/2010/main" val="588791060"/>
+        <p14:creationId xmlns:p14="http://schemas.microsoft.com/office/powerpoint/2010/main" val="432126819"/>
       </p:ext>
     </p:extLst>
   </p:cSld>
@@ -4609,7 +4826,7 @@
           <p:cNvPr id="8" name="">
             <a:extLst xmlns:a="http://schemas.openxmlformats.org/drawingml/2006/main">
               <a:ext uri="{FF2B5EF4-FFF2-40B4-BE49-F238E27FC236}">
-                <a16:creationId xmlns:a16="http://schemas.microsoft.com/office/drawing/2014/main" id="{6E198961-D928-4D58-88F4-D313C99139D9}"/>
+                <a16:creationId xmlns:a16="http://schemas.microsoft.com/office/drawing/2014/main" id="{3BE3214C-46FB-4DAE-BAF6-E6A302C41083}"/>
               </a:ext>
             </a:extLst>
           </p:cNvPr>
@@ -4641,7 +4858,7 @@
           <p:cNvPr id="2" name="">
             <a:extLst xmlns:a="http://schemas.openxmlformats.org/drawingml/2006/main">
               <a:ext uri="{FF2B5EF4-FFF2-40B4-BE49-F238E27FC236}">
-                <a16:creationId xmlns:a16="http://schemas.microsoft.com/office/drawing/2014/main" id="{3F329F4E-F7F6-480A-A3AE-AABFCD9B9DF1}"/>
+                <a16:creationId xmlns:a16="http://schemas.microsoft.com/office/drawing/2014/main" id="{412396EA-DEB7-44AC-BAED-07369ACAF860}"/>
               </a:ext>
             </a:extLst>
           </p:cNvPr>
@@ -4702,16 +4919,13 @@
           <p:nvPr/>
         </p:nvPicPr>
         <p:blipFill>
-          <a:blip xmlns:r="http://schemas.openxmlformats.org/officeDocument/2006/relationships" xmlns:a="http://schemas.openxmlformats.org/drawingml/2006/main" r:embed="R8aefa1448a5c481f"/>
-          <a:srcRect xmlns:a="http://schemas.openxmlformats.org/drawingml/2006/main" l="0" t="15663" r="0" b="15663"/>
-          <a:stretch xmlns:a="http://schemas.openxmlformats.org/drawingml/2006/main">
-            <a:fillRect l="0" t="0" r="0" b="0"/>
-          </a:stretch>
+          <a:blip xmlns:r="http://schemas.openxmlformats.org/officeDocument/2006/relationships" xmlns:a="http://schemas.openxmlformats.org/drawingml/2006/main" r:embed="Rfb00405c2dde4fb3"/>
+          <a:stretch xmlns:a="http://schemas.openxmlformats.org/drawingml/2006/main"/>
         </p:blipFill>
         <p:spPr>
           <a:xfrm xmlns:a="http://schemas.openxmlformats.org/drawingml/2006/main">
-            <a:off x="10039350" y="323850"/>
-            <a:ext cx="1581150" cy="361950"/>
+            <a:off x="10287000" y="352758"/>
+            <a:ext cx="1333500" cy="380333"/>
           </a:xfrm>
           <a:prstGeom xmlns:a="http://schemas.openxmlformats.org/drawingml/2006/main" prst="rect">
             <a:avLst/>
@@ -4723,7 +4937,7 @@
           <p:cNvPr id="4" name="">
             <a:extLst xmlns:a="http://schemas.openxmlformats.org/drawingml/2006/main">
               <a:ext uri="{FF2B5EF4-FFF2-40B4-BE49-F238E27FC236}">
-                <a16:creationId xmlns:a16="http://schemas.microsoft.com/office/drawing/2014/main" id="{35BBC434-0964-40E9-A4F0-598ABEC8CCA3}"/>
+                <a16:creationId xmlns:a16="http://schemas.microsoft.com/office/drawing/2014/main" id="{263AE64D-9486-4980-8A36-EA8541DA5EE3}"/>
               </a:ext>
             </a:extLst>
           </p:cNvPr>
@@ -4784,7 +4998,7 @@
           <p:nvPr/>
         </p:nvPicPr>
         <p:blipFill>
-          <a:blip xmlns:r="http://schemas.openxmlformats.org/officeDocument/2006/relationships" xmlns:a="http://schemas.openxmlformats.org/drawingml/2006/main" r:embed="R639575e2cd2c4196"/>
+          <a:blip xmlns:r="http://schemas.openxmlformats.org/officeDocument/2006/relationships" xmlns:a="http://schemas.openxmlformats.org/drawingml/2006/main" r:embed="R4bb060b5c0894dba"/>
           <a:stretch xmlns:a="http://schemas.openxmlformats.org/drawingml/2006/main"/>
         </p:blipFill>
         <p:spPr>
@@ -4802,7 +5016,7 @@
           <p:cNvPr id="6" name="">
             <a:extLst xmlns:a="http://schemas.openxmlformats.org/drawingml/2006/main">
               <a:ext uri="{FF2B5EF4-FFF2-40B4-BE49-F238E27FC236}">
-                <a16:creationId xmlns:a16="http://schemas.microsoft.com/office/drawing/2014/main" id="{75606670-4361-4AED-B5B5-C6171E7F1534}"/>
+                <a16:creationId xmlns:a16="http://schemas.microsoft.com/office/drawing/2014/main" id="{B43DBBF9-13D7-4195-BA21-FBF207B9C16F}"/>
               </a:ext>
             </a:extLst>
           </p:cNvPr>
@@ -4880,7 +5094,7 @@
                 <a:ea typeface="Microsoft YaHei"/>
                 <a:cs typeface="Microsoft YaHei"/>
               </a:rPr>
-              <a:t>检查患者在哪里暂缓、信息在哪里断开、哪些岗位没有执行</a:t>
+              <a:t>检查全程联系、专业交接及异常升级；按工作量调整兼任与备岗</a:t>
             </a:r>
           </a:p>
           <a:p xmlns:a="http://schemas.openxmlformats.org/drawingml/2006/main">
@@ -4917,7 +5131,7 @@
           <p:cNvPr id="7" name="">
             <a:extLst xmlns:a="http://schemas.openxmlformats.org/drawingml/2006/main">
               <a:ext uri="{FF2B5EF4-FFF2-40B4-BE49-F238E27FC236}">
-                <a16:creationId xmlns:a16="http://schemas.microsoft.com/office/drawing/2014/main" id="{39309340-F7FB-41A5-90B7-B66987FAA5EE}"/>
+                <a16:creationId xmlns:a16="http://schemas.microsoft.com/office/drawing/2014/main" id="{27F80D37-5071-4148-A373-B80E17182325}"/>
               </a:ext>
             </a:extLst>
           </p:cNvPr>
@@ -4972,7 +5186,7 @@
     </p:spTree>
     <p:extLst>
       <p:ext uri="{BB962C8B-B14F-4D97-AF65-F5344CB8AC3E}">
-        <p14:creationId xmlns:p14="http://schemas.microsoft.com/office/powerpoint/2010/main" val="291235399"/>
+        <p14:creationId xmlns:p14="http://schemas.microsoft.com/office/powerpoint/2010/main" val="940073338"/>
       </p:ext>
     </p:extLst>
   </p:cSld>
@@ -5003,7 +5217,7 @@
           <p:cNvPr id="13" name="">
             <a:extLst xmlns:a="http://schemas.openxmlformats.org/drawingml/2006/main">
               <a:ext uri="{FF2B5EF4-FFF2-40B4-BE49-F238E27FC236}">
-                <a16:creationId xmlns:a16="http://schemas.microsoft.com/office/drawing/2014/main" id="{D792C41D-82E8-4317-BC50-5C004BDCDECF}"/>
+                <a16:creationId xmlns:a16="http://schemas.microsoft.com/office/drawing/2014/main" id="{622ED788-DF40-477E-8530-9748A05EC3E8}"/>
               </a:ext>
             </a:extLst>
           </p:cNvPr>
@@ -5035,7 +5249,7 @@
           <p:cNvPr id="2" name="">
             <a:extLst xmlns:a="http://schemas.openxmlformats.org/drawingml/2006/main">
               <a:ext uri="{FF2B5EF4-FFF2-40B4-BE49-F238E27FC236}">
-                <a16:creationId xmlns:a16="http://schemas.microsoft.com/office/drawing/2014/main" id="{90873F1C-7133-4827-9135-41C9F6A28774}"/>
+                <a16:creationId xmlns:a16="http://schemas.microsoft.com/office/drawing/2014/main" id="{CC47787D-08BC-4682-A44E-2EA6E069DB5C}"/>
               </a:ext>
             </a:extLst>
           </p:cNvPr>
@@ -5096,16 +5310,13 @@
           <p:nvPr/>
         </p:nvPicPr>
         <p:blipFill>
-          <a:blip xmlns:r="http://schemas.openxmlformats.org/officeDocument/2006/relationships" xmlns:a="http://schemas.openxmlformats.org/drawingml/2006/main" r:embed="Re20fb302ab4a4c64"/>
-          <a:srcRect xmlns:a="http://schemas.openxmlformats.org/drawingml/2006/main" l="0" t="15663" r="0" b="15663"/>
-          <a:stretch xmlns:a="http://schemas.openxmlformats.org/drawingml/2006/main">
-            <a:fillRect l="0" t="0" r="0" b="0"/>
-          </a:stretch>
+          <a:blip xmlns:r="http://schemas.openxmlformats.org/officeDocument/2006/relationships" xmlns:a="http://schemas.openxmlformats.org/drawingml/2006/main" r:embed="R7389cf790e0d4527"/>
+          <a:stretch xmlns:a="http://schemas.openxmlformats.org/drawingml/2006/main"/>
         </p:blipFill>
         <p:spPr>
           <a:xfrm xmlns:a="http://schemas.openxmlformats.org/drawingml/2006/main">
-            <a:off x="10039350" y="323850"/>
-            <a:ext cx="1581150" cy="361950"/>
+            <a:off x="10287000" y="352758"/>
+            <a:ext cx="1333500" cy="380333"/>
           </a:xfrm>
           <a:prstGeom xmlns:a="http://schemas.openxmlformats.org/drawingml/2006/main" prst="rect">
             <a:avLst/>
@@ -5117,7 +5328,7 @@
           <p:cNvPr id="4" name="">
             <a:extLst xmlns:a="http://schemas.openxmlformats.org/drawingml/2006/main">
               <a:ext uri="{FF2B5EF4-FFF2-40B4-BE49-F238E27FC236}">
-                <a16:creationId xmlns:a16="http://schemas.microsoft.com/office/drawing/2014/main" id="{D13122AE-2E4D-4DF0-9731-2CE5FA3B040E}"/>
+                <a16:creationId xmlns:a16="http://schemas.microsoft.com/office/drawing/2014/main" id="{D83DD815-600D-445F-A6F9-FA8ADC0AD66B}"/>
               </a:ext>
             </a:extLst>
           </p:cNvPr>
@@ -5174,7 +5385,7 @@
           <p:cNvPr id="5" name="">
             <a:extLst xmlns:a="http://schemas.openxmlformats.org/drawingml/2006/main">
               <a:ext uri="{FF2B5EF4-FFF2-40B4-BE49-F238E27FC236}">
-                <a16:creationId xmlns:a16="http://schemas.microsoft.com/office/drawing/2014/main" id="{D2EB7F7E-D970-4C48-AE66-3A73E8869577}"/>
+                <a16:creationId xmlns:a16="http://schemas.microsoft.com/office/drawing/2014/main" id="{2EB272D5-F604-4DE0-AA06-7FB73EBD58D9}"/>
               </a:ext>
             </a:extLst>
           </p:cNvPr>
@@ -5235,7 +5446,7 @@
           <p:cNvPr id="6" name="">
             <a:extLst xmlns:a="http://schemas.openxmlformats.org/drawingml/2006/main">
               <a:ext uri="{FF2B5EF4-FFF2-40B4-BE49-F238E27FC236}">
-                <a16:creationId xmlns:a16="http://schemas.microsoft.com/office/drawing/2014/main" id="{AF428FD8-EB37-4C1B-95AC-3E7365D0CC98}"/>
+                <a16:creationId xmlns:a16="http://schemas.microsoft.com/office/drawing/2014/main" id="{07BB2DA5-77DE-4AA4-8C97-4337A05B8B3A}"/>
               </a:ext>
             </a:extLst>
           </p:cNvPr>
@@ -5292,7 +5503,7 @@
           <p:cNvPr id="7" name="">
             <a:extLst xmlns:a="http://schemas.openxmlformats.org/drawingml/2006/main">
               <a:ext uri="{FF2B5EF4-FFF2-40B4-BE49-F238E27FC236}">
-                <a16:creationId xmlns:a16="http://schemas.microsoft.com/office/drawing/2014/main" id="{805521E6-3D9E-4C3F-80D5-EAD8D937D9A5}"/>
+                <a16:creationId xmlns:a16="http://schemas.microsoft.com/office/drawing/2014/main" id="{E2E3C057-D03A-4A6C-8720-8CD37EA3F2AB}"/>
               </a:ext>
             </a:extLst>
           </p:cNvPr>
@@ -5353,7 +5564,7 @@
           <p:cNvPr id="8" name="">
             <a:extLst xmlns:a="http://schemas.openxmlformats.org/drawingml/2006/main">
               <a:ext uri="{FF2B5EF4-FFF2-40B4-BE49-F238E27FC236}">
-                <a16:creationId xmlns:a16="http://schemas.microsoft.com/office/drawing/2014/main" id="{6ADED2EE-B1C7-47F9-9725-24505386DA9D}"/>
+                <a16:creationId xmlns:a16="http://schemas.microsoft.com/office/drawing/2014/main" id="{FC027291-FA99-4A75-BF65-CFEAAE62D8F4}"/>
               </a:ext>
             </a:extLst>
           </p:cNvPr>
@@ -5410,7 +5621,7 @@
           <p:cNvPr id="9" name="">
             <a:extLst xmlns:a="http://schemas.openxmlformats.org/drawingml/2006/main">
               <a:ext uri="{FF2B5EF4-FFF2-40B4-BE49-F238E27FC236}">
-                <a16:creationId xmlns:a16="http://schemas.microsoft.com/office/drawing/2014/main" id="{11A53816-1E75-4E0F-B30C-4CD586C7AD46}"/>
+                <a16:creationId xmlns:a16="http://schemas.microsoft.com/office/drawing/2014/main" id="{1FC7D424-D985-4699-AE82-C896531F2363}"/>
               </a:ext>
             </a:extLst>
           </p:cNvPr>
@@ -5471,7 +5682,7 @@
           <p:cNvPr id="10" name="">
             <a:extLst xmlns:a="http://schemas.openxmlformats.org/drawingml/2006/main">
               <a:ext uri="{FF2B5EF4-FFF2-40B4-BE49-F238E27FC236}">
-                <a16:creationId xmlns:a16="http://schemas.microsoft.com/office/drawing/2014/main" id="{C29EA11E-867B-41D8-9DFF-6FF661D1D6C3}"/>
+                <a16:creationId xmlns:a16="http://schemas.microsoft.com/office/drawing/2014/main" id="{DE0E859A-6D5B-4548-A03D-9150A0D0F34C}"/>
               </a:ext>
             </a:extLst>
           </p:cNvPr>
@@ -5518,7 +5729,7 @@
                 <a:ea typeface="Microsoft YaHei"/>
                 <a:cs typeface="Microsoft YaHei"/>
               </a:rPr>
-              <a:t>岗位交接、随访完成、投诉响应与闭环</a:t>
+              <a:t>岗位与备岗覆盖、交接缺漏、随访完成与异常闭环</a:t>
             </a:r>
           </a:p>
         </p:txBody>
@@ -5528,7 +5739,7 @@
           <p:cNvPr id="11" name="">
             <a:extLst xmlns:a="http://schemas.openxmlformats.org/drawingml/2006/main">
               <a:ext uri="{FF2B5EF4-FFF2-40B4-BE49-F238E27FC236}">
-                <a16:creationId xmlns:a16="http://schemas.microsoft.com/office/drawing/2014/main" id="{AF918114-EEAD-459A-936B-DB92C5ED32B1}"/>
+                <a16:creationId xmlns:a16="http://schemas.microsoft.com/office/drawing/2014/main" id="{C470FE2B-6F74-4B4A-8354-5B5EE72E4A9E}"/>
               </a:ext>
             </a:extLst>
           </p:cNvPr>
@@ -5589,7 +5800,7 @@
           <p:cNvPr id="12" name="">
             <a:extLst xmlns:a="http://schemas.openxmlformats.org/drawingml/2006/main">
               <a:ext uri="{FF2B5EF4-FFF2-40B4-BE49-F238E27FC236}">
-                <a16:creationId xmlns:a16="http://schemas.microsoft.com/office/drawing/2014/main" id="{8BA7DFAB-E628-47FC-A2C7-E4E71120323A}"/>
+                <a16:creationId xmlns:a16="http://schemas.microsoft.com/office/drawing/2014/main" id="{FD8643A4-0C07-4CCA-8E14-1E6341CF60C2}"/>
               </a:ext>
             </a:extLst>
           </p:cNvPr>
@@ -5644,7 +5855,7 @@
     </p:spTree>
     <p:extLst>
       <p:ext uri="{BB962C8B-B14F-4D97-AF65-F5344CB8AC3E}">
-        <p14:creationId xmlns:p14="http://schemas.microsoft.com/office/powerpoint/2010/main" val="1342191043"/>
+        <p14:creationId xmlns:p14="http://schemas.microsoft.com/office/powerpoint/2010/main" val="1620786049"/>
       </p:ext>
     </p:extLst>
   </p:cSld>
@@ -5675,7 +5886,7 @@
           <p:cNvPr id="8" name="">
             <a:extLst xmlns:a="http://schemas.openxmlformats.org/drawingml/2006/main">
               <a:ext uri="{FF2B5EF4-FFF2-40B4-BE49-F238E27FC236}">
-                <a16:creationId xmlns:a16="http://schemas.microsoft.com/office/drawing/2014/main" id="{F0DBC769-7190-42E5-BD13-80D5120A00C6}"/>
+                <a16:creationId xmlns:a16="http://schemas.microsoft.com/office/drawing/2014/main" id="{CF10F7A2-19E8-4853-A182-DA46AB607F9F}"/>
               </a:ext>
             </a:extLst>
           </p:cNvPr>
@@ -5707,7 +5918,7 @@
           <p:cNvPr id="2" name="">
             <a:extLst xmlns:a="http://schemas.openxmlformats.org/drawingml/2006/main">
               <a:ext uri="{FF2B5EF4-FFF2-40B4-BE49-F238E27FC236}">
-                <a16:creationId xmlns:a16="http://schemas.microsoft.com/office/drawing/2014/main" id="{B12F65AC-3044-41A5-B9E3-40999F4F4763}"/>
+                <a16:creationId xmlns:a16="http://schemas.microsoft.com/office/drawing/2014/main" id="{131C82CB-F685-4615-BB3E-2E7A9F2F67FB}"/>
               </a:ext>
             </a:extLst>
           </p:cNvPr>
@@ -5754,7 +5965,7 @@
                 <a:ea typeface="Microsoft YaHei"/>
                 <a:cs typeface="Microsoft YaHei"/>
               </a:rPr>
-              <a:t>下一步</a:t>
+              <a:t>会议现场确认</a:t>
             </a:r>
           </a:p>
         </p:txBody>
@@ -5764,7 +5975,7 @@
           <p:cNvPr id="3" name="">
             <a:extLst xmlns:a="http://schemas.openxmlformats.org/drawingml/2006/main">
               <a:ext uri="{FF2B5EF4-FFF2-40B4-BE49-F238E27FC236}">
-                <a16:creationId xmlns:a16="http://schemas.microsoft.com/office/drawing/2014/main" id="{9DFAD05E-82FF-410C-83E4-727338515B4F}"/>
+                <a16:creationId xmlns:a16="http://schemas.microsoft.com/office/drawing/2014/main" id="{300E7DC7-9A4D-44BF-8ED2-BF9B93E81FC5}"/>
               </a:ext>
             </a:extLst>
           </p:cNvPr>
@@ -5811,7 +6022,7 @@
                 <a:ea typeface="Microsoft YaHei"/>
                 <a:cs typeface="Microsoft YaHei"/>
               </a:rPr>
-              <a:t>用一次共创会议，启动医院自己的 Digital PLS 路线</a:t>
+              <a:t>明确院方团队成员，启动第一轮30天行动</a:t>
             </a:r>
           </a:p>
         </p:txBody>
@@ -5821,7 +6032,7 @@
           <p:cNvPr id="4" name="">
             <a:extLst xmlns:a="http://schemas.openxmlformats.org/drawingml/2006/main">
               <a:ext uri="{FF2B5EF4-FFF2-40B4-BE49-F238E27FC236}">
-                <a16:creationId xmlns:a16="http://schemas.microsoft.com/office/drawing/2014/main" id="{BC46D426-A044-4158-AF01-52686717565E}"/>
+                <a16:creationId xmlns:a16="http://schemas.microsoft.com/office/drawing/2014/main" id="{3348D63D-D523-4F26-9AC4-1EC9B74B6A1B}"/>
               </a:ext>
             </a:extLst>
           </p:cNvPr>
@@ -5872,7 +6083,7 @@
                 <a:ea typeface="Microsoft YaHei"/>
                 <a:cs typeface="Microsoft YaHei"/>
               </a:rPr>
-              <a:t>医院准备：现有患者路径、近三个月病例结构和最希望解决的问题</a:t>
+              <a:t>成员名单：CEO与院长确认六类角色主责、协作成员、备岗与到位时间</a:t>
             </a:r>
           </a:p>
           <a:p xmlns:a="http://schemas.openxmlformats.org/drawingml/2006/main">
@@ -5899,7 +6110,7 @@
                 <a:ea typeface="Microsoft YaHei"/>
                 <a:cs typeface="Microsoft YaHei"/>
               </a:rPr>
-              <a:t>参会角色：院长、白内障与屈光负责人、视光、护理、咨询和运营</a:t>
+              <a:t>优先行动：选定三至五项任务，逐项写明责任人、完成日期与验收证据</a:t>
             </a:r>
           </a:p>
           <a:p xmlns:a="http://schemas.openxmlformats.org/drawingml/2006/main">
@@ -5926,7 +6137,7 @@
                 <a:ea typeface="Microsoft YaHei"/>
                 <a:cs typeface="Microsoft YaHei"/>
               </a:rPr>
-              <a:t>会议产出：一位院方负责人、三至五项优先行动、一个第30天复盘日期</a:t>
+              <a:t>首次复盘：现场确定第30天日期与召集人，由记录人读回并纳入纪要</a:t>
             </a:r>
           </a:p>
         </p:txBody>
@@ -5936,7 +6147,7 @@
           <p:cNvPr id="5" name="">
             <a:extLst xmlns:a="http://schemas.openxmlformats.org/drawingml/2006/main">
               <a:ext uri="{FF2B5EF4-FFF2-40B4-BE49-F238E27FC236}">
-                <a16:creationId xmlns:a16="http://schemas.microsoft.com/office/drawing/2014/main" id="{1DC534D9-DB23-494B-82CB-DD378ABC42B0}"/>
+                <a16:creationId xmlns:a16="http://schemas.microsoft.com/office/drawing/2014/main" id="{E3C36652-B29F-4709-A75E-BAD831139E96}"/>
               </a:ext>
             </a:extLst>
           </p:cNvPr>
@@ -5997,16 +6208,13 @@
           <p:nvPr/>
         </p:nvPicPr>
         <p:blipFill>
-          <a:blip xmlns:r="http://schemas.openxmlformats.org/officeDocument/2006/relationships" xmlns:a="http://schemas.openxmlformats.org/drawingml/2006/main" r:embed="Raac430eb6d134192"/>
-          <a:srcRect xmlns:a="http://schemas.openxmlformats.org/drawingml/2006/main" l="0" t="15663" r="0" b="15663"/>
-          <a:stretch xmlns:a="http://schemas.openxmlformats.org/drawingml/2006/main">
-            <a:fillRect l="0" t="0" r="0" b="0"/>
-          </a:stretch>
+          <a:blip xmlns:r="http://schemas.openxmlformats.org/officeDocument/2006/relationships" xmlns:a="http://schemas.openxmlformats.org/drawingml/2006/main" r:embed="Rd92bd964f6d640a0"/>
+          <a:stretch xmlns:a="http://schemas.openxmlformats.org/drawingml/2006/main"/>
         </p:blipFill>
         <p:spPr>
           <a:xfrm xmlns:a="http://schemas.openxmlformats.org/drawingml/2006/main">
-            <a:off x="10039350" y="323850"/>
-            <a:ext cx="1581150" cy="361950"/>
+            <a:off x="10287000" y="352758"/>
+            <a:ext cx="1333500" cy="380333"/>
           </a:xfrm>
           <a:prstGeom xmlns:a="http://schemas.openxmlformats.org/drawingml/2006/main" prst="rect">
             <a:avLst/>
@@ -6018,7 +6226,7 @@
           <p:cNvPr id="7" name="">
             <a:extLst xmlns:a="http://schemas.openxmlformats.org/drawingml/2006/main">
               <a:ext uri="{FF2B5EF4-FFF2-40B4-BE49-F238E27FC236}">
-                <a16:creationId xmlns:a16="http://schemas.microsoft.com/office/drawing/2014/main" id="{B01294C3-2F82-4574-AF51-CA82B72C1158}"/>
+                <a16:creationId xmlns:a16="http://schemas.microsoft.com/office/drawing/2014/main" id="{BD5E2B09-71D3-4534-88F7-4B90CD38541B}"/>
               </a:ext>
             </a:extLst>
           </p:cNvPr>
@@ -6073,7 +6281,1815 @@
     </p:spTree>
     <p:extLst>
       <p:ext uri="{BB962C8B-B14F-4D97-AF65-F5344CB8AC3E}">
-        <p14:creationId xmlns:p14="http://schemas.microsoft.com/office/powerpoint/2010/main" val="381929568"/>
+        <p14:creationId xmlns:p14="http://schemas.microsoft.com/office/powerpoint/2010/main" val="2091426320"/>
+      </p:ext>
+    </p:extLst>
+  </p:cSld>
+</p:sld>
+</file>
+
+<file path=ppt/slides/slide17.xml><?xml version="1.0" encoding="utf-8"?>
+<p:sld xmlns:p="http://schemas.openxmlformats.org/presentationml/2006/main">
+  <p:cSld>
+    <p:bg>
+      <p:bgPr>
+        <a:solidFill xmlns:a="http://schemas.openxmlformats.org/drawingml/2006/main">
+          <a:srgbClr val="FFFFFF"/>
+        </a:solidFill>
+      </p:bgPr>
+    </p:bg>
+    <p:spTree>
+      <p:nvGrpSpPr>
+        <p:cNvPr id="1" name=""/>
+        <p:cNvGrpSpPr/>
+        <p:nvPr/>
+      </p:nvGrpSpPr>
+      <p:grpSpPr>
+        <a:xfrm xmlns:a="http://schemas.openxmlformats.org/drawingml/2006/main"/>
+      </p:grpSpPr>
+      <p:sp>
+        <p:nvSpPr>
+          <p:cNvPr id="2" name="">
+            <a:extLst xmlns:a="http://schemas.openxmlformats.org/drawingml/2006/main">
+              <a:ext uri="{FF2B5EF4-FFF2-40B4-BE49-F238E27FC236}">
+                <a16:creationId xmlns:a16="http://schemas.microsoft.com/office/drawing/2014/main" id="{6B0F5DF3-D822-48C9-8C38-B9B4005EE562}"/>
+              </a:ext>
+            </a:extLst>
+          </p:cNvPr>
+          <p:cNvSpPr>
+            <a:spLocks xmlns:a="http://schemas.openxmlformats.org/drawingml/2006/main" noGrp="1"/>
+          </p:cNvSpPr>
+          <p:nvPr/>
+        </p:nvSpPr>
+        <p:spPr>
+          <a:xfrm xmlns:a="http://schemas.openxmlformats.org/drawingml/2006/main">
+            <a:off x="0" y="0"/>
+            <a:ext cx="12192000" cy="95250"/>
+          </a:xfrm>
+          <a:prstGeom xmlns:a="http://schemas.openxmlformats.org/drawingml/2006/main" prst="rect">
+            <a:avLst/>
+          </a:prstGeom>
+          <a:solidFill xmlns:a="http://schemas.openxmlformats.org/drawingml/2006/main">
+            <a:srgbClr val="E6AA16"/>
+          </a:solidFill>
+          <a:ln xmlns:a="http://schemas.openxmlformats.org/drawingml/2006/main" w="0">
+            <a:solidFill>
+              <a:srgbClr val="E6AA16"/>
+            </a:solidFill>
+          </a:ln>
+        </p:spPr>
+      </p:sp>
+      <p:sp>
+        <p:nvSpPr>
+          <p:cNvPr id="3" name="">
+            <a:extLst xmlns:a="http://schemas.openxmlformats.org/drawingml/2006/main">
+              <a:ext uri="{FF2B5EF4-FFF2-40B4-BE49-F238E27FC236}">
+                <a16:creationId xmlns:a16="http://schemas.microsoft.com/office/drawing/2014/main" id="{1E5600DB-F5A3-4160-9C1B-51840EACA4B4}"/>
+              </a:ext>
+            </a:extLst>
+          </p:cNvPr>
+          <p:cNvSpPr>
+            <a:spLocks xmlns:a="http://schemas.openxmlformats.org/drawingml/2006/main" noGrp="1"/>
+          </p:cNvSpPr>
+          <p:nvPr/>
+        </p:nvSpPr>
+        <p:spPr>
+          <a:xfrm xmlns:a="http://schemas.openxmlformats.org/drawingml/2006/main">
+            <a:off x="590550" y="419100"/>
+            <a:ext cx="9906000" cy="609600"/>
+          </a:xfrm>
+          <a:prstGeom xmlns:a="http://schemas.openxmlformats.org/drawingml/2006/main" prst="rect">
+            <a:avLst/>
+          </a:prstGeom>
+          <a:noFill xmlns:a="http://schemas.openxmlformats.org/drawingml/2006/main"/>
+          <a:ln xmlns:a="http://schemas.openxmlformats.org/drawingml/2006/main" w="0">
+            <a:noFill/>
+          </a:ln>
+        </p:spPr>
+        <p:txBody>
+          <a:bodyPr xmlns:a="http://schemas.openxmlformats.org/drawingml/2006/main">
+            <a:normAutofit fontScale="100000"/>
+          </a:bodyPr>
+          <a:lstStyle xmlns:a="http://schemas.openxmlformats.org/drawingml/2006/main"/>
+          <a:p xmlns:a="http://schemas.openxmlformats.org/drawingml/2006/main">
+            <a:pPr>
+              <a:defRPr sz="2850" b="1" i="0">
+                <a:solidFill>
+                  <a:srgbClr val="163E6F"/>
+                </a:solidFill>
+                <a:latin typeface="Microsoft YaHei"/>
+                <a:ea typeface="Microsoft YaHei"/>
+                <a:cs typeface="Microsoft YaHei"/>
+              </a:defRPr>
+            </a:pPr>
+            <a:r>
+              <a:rPr sz="2850" b="1" i="0">
+                <a:solidFill>
+                  <a:srgbClr val="163E6F"/>
+                </a:solidFill>
+                <a:latin typeface="Microsoft YaHei"/>
+                <a:ea typeface="Microsoft YaHei"/>
+                <a:cs typeface="Microsoft YaHei"/>
+              </a:rPr>
+              <a:t>院方PLS团队角色与分工</a:t>
+            </a:r>
+          </a:p>
+        </p:txBody>
+      </p:sp>
+      <p:pic>
+        <p:nvPicPr>
+          <p:cNvPr id="4" name=""/>
+          <p:cNvPicPr>
+            <a:picLocks xmlns:a="http://schemas.openxmlformats.org/drawingml/2006/main" noChangeAspect="1"/>
+          </p:cNvPicPr>
+          <p:nvPr/>
+        </p:nvPicPr>
+        <p:blipFill>
+          <a:blip xmlns:r="http://schemas.openxmlformats.org/officeDocument/2006/relationships" xmlns:a="http://schemas.openxmlformats.org/drawingml/2006/main" r:embed="R862010f0dd7b411c"/>
+          <a:stretch xmlns:a="http://schemas.openxmlformats.org/drawingml/2006/main"/>
+        </p:blipFill>
+        <p:spPr>
+          <a:xfrm xmlns:a="http://schemas.openxmlformats.org/drawingml/2006/main">
+            <a:off x="10287000" y="352758"/>
+            <a:ext cx="1333500" cy="380333"/>
+          </a:xfrm>
+          <a:prstGeom xmlns:a="http://schemas.openxmlformats.org/drawingml/2006/main" prst="rect">
+            <a:avLst/>
+          </a:prstGeom>
+        </p:spPr>
+      </p:pic>
+      <p:sp>
+        <p:nvSpPr>
+          <p:cNvPr id="5" name="">
+            <a:extLst xmlns:a="http://schemas.openxmlformats.org/drawingml/2006/main">
+              <a:ext uri="{FF2B5EF4-FFF2-40B4-BE49-F238E27FC236}">
+                <a16:creationId xmlns:a16="http://schemas.microsoft.com/office/drawing/2014/main" id="{8922AEA4-FE78-4FDC-A68C-80190C7E55D2}"/>
+              </a:ext>
+            </a:extLst>
+          </p:cNvPr>
+          <p:cNvSpPr>
+            <a:spLocks xmlns:a="http://schemas.openxmlformats.org/drawingml/2006/main" noGrp="1"/>
+          </p:cNvSpPr>
+          <p:nvPr/>
+        </p:nvSpPr>
+        <p:spPr>
+          <a:xfrm xmlns:a="http://schemas.openxmlformats.org/drawingml/2006/main">
+            <a:off x="590550" y="6381750"/>
+            <a:ext cx="3429000" cy="209550"/>
+          </a:xfrm>
+          <a:prstGeom xmlns:a="http://schemas.openxmlformats.org/drawingml/2006/main" prst="rect">
+            <a:avLst/>
+          </a:prstGeom>
+          <a:noFill xmlns:a="http://schemas.openxmlformats.org/drawingml/2006/main"/>
+          <a:ln xmlns:a="http://schemas.openxmlformats.org/drawingml/2006/main" w="0">
+            <a:noFill/>
+          </a:ln>
+        </p:spPr>
+        <p:txBody>
+          <a:bodyPr xmlns:a="http://schemas.openxmlformats.org/drawingml/2006/main">
+            <a:normAutofit fontScale="86111"/>
+          </a:bodyPr>
+          <a:lstStyle xmlns:a="http://schemas.openxmlformats.org/drawingml/2006/main"/>
+          <a:p xmlns:a="http://schemas.openxmlformats.org/drawingml/2006/main">
+            <a:pPr>
+              <a:defRPr sz="900" b="0" i="0">
+                <a:solidFill>
+                  <a:srgbClr val="607086"/>
+                </a:solidFill>
+                <a:latin typeface="Microsoft YaHei"/>
+                <a:ea typeface="Microsoft YaHei"/>
+                <a:cs typeface="Microsoft YaHei"/>
+              </a:defRPr>
+            </a:pPr>
+            <a:r>
+              <a:rPr sz="900" b="0" i="0">
+                <a:solidFill>
+                  <a:srgbClr val="607086"/>
+                </a:solidFill>
+                <a:latin typeface="Microsoft YaHei"/>
+                <a:ea typeface="Microsoft YaHei"/>
+                <a:cs typeface="Microsoft YaHei"/>
+              </a:rPr>
+              <a:t>强生眼力健 PLS 项目研讨会</a:t>
+            </a:r>
+          </a:p>
+        </p:txBody>
+      </p:sp>
+      <p:sp>
+        <p:nvSpPr>
+          <p:cNvPr id="6" name="">
+            <a:extLst xmlns:a="http://schemas.openxmlformats.org/drawingml/2006/main">
+              <a:ext uri="{FF2B5EF4-FFF2-40B4-BE49-F238E27FC236}">
+                <a16:creationId xmlns:a16="http://schemas.microsoft.com/office/drawing/2014/main" id="{3A6E56BB-9671-44AA-B0FA-7E89CC9EFDB4}"/>
+              </a:ext>
+            </a:extLst>
+          </p:cNvPr>
+          <p:cNvSpPr>
+            <a:spLocks xmlns:a="http://schemas.openxmlformats.org/drawingml/2006/main" noGrp="1"/>
+          </p:cNvSpPr>
+          <p:nvPr/>
+        </p:nvSpPr>
+        <p:spPr>
+          <a:xfrm xmlns:a="http://schemas.openxmlformats.org/drawingml/2006/main">
+            <a:off x="590550" y="1095375"/>
+            <a:ext cx="11010900" cy="381000"/>
+          </a:xfrm>
+          <a:prstGeom xmlns:a="http://schemas.openxmlformats.org/drawingml/2006/main" prst="rect">
+            <a:avLst/>
+          </a:prstGeom>
+          <a:noFill xmlns:a="http://schemas.openxmlformats.org/drawingml/2006/main"/>
+          <a:ln xmlns:a="http://schemas.openxmlformats.org/drawingml/2006/main" w="0">
+            <a:noFill/>
+          </a:ln>
+        </p:spPr>
+        <p:txBody>
+          <a:bodyPr xmlns:a="http://schemas.openxmlformats.org/drawingml/2006/main"/>
+          <a:lstStyle xmlns:a="http://schemas.openxmlformats.org/drawingml/2006/main">
+            <a:defPPr>
+              <a:defRPr sz="1875" b="1">
+                <a:solidFill>
+                  <a:srgbClr val="163E6F"/>
+                </a:solidFill>
+              </a:defRPr>
+            </a:defPPr>
+          </a:lstStyle>
+          <a:p xmlns:a="http://schemas.openxmlformats.org/drawingml/2006/main">
+            <a:pPr>
+              <a:defRPr sz="1875" b="1">
+                <a:solidFill>
+                  <a:srgbClr val="163E6F"/>
+                </a:solidFill>
+              </a:defRPr>
+            </a:pPr>
+            <a:r>
+              <a:rPr sz="1875" b="1">
+                <a:solidFill>
+                  <a:srgbClr val="163E6F"/>
+                </a:solidFill>
+              </a:rPr>
+              <a:t>1位项目负责人 + 5类核心角色；六类责任可由现有人员兼任</a:t>
+            </a:r>
+          </a:p>
+        </p:txBody>
+      </p:sp>
+      <p:graphicFrame>
+        <p:nvGraphicFramePr>
+          <p:cNvPr id="7" name="">
+            <a:extLst xmlns:a="http://schemas.openxmlformats.org/drawingml/2006/main">
+              <a:ext uri="{FF2B5EF4-FFF2-40B4-BE49-F238E27FC236}">
+                <a16:creationId xmlns:a16="http://schemas.microsoft.com/office/drawing/2014/main" id="{44F33F4E-D7E4-4A8B-B610-E50ECE3B6FF9}"/>
+              </a:ext>
+            </a:extLst>
+          </p:cNvPr>
+          <p:cNvGraphicFramePr/>
+          <p:nvPr/>
+        </p:nvGraphicFramePr>
+        <p:xfrm>
+          <a:off xmlns:a="http://schemas.openxmlformats.org/drawingml/2006/main" x="590550" y="1657350"/>
+          <a:ext xmlns:a="http://schemas.openxmlformats.org/drawingml/2006/main" cx="11010900" cy="3733800"/>
+        </p:xfrm>
+        <a:graphic xmlns:a="http://schemas.openxmlformats.org/drawingml/2006/main">
+          <a:graphicData uri="http://schemas.openxmlformats.org/drawingml/2006/table">
+            <a:tbl>
+              <a:tblPr/>
+              <a:tblGrid>
+                <a:gridCol w="2457450"/>
+                <a:gridCol w="4171950"/>
+                <a:gridCol w="4381500"/>
+              </a:tblGrid>
+              <a:tr h="533400">
+                <a:tc>
+                  <a:txBody>
+                    <a:bodyPr/>
+                    <a:lstStyle/>
+                    <a:p>
+                      <a:r>
+                        <a:rPr sz="1800" b="1">
+                          <a:solidFill>
+                            <a:srgbClr val="FFFFFF"/>
+                          </a:solidFill>
+                        </a:rPr>
+                        <a:t>院方角色</a:t>
+                      </a:r>
+                    </a:p>
+                  </a:txBody>
+                  <a:tcPr marL="114300" marR="114300" marT="76200" marB="76200" anchor="ctr">
+                    <a:solidFill>
+                      <a:srgbClr val="163E6F"/>
+                    </a:solidFill>
+                  </a:tcPr>
+                </a:tc>
+                <a:tc>
+                  <a:txBody>
+                    <a:bodyPr/>
+                    <a:lstStyle/>
+                    <a:p>
+                      <a:r>
+                        <a:rPr sz="1800" b="1">
+                          <a:solidFill>
+                            <a:srgbClr val="FFFFFF"/>
+                          </a:solidFill>
+                        </a:rPr>
+                        <a:t>承担的工作</a:t>
+                      </a:r>
+                    </a:p>
+                  </a:txBody>
+                  <a:tcPr marL="114300" marR="114300" marT="76200" marB="76200" anchor="ctr">
+                    <a:solidFill>
+                      <a:srgbClr val="163E6F"/>
+                    </a:solidFill>
+                  </a:tcPr>
+                </a:tc>
+                <a:tc>
+                  <a:txBody>
+                    <a:bodyPr/>
+                    <a:lstStyle/>
+                    <a:p>
+                      <a:r>
+                        <a:rPr sz="1800" b="1">
+                          <a:solidFill>
+                            <a:srgbClr val="FFFFFF"/>
+                          </a:solidFill>
+                        </a:rPr>
+                        <a:t>交付与交接</a:t>
+                      </a:r>
+                    </a:p>
+                  </a:txBody>
+                  <a:tcPr marL="114300" marR="114300" marT="76200" marB="76200" anchor="ctr">
+                    <a:solidFill>
+                      <a:srgbClr val="163E6F"/>
+                    </a:solidFill>
+                  </a:tcPr>
+                </a:tc>
+              </a:tr>
+              <a:tr h="533400">
+                <a:tc>
+                  <a:txBody>
+                    <a:bodyPr/>
+                    <a:lstStyle/>
+                    <a:p>
+                      <a:r>
+                        <a:rPr sz="1725">
+                          <a:solidFill>
+                            <a:srgbClr val="17212B"/>
+                          </a:solidFill>
+                        </a:rPr>
+                        <a:t>PLS项目负责人</a:t>
+                      </a:r>
+                    </a:p>
+                  </a:txBody>
+                  <a:tcPr marL="114300" marR="114300" marT="76200" marB="76200" anchor="ctr"/>
+                </a:tc>
+                <a:tc>
+                  <a:txBody>
+                    <a:bodyPr/>
+                    <a:lstStyle/>
+                    <a:p>
+                      <a:r>
+                        <a:rPr sz="1725">
+                          <a:solidFill>
+                            <a:srgbClr val="17212B"/>
+                          </a:solidFill>
+                        </a:rPr>
+                        <a:t>任命成员与备岗、协调资源、组织复盘</a:t>
+                      </a:r>
+                    </a:p>
+                  </a:txBody>
+                  <a:tcPr marL="114300" marR="114300" marT="76200" marB="76200" anchor="ctr"/>
+                </a:tc>
+                <a:tc>
+                  <a:txBody>
+                    <a:bodyPr/>
+                    <a:lstStyle/>
+                    <a:p>
+                      <a:r>
+                        <a:rPr sz="1725">
+                          <a:solidFill>
+                            <a:srgbClr val="17212B"/>
+                          </a:solidFill>
+                        </a:rPr>
+                        <a:t>分工表、资源安排、整改清单</a:t>
+                      </a:r>
+                    </a:p>
+                  </a:txBody>
+                  <a:tcPr marL="114300" marR="114300" marT="76200" marB="76200" anchor="ctr"/>
+                </a:tc>
+              </a:tr>
+              <a:tr h="533400">
+                <a:tc>
+                  <a:txBody>
+                    <a:bodyPr/>
+                    <a:lstStyle/>
+                    <a:p>
+                      <a:r>
+                        <a:rPr sz="1725">
+                          <a:solidFill>
+                            <a:srgbClr val="17212B"/>
+                          </a:solidFill>
+                        </a:rPr>
+                        <a:t>临床主诊医生</a:t>
+                      </a:r>
+                    </a:p>
+                  </a:txBody>
+                  <a:tcPr marL="114300" marR="114300" marT="76200" marB="76200" anchor="ctr"/>
+                </a:tc>
+                <a:tc>
+                  <a:txBody>
+                    <a:bodyPr/>
+                    <a:lstStyle/>
+                    <a:p>
+                      <a:r>
+                        <a:rPr sz="1725">
+                          <a:solidFill>
+                            <a:srgbClr val="17212B"/>
+                          </a:solidFill>
+                        </a:rPr>
+                        <a:t>适应证、方案、医疗告知与异常处置</a:t>
+                      </a:r>
+                    </a:p>
+                  </a:txBody>
+                  <a:tcPr marL="114300" marR="114300" marT="76200" marB="76200" anchor="ctr"/>
+                </a:tc>
+                <a:tc>
+                  <a:txBody>
+                    <a:bodyPr/>
+                    <a:lstStyle/>
+                    <a:p>
+                      <a:r>
+                        <a:rPr sz="1725">
+                          <a:solidFill>
+                            <a:srgbClr val="17212B"/>
+                          </a:solidFill>
+                        </a:rPr>
+                        <a:t>医学方案、风险记录、复查处置</a:t>
+                      </a:r>
+                    </a:p>
+                  </a:txBody>
+                  <a:tcPr marL="114300" marR="114300" marT="76200" marB="76200" anchor="ctr"/>
+                </a:tc>
+              </a:tr>
+              <a:tr h="533400">
+                <a:tc>
+                  <a:txBody>
+                    <a:bodyPr/>
+                    <a:lstStyle/>
+                    <a:p>
+                      <a:r>
+                        <a:rPr sz="1725">
+                          <a:solidFill>
+                            <a:srgbClr val="17212B"/>
+                          </a:solidFill>
+                        </a:rPr>
+                        <a:t>视觉质量评估角色</a:t>
+                      </a:r>
+                    </a:p>
+                  </a:txBody>
+                  <a:tcPr marL="114300" marR="114300" marT="76200" marB="76200" anchor="ctr"/>
+                </a:tc>
+                <a:tc>
+                  <a:txBody>
+                    <a:bodyPr/>
+                    <a:lstStyle/>
+                    <a:p>
+                      <a:r>
+                        <a:rPr sz="1725">
+                          <a:solidFill>
+                            <a:srgbClr val="17212B"/>
+                          </a:solidFill>
+                        </a:rPr>
+                        <a:t>规范检查、质量复核、整合需求摘要</a:t>
+                      </a:r>
+                    </a:p>
+                  </a:txBody>
+                  <a:tcPr marL="114300" marR="114300" marT="76200" marB="76200" anchor="ctr"/>
+                </a:tc>
+                <a:tc>
+                  <a:txBody>
+                    <a:bodyPr/>
+                    <a:lstStyle/>
+                    <a:p>
+                      <a:r>
+                        <a:rPr sz="1725">
+                          <a:solidFill>
+                            <a:srgbClr val="17212B"/>
+                          </a:solidFill>
+                        </a:rPr>
+                        <a:t>检查结果、缺项与风险标记 → 医生</a:t>
+                      </a:r>
+                    </a:p>
+                  </a:txBody>
+                  <a:tcPr marL="114300" marR="114300" marT="76200" marB="76200" anchor="ctr"/>
+                </a:tc>
+              </a:tr>
+              <a:tr h="533400">
+                <a:tc>
+                  <a:txBody>
+                    <a:bodyPr/>
+                    <a:lstStyle/>
+                    <a:p>
+                      <a:r>
+                        <a:rPr sz="1725">
+                          <a:solidFill>
+                            <a:srgbClr val="17212B"/>
+                          </a:solidFill>
+                        </a:rPr>
+                        <a:t>患者旅程管理师</a:t>
+                      </a:r>
+                    </a:p>
+                  </a:txBody>
+                  <a:tcPr marL="114300" marR="114300" marT="76200" marB="76200" anchor="ctr"/>
+                </a:tc>
+                <a:tc>
+                  <a:txBody>
+                    <a:bodyPr/>
+                    <a:lstStyle/>
+                    <a:p>
+                      <a:r>
+                        <a:rPr sz="1725">
+                          <a:solidFill>
+                            <a:srgbClr val="17212B"/>
+                          </a:solidFill>
+                        </a:rPr>
+                        <a:t>需求访谈、患教、预约及费用协调</a:t>
+                      </a:r>
+                    </a:p>
+                  </a:txBody>
+                  <a:tcPr marL="114300" marR="114300" marT="76200" marB="76200" anchor="ctr"/>
+                </a:tc>
+                <a:tc>
+                  <a:txBody>
+                    <a:bodyPr/>
+                    <a:lstStyle/>
+                    <a:p>
+                      <a:r>
+                        <a:rPr sz="1725">
+                          <a:solidFill>
+                            <a:srgbClr val="17212B"/>
+                          </a:solidFill>
+                        </a:rPr>
+                        <a:t>需求与理解记录、全程联系与问题升级</a:t>
+                      </a:r>
+                    </a:p>
+                  </a:txBody>
+                  <a:tcPr marL="114300" marR="114300" marT="76200" marB="76200" anchor="ctr"/>
+                </a:tc>
+              </a:tr>
+              <a:tr h="533400">
+                <a:tc>
+                  <a:txBody>
+                    <a:bodyPr/>
+                    <a:lstStyle/>
+                    <a:p>
+                      <a:r>
+                        <a:rPr sz="1725">
+                          <a:solidFill>
+                            <a:srgbClr val="17212B"/>
+                          </a:solidFill>
+                        </a:rPr>
+                        <a:t>手术质量与护理协调</a:t>
+                      </a:r>
+                    </a:p>
+                  </a:txBody>
+                  <a:tcPr marL="114300" marR="114300" marT="76200" marB="76200" anchor="ctr"/>
+                </a:tc>
+                <a:tc>
+                  <a:txBody>
+                    <a:bodyPr/>
+                    <a:lstStyle/>
+                    <a:p>
+                      <a:r>
+                        <a:rPr sz="1725">
+                          <a:solidFill>
+                            <a:srgbClr val="17212B"/>
+                          </a:solidFill>
+                        </a:rPr>
+                        <a:t>手术核查、护理、出院指导、专业随访</a:t>
+                      </a:r>
+                    </a:p>
+                  </a:txBody>
+                  <a:tcPr marL="114300" marR="114300" marT="76200" marB="76200" anchor="ctr"/>
+                </a:tc>
+                <a:tc>
+                  <a:txBody>
+                    <a:bodyPr/>
+                    <a:lstStyle/>
+                    <a:p>
+                      <a:r>
+                        <a:rPr sz="1725">
+                          <a:solidFill>
+                            <a:srgbClr val="17212B"/>
+                          </a:solidFill>
+                        </a:rPr>
+                        <a:t>核查、护理及随访记录 → 医生</a:t>
+                      </a:r>
+                    </a:p>
+                  </a:txBody>
+                  <a:tcPr marL="114300" marR="114300" marT="76200" marB="76200" anchor="ctr"/>
+                </a:tc>
+              </a:tr>
+              <a:tr h="533400">
+                <a:tc>
+                  <a:txBody>
+                    <a:bodyPr/>
+                    <a:lstStyle/>
+                    <a:p>
+                      <a:r>
+                        <a:rPr sz="1725">
+                          <a:solidFill>
+                            <a:srgbClr val="17212B"/>
+                          </a:solidFill>
+                        </a:rPr>
+                        <a:t>运营与合规支持</a:t>
+                      </a:r>
+                    </a:p>
+                  </a:txBody>
+                  <a:tcPr marL="114300" marR="114300" marT="76200" marB="76200" anchor="ctr"/>
+                </a:tc>
+                <a:tc>
+                  <a:txBody>
+                    <a:bodyPr/>
+                    <a:lstStyle/>
+                    <a:p>
+                      <a:r>
+                        <a:rPr sz="1725">
+                          <a:solidFill>
+                            <a:srgbClr val="17212B"/>
+                          </a:solidFill>
+                        </a:rPr>
+                        <a:t>费用核对、材料审核、运行数据与整改</a:t>
+                      </a:r>
+                    </a:p>
+                  </a:txBody>
+                  <a:tcPr marL="114300" marR="114300" marT="76200" marB="76200" anchor="ctr"/>
+                </a:tc>
+                <a:tc>
+                  <a:txBody>
+                    <a:bodyPr/>
+                    <a:lstStyle/>
+                    <a:p>
+                      <a:r>
+                        <a:rPr sz="1725">
+                          <a:solidFill>
+                            <a:srgbClr val="17212B"/>
+                          </a:solidFill>
+                        </a:rPr>
+                        <a:t>统一费用口径、匿名报表、审核证据</a:t>
+                      </a:r>
+                    </a:p>
+                  </a:txBody>
+                  <a:tcPr marL="114300" marR="114300" marT="76200" marB="76200" anchor="ctr"/>
+                </a:tc>
+              </a:tr>
+            </a:tbl>
+          </a:graphicData>
+        </a:graphic>
+      </p:graphicFrame>
+      <p:sp>
+        <p:nvSpPr>
+          <p:cNvPr id="8" name="">
+            <a:extLst xmlns:a="http://schemas.openxmlformats.org/drawingml/2006/main">
+              <a:ext uri="{FF2B5EF4-FFF2-40B4-BE49-F238E27FC236}">
+                <a16:creationId xmlns:a16="http://schemas.microsoft.com/office/drawing/2014/main" id="{4E49C08D-43A0-4BED-96B0-834CBD0764E1}"/>
+              </a:ext>
+            </a:extLst>
+          </p:cNvPr>
+          <p:cNvSpPr>
+            <a:spLocks xmlns:a="http://schemas.openxmlformats.org/drawingml/2006/main" noGrp="1"/>
+          </p:cNvSpPr>
+          <p:nvPr/>
+        </p:nvSpPr>
+        <p:spPr>
+          <a:xfrm xmlns:a="http://schemas.openxmlformats.org/drawingml/2006/main">
+            <a:off x="590550" y="5715000"/>
+            <a:ext cx="11010900" cy="323850"/>
+          </a:xfrm>
+          <a:prstGeom xmlns:a="http://schemas.openxmlformats.org/drawingml/2006/main" prst="rect">
+            <a:avLst/>
+          </a:prstGeom>
+          <a:noFill xmlns:a="http://schemas.openxmlformats.org/drawingml/2006/main"/>
+          <a:ln xmlns:a="http://schemas.openxmlformats.org/drawingml/2006/main" w="0">
+            <a:noFill/>
+          </a:ln>
+        </p:spPr>
+        <p:txBody>
+          <a:bodyPr xmlns:a="http://schemas.openxmlformats.org/drawingml/2006/main"/>
+          <a:lstStyle xmlns:a="http://schemas.openxmlformats.org/drawingml/2006/main">
+            <a:defPPr>
+              <a:defRPr sz="1800" b="1">
+                <a:solidFill>
+                  <a:srgbClr val="176C51"/>
+                </a:solidFill>
+              </a:defRPr>
+            </a:defPPr>
+          </a:lstStyle>
+          <a:p xmlns:a="http://schemas.openxmlformats.org/drawingml/2006/main">
+            <a:pPr>
+              <a:defRPr sz="1800" b="1">
+                <a:solidFill>
+                  <a:srgbClr val="176C51"/>
+                </a:solidFill>
+              </a:defRPr>
+            </a:pPr>
+            <a:r>
+              <a:rPr sz="1800" b="1">
+                <a:solidFill>
+                  <a:srgbClr val="176C51"/>
+                </a:solidFill>
+              </a:rPr>
+              <a:t>谈话、咨询、患教、客服及医助中的协调工作，整合为“患者旅程管理师”。</a:t>
+            </a:r>
+          </a:p>
+        </p:txBody>
+      </p:sp>
+      <p:sp>
+        <p:nvSpPr>
+          <p:cNvPr id="9" name="">
+            <a:extLst xmlns:a="http://schemas.openxmlformats.org/drawingml/2006/main">
+              <a:ext uri="{FF2B5EF4-FFF2-40B4-BE49-F238E27FC236}">
+                <a16:creationId xmlns:a16="http://schemas.microsoft.com/office/drawing/2014/main" id="{6DF5FD78-68D2-4294-A2C9-E80503E5BAD5}"/>
+              </a:ext>
+            </a:extLst>
+          </p:cNvPr>
+          <p:cNvSpPr>
+            <a:spLocks xmlns:a="http://schemas.openxmlformats.org/drawingml/2006/main" noGrp="1"/>
+          </p:cNvSpPr>
+          <p:nvPr/>
+        </p:nvSpPr>
+        <p:spPr>
+          <a:xfrm xmlns:a="http://schemas.openxmlformats.org/drawingml/2006/main">
+            <a:off x="590550" y="6000750"/>
+            <a:ext cx="11010900" cy="304800"/>
+          </a:xfrm>
+          <a:prstGeom xmlns:a="http://schemas.openxmlformats.org/drawingml/2006/main" prst="rect">
+            <a:avLst/>
+          </a:prstGeom>
+          <a:noFill xmlns:a="http://schemas.openxmlformats.org/drawingml/2006/main"/>
+          <a:ln xmlns:a="http://schemas.openxmlformats.org/drawingml/2006/main" w="0">
+            <a:noFill/>
+          </a:ln>
+        </p:spPr>
+        <p:txBody>
+          <a:bodyPr xmlns:a="http://schemas.openxmlformats.org/drawingml/2006/main"/>
+          <a:lstStyle xmlns:a="http://schemas.openxmlformats.org/drawingml/2006/main">
+            <a:defPPr>
+              <a:defRPr sz="1575" b="0">
+                <a:solidFill>
+                  <a:srgbClr val="607086"/>
+                </a:solidFill>
+              </a:defRPr>
+            </a:defPPr>
+          </a:lstStyle>
+          <a:p xmlns:a="http://schemas.openxmlformats.org/drawingml/2006/main">
+            <a:pPr>
+              <a:defRPr sz="1575" b="0">
+                <a:solidFill>
+                  <a:srgbClr val="607086"/>
+                </a:solidFill>
+              </a:defRPr>
+            </a:pPr>
+            <a:r>
+              <a:rPr sz="1575" b="0">
+                <a:solidFill>
+                  <a:srgbClr val="607086"/>
+                </a:solidFill>
+              </a:rPr>
+              <a:t>医疗、专业检查与护理按资质授权执行；医生承担最终医学判断，患者保留自主选择权。</a:t>
+            </a:r>
+          </a:p>
+        </p:txBody>
+      </p:sp>
+    </p:spTree>
+    <p:extLst>
+      <p:ext uri="{BB962C8B-B14F-4D97-AF65-F5344CB8AC3E}">
+        <p14:creationId xmlns:p14="http://schemas.microsoft.com/office/powerpoint/2010/main" val="432126819"/>
+      </p:ext>
+    </p:extLst>
+  </p:cSld>
+</p:sld>
+</file>
+
+<file path=ppt/slides/slide18.xml><?xml version="1.0" encoding="utf-8"?>
+<p:sld xmlns:p="http://schemas.openxmlformats.org/presentationml/2006/main">
+  <p:cSld>
+    <p:bg>
+      <p:bgPr>
+        <a:solidFill xmlns:a="http://schemas.openxmlformats.org/drawingml/2006/main">
+          <a:srgbClr val="FFFFFF"/>
+        </a:solidFill>
+      </p:bgPr>
+    </p:bg>
+    <p:spTree>
+      <p:nvGrpSpPr>
+        <p:cNvPr id="1" name=""/>
+        <p:cNvGrpSpPr/>
+        <p:nvPr/>
+      </p:nvGrpSpPr>
+      <p:grpSpPr>
+        <a:xfrm xmlns:a="http://schemas.openxmlformats.org/drawingml/2006/main"/>
+      </p:grpSpPr>
+      <p:sp>
+        <p:nvSpPr>
+          <p:cNvPr id="2" name="">
+            <a:extLst xmlns:a="http://schemas.openxmlformats.org/drawingml/2006/main">
+              <a:ext uri="{FF2B5EF4-FFF2-40B4-BE49-F238E27FC236}">
+                <a16:creationId xmlns:a16="http://schemas.microsoft.com/office/drawing/2014/main" id="{6B0F5DF3-D822-48C9-8C38-B9B4005EE562}"/>
+              </a:ext>
+            </a:extLst>
+          </p:cNvPr>
+          <p:cNvSpPr>
+            <a:spLocks xmlns:a="http://schemas.openxmlformats.org/drawingml/2006/main" noGrp="1"/>
+          </p:cNvSpPr>
+          <p:nvPr/>
+        </p:nvSpPr>
+        <p:spPr>
+          <a:xfrm xmlns:a="http://schemas.openxmlformats.org/drawingml/2006/main">
+            <a:off x="0" y="0"/>
+            <a:ext cx="12192000" cy="95250"/>
+          </a:xfrm>
+          <a:prstGeom xmlns:a="http://schemas.openxmlformats.org/drawingml/2006/main" prst="rect">
+            <a:avLst/>
+          </a:prstGeom>
+          <a:solidFill xmlns:a="http://schemas.openxmlformats.org/drawingml/2006/main">
+            <a:srgbClr val="E6AA16"/>
+          </a:solidFill>
+          <a:ln xmlns:a="http://schemas.openxmlformats.org/drawingml/2006/main" w="0">
+            <a:solidFill>
+              <a:srgbClr val="E6AA16"/>
+            </a:solidFill>
+          </a:ln>
+        </p:spPr>
+      </p:sp>
+      <p:sp>
+        <p:nvSpPr>
+          <p:cNvPr id="3" name="">
+            <a:extLst xmlns:a="http://schemas.openxmlformats.org/drawingml/2006/main">
+              <a:ext uri="{FF2B5EF4-FFF2-40B4-BE49-F238E27FC236}">
+                <a16:creationId xmlns:a16="http://schemas.microsoft.com/office/drawing/2014/main" id="{1E5600DB-F5A3-4160-9C1B-51840EACA4B4}"/>
+              </a:ext>
+            </a:extLst>
+          </p:cNvPr>
+          <p:cNvSpPr>
+            <a:spLocks xmlns:a="http://schemas.openxmlformats.org/drawingml/2006/main" noGrp="1"/>
+          </p:cNvSpPr>
+          <p:nvPr/>
+        </p:nvSpPr>
+        <p:spPr>
+          <a:xfrm xmlns:a="http://schemas.openxmlformats.org/drawingml/2006/main">
+            <a:off x="590550" y="419100"/>
+            <a:ext cx="9906000" cy="609600"/>
+          </a:xfrm>
+          <a:prstGeom xmlns:a="http://schemas.openxmlformats.org/drawingml/2006/main" prst="rect">
+            <a:avLst/>
+          </a:prstGeom>
+          <a:noFill xmlns:a="http://schemas.openxmlformats.org/drawingml/2006/main"/>
+          <a:ln xmlns:a="http://schemas.openxmlformats.org/drawingml/2006/main" w="0">
+            <a:noFill/>
+          </a:ln>
+        </p:spPr>
+        <p:txBody>
+          <a:bodyPr xmlns:a="http://schemas.openxmlformats.org/drawingml/2006/main">
+            <a:normAutofit fontScale="100000"/>
+          </a:bodyPr>
+          <a:lstStyle xmlns:a="http://schemas.openxmlformats.org/drawingml/2006/main"/>
+          <a:p xmlns:a="http://schemas.openxmlformats.org/drawingml/2006/main">
+            <a:pPr>
+              <a:defRPr sz="2850" b="1" i="0">
+                <a:solidFill>
+                  <a:srgbClr val="163E6F"/>
+                </a:solidFill>
+                <a:latin typeface="Microsoft YaHei"/>
+                <a:ea typeface="Microsoft YaHei"/>
+                <a:cs typeface="Microsoft YaHei"/>
+              </a:defRPr>
+            </a:pPr>
+            <a:r>
+              <a:rPr sz="2850" b="1" i="0">
+                <a:solidFill>
+                  <a:srgbClr val="163E6F"/>
+                </a:solidFill>
+                <a:latin typeface="Microsoft YaHei"/>
+                <a:ea typeface="Microsoft YaHei"/>
+                <a:cs typeface="Microsoft YaHei"/>
+              </a:rPr>
+              <a:t>现场指定院方PLS团队成员</a:t>
+            </a:r>
+          </a:p>
+        </p:txBody>
+      </p:sp>
+      <p:pic>
+        <p:nvPicPr>
+          <p:cNvPr id="4" name=""/>
+          <p:cNvPicPr>
+            <a:picLocks xmlns:a="http://schemas.openxmlformats.org/drawingml/2006/main" noChangeAspect="1"/>
+          </p:cNvPicPr>
+          <p:nvPr/>
+        </p:nvPicPr>
+        <p:blipFill>
+          <a:blip xmlns:r="http://schemas.openxmlformats.org/officeDocument/2006/relationships" xmlns:a="http://schemas.openxmlformats.org/drawingml/2006/main" r:embed="R862010f0dd7b411c"/>
+          <a:stretch xmlns:a="http://schemas.openxmlformats.org/drawingml/2006/main"/>
+        </p:blipFill>
+        <p:spPr>
+          <a:xfrm xmlns:a="http://schemas.openxmlformats.org/drawingml/2006/main">
+            <a:off x="10287000" y="352758"/>
+            <a:ext cx="1333500" cy="380333"/>
+          </a:xfrm>
+          <a:prstGeom xmlns:a="http://schemas.openxmlformats.org/drawingml/2006/main" prst="rect">
+            <a:avLst/>
+          </a:prstGeom>
+        </p:spPr>
+      </p:pic>
+      <p:sp>
+        <p:nvSpPr>
+          <p:cNvPr id="5" name="">
+            <a:extLst xmlns:a="http://schemas.openxmlformats.org/drawingml/2006/main">
+              <a:ext uri="{FF2B5EF4-FFF2-40B4-BE49-F238E27FC236}">
+                <a16:creationId xmlns:a16="http://schemas.microsoft.com/office/drawing/2014/main" id="{8922AEA4-FE78-4FDC-A68C-80190C7E55D2}"/>
+              </a:ext>
+            </a:extLst>
+          </p:cNvPr>
+          <p:cNvSpPr>
+            <a:spLocks xmlns:a="http://schemas.openxmlformats.org/drawingml/2006/main" noGrp="1"/>
+          </p:cNvSpPr>
+          <p:nvPr/>
+        </p:nvSpPr>
+        <p:spPr>
+          <a:xfrm xmlns:a="http://schemas.openxmlformats.org/drawingml/2006/main">
+            <a:off x="590550" y="6381750"/>
+            <a:ext cx="3429000" cy="209550"/>
+          </a:xfrm>
+          <a:prstGeom xmlns:a="http://schemas.openxmlformats.org/drawingml/2006/main" prst="rect">
+            <a:avLst/>
+          </a:prstGeom>
+          <a:noFill xmlns:a="http://schemas.openxmlformats.org/drawingml/2006/main"/>
+          <a:ln xmlns:a="http://schemas.openxmlformats.org/drawingml/2006/main" w="0">
+            <a:noFill/>
+          </a:ln>
+        </p:spPr>
+        <p:txBody>
+          <a:bodyPr xmlns:a="http://schemas.openxmlformats.org/drawingml/2006/main">
+            <a:normAutofit fontScale="86111"/>
+          </a:bodyPr>
+          <a:lstStyle xmlns:a="http://schemas.openxmlformats.org/drawingml/2006/main"/>
+          <a:p xmlns:a="http://schemas.openxmlformats.org/drawingml/2006/main">
+            <a:pPr>
+              <a:defRPr sz="900" b="0" i="0">
+                <a:solidFill>
+                  <a:srgbClr val="607086"/>
+                </a:solidFill>
+                <a:latin typeface="Microsoft YaHei"/>
+                <a:ea typeface="Microsoft YaHei"/>
+                <a:cs typeface="Microsoft YaHei"/>
+              </a:defRPr>
+            </a:pPr>
+            <a:r>
+              <a:rPr sz="900" b="0" i="0">
+                <a:solidFill>
+                  <a:srgbClr val="607086"/>
+                </a:solidFill>
+                <a:latin typeface="Microsoft YaHei"/>
+                <a:ea typeface="Microsoft YaHei"/>
+                <a:cs typeface="Microsoft YaHei"/>
+              </a:rPr>
+              <a:t>强生眼力健 PLS 项目研讨会</a:t>
+            </a:r>
+          </a:p>
+        </p:txBody>
+      </p:sp>
+      <p:sp>
+        <p:nvSpPr>
+          <p:cNvPr id="6" name="">
+            <a:extLst xmlns:a="http://schemas.openxmlformats.org/drawingml/2006/main">
+              <a:ext uri="{FF2B5EF4-FFF2-40B4-BE49-F238E27FC236}">
+                <a16:creationId xmlns:a16="http://schemas.microsoft.com/office/drawing/2014/main" id="{D70A61C3-EA3B-4038-AA65-F93EA4F1A1E6}"/>
+              </a:ext>
+            </a:extLst>
+          </p:cNvPr>
+          <p:cNvSpPr>
+            <a:spLocks xmlns:a="http://schemas.openxmlformats.org/drawingml/2006/main" noGrp="1"/>
+          </p:cNvSpPr>
+          <p:nvPr/>
+        </p:nvSpPr>
+        <p:spPr>
+          <a:xfrm xmlns:a="http://schemas.openxmlformats.org/drawingml/2006/main">
+            <a:off x="590550" y="1095375"/>
+            <a:ext cx="11010900" cy="381000"/>
+          </a:xfrm>
+          <a:prstGeom xmlns:a="http://schemas.openxmlformats.org/drawingml/2006/main" prst="rect">
+            <a:avLst/>
+          </a:prstGeom>
+          <a:noFill xmlns:a="http://schemas.openxmlformats.org/drawingml/2006/main"/>
+          <a:ln xmlns:a="http://schemas.openxmlformats.org/drawingml/2006/main" w="0">
+            <a:noFill/>
+          </a:ln>
+        </p:spPr>
+        <p:txBody>
+          <a:bodyPr xmlns:a="http://schemas.openxmlformats.org/drawingml/2006/main"/>
+          <a:lstStyle xmlns:a="http://schemas.openxmlformats.org/drawingml/2006/main">
+            <a:defPPr>
+              <a:defRPr sz="1950" b="1">
+                <a:solidFill>
+                  <a:srgbClr val="163E6F"/>
+                </a:solidFill>
+              </a:defRPr>
+            </a:defPPr>
+          </a:lstStyle>
+          <a:p xmlns:a="http://schemas.openxmlformats.org/drawingml/2006/main">
+            <a:pPr>
+              <a:defRPr sz="1950" b="1">
+                <a:solidFill>
+                  <a:srgbClr val="163E6F"/>
+                </a:solidFill>
+              </a:defRPr>
+            </a:pPr>
+            <a:r>
+              <a:rPr sz="1950" b="1">
+                <a:solidFill>
+                  <a:srgbClr val="163E6F"/>
+                </a:solidFill>
+              </a:rPr>
+              <a:t>CEO与院长现场指定成员，由记录人填入姓名并逐项读回确认</a:t>
+            </a:r>
+          </a:p>
+        </p:txBody>
+      </p:sp>
+      <p:graphicFrame>
+        <p:nvGraphicFramePr>
+          <p:cNvPr id="7" name="">
+            <a:extLst xmlns:a="http://schemas.openxmlformats.org/drawingml/2006/main">
+              <a:ext uri="{FF2B5EF4-FFF2-40B4-BE49-F238E27FC236}">
+                <a16:creationId xmlns:a16="http://schemas.microsoft.com/office/drawing/2014/main" id="{E303FE1C-2B13-48B1-B907-34BA284B23D7}"/>
+              </a:ext>
+            </a:extLst>
+          </p:cNvPr>
+          <p:cNvGraphicFramePr/>
+          <p:nvPr/>
+        </p:nvGraphicFramePr>
+        <p:xfrm>
+          <a:off xmlns:a="http://schemas.openxmlformats.org/drawingml/2006/main" x="590550" y="1657350"/>
+          <a:ext xmlns:a="http://schemas.openxmlformats.org/drawingml/2006/main" cx="11010900" cy="3733800"/>
+        </p:xfrm>
+        <a:graphic xmlns:a="http://schemas.openxmlformats.org/drawingml/2006/main">
+          <a:graphicData uri="http://schemas.openxmlformats.org/drawingml/2006/table">
+            <a:tbl>
+              <a:tblPr/>
+              <a:tblGrid>
+                <a:gridCol w="2571750"/>
+                <a:gridCol w="2095500"/>
+                <a:gridCol w="2095500"/>
+                <a:gridCol w="2095500"/>
+                <a:gridCol w="2152650"/>
+              </a:tblGrid>
+              <a:tr h="533400">
+                <a:tc>
+                  <a:txBody>
+                    <a:bodyPr/>
+                    <a:lstStyle/>
+                    <a:p>
+                      <a:r>
+                        <a:rPr sz="1800" b="1">
+                          <a:solidFill>
+                            <a:srgbClr val="FFFFFF"/>
+                          </a:solidFill>
+                        </a:rPr>
+                        <a:t>院方角色</a:t>
+                      </a:r>
+                    </a:p>
+                  </a:txBody>
+                  <a:tcPr marL="114300" marR="114300" marT="76200" marB="76200" anchor="ctr">
+                    <a:solidFill>
+                      <a:srgbClr val="163E6F"/>
+                    </a:solidFill>
+                  </a:tcPr>
+                </a:tc>
+                <a:tc>
+                  <a:txBody>
+                    <a:bodyPr/>
+                    <a:lstStyle/>
+                    <a:p>
+                      <a:r>
+                        <a:rPr sz="1800" b="1">
+                          <a:solidFill>
+                            <a:srgbClr val="FFFFFF"/>
+                          </a:solidFill>
+                        </a:rPr>
+                        <a:t>主责成员姓名</a:t>
+                      </a:r>
+                    </a:p>
+                  </a:txBody>
+                  <a:tcPr marL="114300" marR="114300" marT="76200" marB="76200" anchor="ctr">
+                    <a:solidFill>
+                      <a:srgbClr val="163E6F"/>
+                    </a:solidFill>
+                  </a:tcPr>
+                </a:tc>
+                <a:tc>
+                  <a:txBody>
+                    <a:bodyPr/>
+                    <a:lstStyle/>
+                    <a:p>
+                      <a:r>
+                        <a:rPr sz="1800" b="1">
+                          <a:solidFill>
+                            <a:srgbClr val="FFFFFF"/>
+                          </a:solidFill>
+                        </a:rPr>
+                        <a:t>部门 / 职务</a:t>
+                      </a:r>
+                    </a:p>
+                  </a:txBody>
+                  <a:tcPr marL="114300" marR="114300" marT="76200" marB="76200" anchor="ctr">
+                    <a:solidFill>
+                      <a:srgbClr val="163E6F"/>
+                    </a:solidFill>
+                  </a:tcPr>
+                </a:tc>
+                <a:tc>
+                  <a:txBody>
+                    <a:bodyPr/>
+                    <a:lstStyle/>
+                    <a:p>
+                      <a:r>
+                        <a:rPr sz="1800" b="1">
+                          <a:solidFill>
+                            <a:srgbClr val="FFFFFF"/>
+                          </a:solidFill>
+                        </a:rPr>
+                        <a:t>备岗姓名</a:t>
+                      </a:r>
+                    </a:p>
+                  </a:txBody>
+                  <a:tcPr marL="114300" marR="114300" marT="76200" marB="76200" anchor="ctr">
+                    <a:solidFill>
+                      <a:srgbClr val="163E6F"/>
+                    </a:solidFill>
+                  </a:tcPr>
+                </a:tc>
+                <a:tc>
+                  <a:txBody>
+                    <a:bodyPr/>
+                    <a:lstStyle/>
+                    <a:p>
+                      <a:r>
+                        <a:rPr sz="1800" b="1">
+                          <a:solidFill>
+                            <a:srgbClr val="FFFFFF"/>
+                          </a:solidFill>
+                        </a:rPr>
+                        <a:t>到位日期</a:t>
+                      </a:r>
+                    </a:p>
+                  </a:txBody>
+                  <a:tcPr marL="114300" marR="114300" marT="76200" marB="76200" anchor="ctr">
+                    <a:solidFill>
+                      <a:srgbClr val="163E6F"/>
+                    </a:solidFill>
+                  </a:tcPr>
+                </a:tc>
+              </a:tr>
+              <a:tr h="533400">
+                <a:tc>
+                  <a:txBody>
+                    <a:bodyPr/>
+                    <a:lstStyle/>
+                    <a:p>
+                      <a:r>
+                        <a:rPr sz="1725">
+                          <a:solidFill>
+                            <a:srgbClr val="17212B"/>
+                          </a:solidFill>
+                        </a:rPr>
+                        <a:t>PLS项目负责人</a:t>
+                      </a:r>
+                    </a:p>
+                  </a:txBody>
+                  <a:tcPr marL="114300" marR="114300" marT="76200" marB="76200" anchor="ctr"/>
+                </a:tc>
+                <a:tc>
+                  <a:txBody>
+                    <a:bodyPr/>
+                    <a:lstStyle/>
+                    <a:p>
+                      <a:r>
+                        <a:rPr sz="1725">
+                          <a:solidFill>
+                            <a:srgbClr val="17212B"/>
+                          </a:solidFill>
+                        </a:rPr>
+                        <a:t>____________</a:t>
+                      </a:r>
+                    </a:p>
+                  </a:txBody>
+                  <a:tcPr marL="114300" marR="114300" marT="76200" marB="76200" anchor="ctr"/>
+                </a:tc>
+                <a:tc>
+                  <a:txBody>
+                    <a:bodyPr/>
+                    <a:lstStyle/>
+                    <a:p>
+                      <a:r>
+                        <a:rPr sz="1725">
+                          <a:solidFill>
+                            <a:srgbClr val="17212B"/>
+                          </a:solidFill>
+                        </a:rPr>
+                        <a:t>____________</a:t>
+                      </a:r>
+                    </a:p>
+                  </a:txBody>
+                  <a:tcPr marL="114300" marR="114300" marT="76200" marB="76200" anchor="ctr"/>
+                </a:tc>
+                <a:tc>
+                  <a:txBody>
+                    <a:bodyPr/>
+                    <a:lstStyle/>
+                    <a:p>
+                      <a:r>
+                        <a:rPr sz="1725">
+                          <a:solidFill>
+                            <a:srgbClr val="17212B"/>
+                          </a:solidFill>
+                        </a:rPr>
+                        <a:t>____________</a:t>
+                      </a:r>
+                    </a:p>
+                  </a:txBody>
+                  <a:tcPr marL="114300" marR="114300" marT="76200" marB="76200" anchor="ctr"/>
+                </a:tc>
+                <a:tc>
+                  <a:txBody>
+                    <a:bodyPr/>
+                    <a:lstStyle/>
+                    <a:p>
+                      <a:r>
+                        <a:rPr sz="1725">
+                          <a:solidFill>
+                            <a:srgbClr val="17212B"/>
+                          </a:solidFill>
+                        </a:rPr>
+                        <a:t>____________</a:t>
+                      </a:r>
+                    </a:p>
+                  </a:txBody>
+                  <a:tcPr marL="114300" marR="114300" marT="76200" marB="76200" anchor="ctr"/>
+                </a:tc>
+              </a:tr>
+              <a:tr h="533400">
+                <a:tc>
+                  <a:txBody>
+                    <a:bodyPr/>
+                    <a:lstStyle/>
+                    <a:p>
+                      <a:r>
+                        <a:rPr sz="1725">
+                          <a:solidFill>
+                            <a:srgbClr val="17212B"/>
+                          </a:solidFill>
+                        </a:rPr>
+                        <a:t>临床主诊医生</a:t>
+                      </a:r>
+                    </a:p>
+                  </a:txBody>
+                  <a:tcPr marL="114300" marR="114300" marT="76200" marB="76200" anchor="ctr"/>
+                </a:tc>
+                <a:tc>
+                  <a:txBody>
+                    <a:bodyPr/>
+                    <a:lstStyle/>
+                    <a:p>
+                      <a:r>
+                        <a:rPr sz="1725">
+                          <a:solidFill>
+                            <a:srgbClr val="17212B"/>
+                          </a:solidFill>
+                        </a:rPr>
+                        <a:t>____________</a:t>
+                      </a:r>
+                    </a:p>
+                  </a:txBody>
+                  <a:tcPr marL="114300" marR="114300" marT="76200" marB="76200" anchor="ctr"/>
+                </a:tc>
+                <a:tc>
+                  <a:txBody>
+                    <a:bodyPr/>
+                    <a:lstStyle/>
+                    <a:p>
+                      <a:r>
+                        <a:rPr sz="1725">
+                          <a:solidFill>
+                            <a:srgbClr val="17212B"/>
+                          </a:solidFill>
+                        </a:rPr>
+                        <a:t>____________</a:t>
+                      </a:r>
+                    </a:p>
+                  </a:txBody>
+                  <a:tcPr marL="114300" marR="114300" marT="76200" marB="76200" anchor="ctr"/>
+                </a:tc>
+                <a:tc>
+                  <a:txBody>
+                    <a:bodyPr/>
+                    <a:lstStyle/>
+                    <a:p>
+                      <a:r>
+                        <a:rPr sz="1725">
+                          <a:solidFill>
+                            <a:srgbClr val="17212B"/>
+                          </a:solidFill>
+                        </a:rPr>
+                        <a:t>____________</a:t>
+                      </a:r>
+                    </a:p>
+                  </a:txBody>
+                  <a:tcPr marL="114300" marR="114300" marT="76200" marB="76200" anchor="ctr"/>
+                </a:tc>
+                <a:tc>
+                  <a:txBody>
+                    <a:bodyPr/>
+                    <a:lstStyle/>
+                    <a:p>
+                      <a:r>
+                        <a:rPr sz="1725">
+                          <a:solidFill>
+                            <a:srgbClr val="17212B"/>
+                          </a:solidFill>
+                        </a:rPr>
+                        <a:t>____________</a:t>
+                      </a:r>
+                    </a:p>
+                  </a:txBody>
+                  <a:tcPr marL="114300" marR="114300" marT="76200" marB="76200" anchor="ctr"/>
+                </a:tc>
+              </a:tr>
+              <a:tr h="533400">
+                <a:tc>
+                  <a:txBody>
+                    <a:bodyPr/>
+                    <a:lstStyle/>
+                    <a:p>
+                      <a:r>
+                        <a:rPr sz="1725">
+                          <a:solidFill>
+                            <a:srgbClr val="17212B"/>
+                          </a:solidFill>
+                        </a:rPr>
+                        <a:t>视觉质量评估角色</a:t>
+                      </a:r>
+                    </a:p>
+                  </a:txBody>
+                  <a:tcPr marL="114300" marR="114300" marT="76200" marB="76200" anchor="ctr"/>
+                </a:tc>
+                <a:tc>
+                  <a:txBody>
+                    <a:bodyPr/>
+                    <a:lstStyle/>
+                    <a:p>
+                      <a:r>
+                        <a:rPr sz="1725">
+                          <a:solidFill>
+                            <a:srgbClr val="17212B"/>
+                          </a:solidFill>
+                        </a:rPr>
+                        <a:t>____________</a:t>
+                      </a:r>
+                    </a:p>
+                  </a:txBody>
+                  <a:tcPr marL="114300" marR="114300" marT="76200" marB="76200" anchor="ctr"/>
+                </a:tc>
+                <a:tc>
+                  <a:txBody>
+                    <a:bodyPr/>
+                    <a:lstStyle/>
+                    <a:p>
+                      <a:r>
+                        <a:rPr sz="1725">
+                          <a:solidFill>
+                            <a:srgbClr val="17212B"/>
+                          </a:solidFill>
+                        </a:rPr>
+                        <a:t>____________</a:t>
+                      </a:r>
+                    </a:p>
+                  </a:txBody>
+                  <a:tcPr marL="114300" marR="114300" marT="76200" marB="76200" anchor="ctr"/>
+                </a:tc>
+                <a:tc>
+                  <a:txBody>
+                    <a:bodyPr/>
+                    <a:lstStyle/>
+                    <a:p>
+                      <a:r>
+                        <a:rPr sz="1725">
+                          <a:solidFill>
+                            <a:srgbClr val="17212B"/>
+                          </a:solidFill>
+                        </a:rPr>
+                        <a:t>____________</a:t>
+                      </a:r>
+                    </a:p>
+                  </a:txBody>
+                  <a:tcPr marL="114300" marR="114300" marT="76200" marB="76200" anchor="ctr"/>
+                </a:tc>
+                <a:tc>
+                  <a:txBody>
+                    <a:bodyPr/>
+                    <a:lstStyle/>
+                    <a:p>
+                      <a:r>
+                        <a:rPr sz="1725">
+                          <a:solidFill>
+                            <a:srgbClr val="17212B"/>
+                          </a:solidFill>
+                        </a:rPr>
+                        <a:t>____________</a:t>
+                      </a:r>
+                    </a:p>
+                  </a:txBody>
+                  <a:tcPr marL="114300" marR="114300" marT="76200" marB="76200" anchor="ctr"/>
+                </a:tc>
+              </a:tr>
+              <a:tr h="533400">
+                <a:tc>
+                  <a:txBody>
+                    <a:bodyPr/>
+                    <a:lstStyle/>
+                    <a:p>
+                      <a:r>
+                        <a:rPr sz="1725">
+                          <a:solidFill>
+                            <a:srgbClr val="17212B"/>
+                          </a:solidFill>
+                        </a:rPr>
+                        <a:t>患者旅程管理师</a:t>
+                      </a:r>
+                    </a:p>
+                  </a:txBody>
+                  <a:tcPr marL="114300" marR="114300" marT="76200" marB="76200" anchor="ctr"/>
+                </a:tc>
+                <a:tc>
+                  <a:txBody>
+                    <a:bodyPr/>
+                    <a:lstStyle/>
+                    <a:p>
+                      <a:r>
+                        <a:rPr sz="1725">
+                          <a:solidFill>
+                            <a:srgbClr val="17212B"/>
+                          </a:solidFill>
+                        </a:rPr>
+                        <a:t>____________</a:t>
+                      </a:r>
+                    </a:p>
+                  </a:txBody>
+                  <a:tcPr marL="114300" marR="114300" marT="76200" marB="76200" anchor="ctr"/>
+                </a:tc>
+                <a:tc>
+                  <a:txBody>
+                    <a:bodyPr/>
+                    <a:lstStyle/>
+                    <a:p>
+                      <a:r>
+                        <a:rPr sz="1725">
+                          <a:solidFill>
+                            <a:srgbClr val="17212B"/>
+                          </a:solidFill>
+                        </a:rPr>
+                        <a:t>____________</a:t>
+                      </a:r>
+                    </a:p>
+                  </a:txBody>
+                  <a:tcPr marL="114300" marR="114300" marT="76200" marB="76200" anchor="ctr"/>
+                </a:tc>
+                <a:tc>
+                  <a:txBody>
+                    <a:bodyPr/>
+                    <a:lstStyle/>
+                    <a:p>
+                      <a:r>
+                        <a:rPr sz="1725">
+                          <a:solidFill>
+                            <a:srgbClr val="17212B"/>
+                          </a:solidFill>
+                        </a:rPr>
+                        <a:t>____________</a:t>
+                      </a:r>
+                    </a:p>
+                  </a:txBody>
+                  <a:tcPr marL="114300" marR="114300" marT="76200" marB="76200" anchor="ctr"/>
+                </a:tc>
+                <a:tc>
+                  <a:txBody>
+                    <a:bodyPr/>
+                    <a:lstStyle/>
+                    <a:p>
+                      <a:r>
+                        <a:rPr sz="1725">
+                          <a:solidFill>
+                            <a:srgbClr val="17212B"/>
+                          </a:solidFill>
+                        </a:rPr>
+                        <a:t>____________</a:t>
+                      </a:r>
+                    </a:p>
+                  </a:txBody>
+                  <a:tcPr marL="114300" marR="114300" marT="76200" marB="76200" anchor="ctr"/>
+                </a:tc>
+              </a:tr>
+              <a:tr h="533400">
+                <a:tc>
+                  <a:txBody>
+                    <a:bodyPr/>
+                    <a:lstStyle/>
+                    <a:p>
+                      <a:r>
+                        <a:rPr sz="1725">
+                          <a:solidFill>
+                            <a:srgbClr val="17212B"/>
+                          </a:solidFill>
+                        </a:rPr>
+                        <a:t>手术质量与护理协调</a:t>
+                      </a:r>
+                    </a:p>
+                  </a:txBody>
+                  <a:tcPr marL="114300" marR="114300" marT="76200" marB="76200" anchor="ctr"/>
+                </a:tc>
+                <a:tc>
+                  <a:txBody>
+                    <a:bodyPr/>
+                    <a:lstStyle/>
+                    <a:p>
+                      <a:r>
+                        <a:rPr sz="1725">
+                          <a:solidFill>
+                            <a:srgbClr val="17212B"/>
+                          </a:solidFill>
+                        </a:rPr>
+                        <a:t>____________</a:t>
+                      </a:r>
+                    </a:p>
+                  </a:txBody>
+                  <a:tcPr marL="114300" marR="114300" marT="76200" marB="76200" anchor="ctr"/>
+                </a:tc>
+                <a:tc>
+                  <a:txBody>
+                    <a:bodyPr/>
+                    <a:lstStyle/>
+                    <a:p>
+                      <a:r>
+                        <a:rPr sz="1725">
+                          <a:solidFill>
+                            <a:srgbClr val="17212B"/>
+                          </a:solidFill>
+                        </a:rPr>
+                        <a:t>____________</a:t>
+                      </a:r>
+                    </a:p>
+                  </a:txBody>
+                  <a:tcPr marL="114300" marR="114300" marT="76200" marB="76200" anchor="ctr"/>
+                </a:tc>
+                <a:tc>
+                  <a:txBody>
+                    <a:bodyPr/>
+                    <a:lstStyle/>
+                    <a:p>
+                      <a:r>
+                        <a:rPr sz="1725">
+                          <a:solidFill>
+                            <a:srgbClr val="17212B"/>
+                          </a:solidFill>
+                        </a:rPr>
+                        <a:t>____________</a:t>
+                      </a:r>
+                    </a:p>
+                  </a:txBody>
+                  <a:tcPr marL="114300" marR="114300" marT="76200" marB="76200" anchor="ctr"/>
+                </a:tc>
+                <a:tc>
+                  <a:txBody>
+                    <a:bodyPr/>
+                    <a:lstStyle/>
+                    <a:p>
+                      <a:r>
+                        <a:rPr sz="1725">
+                          <a:solidFill>
+                            <a:srgbClr val="17212B"/>
+                          </a:solidFill>
+                        </a:rPr>
+                        <a:t>____________</a:t>
+                      </a:r>
+                    </a:p>
+                  </a:txBody>
+                  <a:tcPr marL="114300" marR="114300" marT="76200" marB="76200" anchor="ctr"/>
+                </a:tc>
+              </a:tr>
+              <a:tr h="533400">
+                <a:tc>
+                  <a:txBody>
+                    <a:bodyPr/>
+                    <a:lstStyle/>
+                    <a:p>
+                      <a:r>
+                        <a:rPr sz="1725">
+                          <a:solidFill>
+                            <a:srgbClr val="17212B"/>
+                          </a:solidFill>
+                        </a:rPr>
+                        <a:t>运营与合规支持</a:t>
+                      </a:r>
+                    </a:p>
+                  </a:txBody>
+                  <a:tcPr marL="114300" marR="114300" marT="76200" marB="76200" anchor="ctr"/>
+                </a:tc>
+                <a:tc>
+                  <a:txBody>
+                    <a:bodyPr/>
+                    <a:lstStyle/>
+                    <a:p>
+                      <a:r>
+                        <a:rPr sz="1725">
+                          <a:solidFill>
+                            <a:srgbClr val="17212B"/>
+                          </a:solidFill>
+                        </a:rPr>
+                        <a:t>____________</a:t>
+                      </a:r>
+                    </a:p>
+                  </a:txBody>
+                  <a:tcPr marL="114300" marR="114300" marT="76200" marB="76200" anchor="ctr"/>
+                </a:tc>
+                <a:tc>
+                  <a:txBody>
+                    <a:bodyPr/>
+                    <a:lstStyle/>
+                    <a:p>
+                      <a:r>
+                        <a:rPr sz="1725">
+                          <a:solidFill>
+                            <a:srgbClr val="17212B"/>
+                          </a:solidFill>
+                        </a:rPr>
+                        <a:t>____________</a:t>
+                      </a:r>
+                    </a:p>
+                  </a:txBody>
+                  <a:tcPr marL="114300" marR="114300" marT="76200" marB="76200" anchor="ctr"/>
+                </a:tc>
+                <a:tc>
+                  <a:txBody>
+                    <a:bodyPr/>
+                    <a:lstStyle/>
+                    <a:p>
+                      <a:r>
+                        <a:rPr sz="1725">
+                          <a:solidFill>
+                            <a:srgbClr val="17212B"/>
+                          </a:solidFill>
+                        </a:rPr>
+                        <a:t>____________</a:t>
+                      </a:r>
+                    </a:p>
+                  </a:txBody>
+                  <a:tcPr marL="114300" marR="114300" marT="76200" marB="76200" anchor="ctr"/>
+                </a:tc>
+                <a:tc>
+                  <a:txBody>
+                    <a:bodyPr/>
+                    <a:lstStyle/>
+                    <a:p>
+                      <a:r>
+                        <a:rPr sz="1725">
+                          <a:solidFill>
+                            <a:srgbClr val="17212B"/>
+                          </a:solidFill>
+                        </a:rPr>
+                        <a:t>____________</a:t>
+                      </a:r>
+                    </a:p>
+                  </a:txBody>
+                  <a:tcPr marL="114300" marR="114300" marT="76200" marB="76200" anchor="ctr"/>
+                </a:tc>
+              </a:tr>
+            </a:tbl>
+          </a:graphicData>
+        </a:graphic>
+      </p:graphicFrame>
+      <p:sp>
+        <p:nvSpPr>
+          <p:cNvPr id="8" name="">
+            <a:extLst xmlns:a="http://schemas.openxmlformats.org/drawingml/2006/main">
+              <a:ext uri="{FF2B5EF4-FFF2-40B4-BE49-F238E27FC236}">
+                <a16:creationId xmlns:a16="http://schemas.microsoft.com/office/drawing/2014/main" id="{E5DECCEE-9A1B-4AEA-B2DF-5B97937E54B0}"/>
+              </a:ext>
+            </a:extLst>
+          </p:cNvPr>
+          <p:cNvSpPr>
+            <a:spLocks xmlns:a="http://schemas.openxmlformats.org/drawingml/2006/main" noGrp="1"/>
+          </p:cNvSpPr>
+          <p:nvPr/>
+        </p:nvSpPr>
+        <p:spPr>
+          <a:xfrm xmlns:a="http://schemas.openxmlformats.org/drawingml/2006/main">
+            <a:off x="590550" y="5562600"/>
+            <a:ext cx="11010900" cy="381000"/>
+          </a:xfrm>
+          <a:prstGeom xmlns:a="http://schemas.openxmlformats.org/drawingml/2006/main" prst="rect">
+            <a:avLst/>
+          </a:prstGeom>
+          <a:noFill xmlns:a="http://schemas.openxmlformats.org/drawingml/2006/main"/>
+          <a:ln xmlns:a="http://schemas.openxmlformats.org/drawingml/2006/main" w="0">
+            <a:noFill/>
+          </a:ln>
+        </p:spPr>
+        <p:txBody>
+          <a:bodyPr xmlns:a="http://schemas.openxmlformats.org/drawingml/2006/main"/>
+          <a:lstStyle xmlns:a="http://schemas.openxmlformats.org/drawingml/2006/main">
+            <a:defPPr>
+              <a:defRPr sz="1800" b="1">
+                <a:solidFill>
+                  <a:srgbClr val="163E6F"/>
+                </a:solidFill>
+              </a:defRPr>
+            </a:defPPr>
+          </a:lstStyle>
+          <a:p xmlns:a="http://schemas.openxmlformats.org/drawingml/2006/main">
+            <a:pPr>
+              <a:defRPr sz="1800" b="1">
+                <a:solidFill>
+                  <a:srgbClr val="163E6F"/>
+                </a:solidFill>
+              </a:defRPr>
+            </a:pPr>
+            <a:r>
+              <a:rPr sz="1800" b="1">
+                <a:solidFill>
+                  <a:srgbClr val="163E6F"/>
+                </a:solidFill>
+              </a:rPr>
+              <a:t>院名：____________   确认人（CEO / 院长）：____________   日期：____________</a:t>
+            </a:r>
+          </a:p>
+        </p:txBody>
+      </p:sp>
+      <p:sp>
+        <p:nvSpPr>
+          <p:cNvPr id="9" name="">
+            <a:extLst xmlns:a="http://schemas.openxmlformats.org/drawingml/2006/main">
+              <a:ext uri="{FF2B5EF4-FFF2-40B4-BE49-F238E27FC236}">
+                <a16:creationId xmlns:a16="http://schemas.microsoft.com/office/drawing/2014/main" id="{E616B9D8-C9FA-4549-B590-FA3349590F9A}"/>
+              </a:ext>
+            </a:extLst>
+          </p:cNvPr>
+          <p:cNvSpPr>
+            <a:spLocks xmlns:a="http://schemas.openxmlformats.org/drawingml/2006/main" noGrp="1"/>
+          </p:cNvSpPr>
+          <p:nvPr/>
+        </p:nvSpPr>
+        <p:spPr>
+          <a:xfrm xmlns:a="http://schemas.openxmlformats.org/drawingml/2006/main">
+            <a:off x="590550" y="6000750"/>
+            <a:ext cx="11010900" cy="304800"/>
+          </a:xfrm>
+          <a:prstGeom xmlns:a="http://schemas.openxmlformats.org/drawingml/2006/main" prst="rect">
+            <a:avLst/>
+          </a:prstGeom>
+          <a:noFill xmlns:a="http://schemas.openxmlformats.org/drawingml/2006/main"/>
+          <a:ln xmlns:a="http://schemas.openxmlformats.org/drawingml/2006/main" w="0">
+            <a:noFill/>
+          </a:ln>
+        </p:spPr>
+        <p:txBody>
+          <a:bodyPr xmlns:a="http://schemas.openxmlformats.org/drawingml/2006/main"/>
+          <a:lstStyle xmlns:a="http://schemas.openxmlformats.org/drawingml/2006/main">
+            <a:defPPr>
+              <a:defRPr sz="1575" b="0">
+                <a:solidFill>
+                  <a:srgbClr val="607086"/>
+                </a:solidFill>
+              </a:defRPr>
+            </a:defPPr>
+          </a:lstStyle>
+          <a:p xmlns:a="http://schemas.openxmlformats.org/drawingml/2006/main">
+            <a:pPr>
+              <a:defRPr sz="1575" b="0">
+                <a:solidFill>
+                  <a:srgbClr val="607086"/>
+                </a:solidFill>
+              </a:defRPr>
+            </a:pPr>
+            <a:r>
+              <a:rPr sz="1575" b="0">
+                <a:solidFill>
+                  <a:srgbClr val="607086"/>
+                </a:solidFill>
+              </a:rPr>
+              <a:t>每类填写主责姓名；多人协作时注明成员分工。兼任须确认资质、工作量、服务时段及备岗。</a:t>
+            </a:r>
+          </a:p>
+        </p:txBody>
+      </p:sp>
+    </p:spTree>
+    <p:extLst>
+      <p:ext uri="{BB962C8B-B14F-4D97-AF65-F5344CB8AC3E}">
+        <p14:creationId xmlns:p14="http://schemas.microsoft.com/office/powerpoint/2010/main" val="432126819"/>
       </p:ext>
     </p:extLst>
   </p:cSld>
@@ -6104,7 +8120,7 @@
           <p:cNvPr id="6" name="">
             <a:extLst xmlns:a="http://schemas.openxmlformats.org/drawingml/2006/main">
               <a:ext uri="{FF2B5EF4-FFF2-40B4-BE49-F238E27FC236}">
-                <a16:creationId xmlns:a16="http://schemas.microsoft.com/office/drawing/2014/main" id="{40068115-F588-49C0-B1CE-4B011F457331}"/>
+                <a16:creationId xmlns:a16="http://schemas.microsoft.com/office/drawing/2014/main" id="{33891A05-D6A5-4E2E-8A2C-33846D1A0718}"/>
               </a:ext>
             </a:extLst>
           </p:cNvPr>
@@ -6136,7 +8152,7 @@
           <p:cNvPr id="2" name="">
             <a:extLst xmlns:a="http://schemas.openxmlformats.org/drawingml/2006/main">
               <a:ext uri="{FF2B5EF4-FFF2-40B4-BE49-F238E27FC236}">
-                <a16:creationId xmlns:a16="http://schemas.microsoft.com/office/drawing/2014/main" id="{5FA3E3C6-7A4C-435E-895F-B7E5F055A4FC}"/>
+                <a16:creationId xmlns:a16="http://schemas.microsoft.com/office/drawing/2014/main" id="{F3694D34-BF9E-414D-A4C3-618D047D70F0}"/>
               </a:ext>
             </a:extLst>
           </p:cNvPr>
@@ -6197,16 +8213,13 @@
           <p:nvPr/>
         </p:nvPicPr>
         <p:blipFill>
-          <a:blip xmlns:r="http://schemas.openxmlformats.org/officeDocument/2006/relationships" xmlns:a="http://schemas.openxmlformats.org/drawingml/2006/main" r:embed="Rc710913b8c2d4513"/>
-          <a:srcRect xmlns:a="http://schemas.openxmlformats.org/drawingml/2006/main" l="0" t="15663" r="0" b="15663"/>
-          <a:stretch xmlns:a="http://schemas.openxmlformats.org/drawingml/2006/main">
-            <a:fillRect l="0" t="0" r="0" b="0"/>
-          </a:stretch>
+          <a:blip xmlns:r="http://schemas.openxmlformats.org/officeDocument/2006/relationships" xmlns:a="http://schemas.openxmlformats.org/drawingml/2006/main" r:embed="Rff1b947770e141aa"/>
+          <a:stretch xmlns:a="http://schemas.openxmlformats.org/drawingml/2006/main"/>
         </p:blipFill>
         <p:spPr>
           <a:xfrm xmlns:a="http://schemas.openxmlformats.org/drawingml/2006/main">
-            <a:off x="10039350" y="323850"/>
-            <a:ext cx="1581150" cy="361950"/>
+            <a:off x="10287000" y="352758"/>
+            <a:ext cx="1333500" cy="380333"/>
           </a:xfrm>
           <a:prstGeom xmlns:a="http://schemas.openxmlformats.org/drawingml/2006/main" prst="rect">
             <a:avLst/>
@@ -6218,7 +8231,7 @@
           <p:cNvPr id="4" name="">
             <a:extLst xmlns:a="http://schemas.openxmlformats.org/drawingml/2006/main">
               <a:ext uri="{FF2B5EF4-FFF2-40B4-BE49-F238E27FC236}">
-                <a16:creationId xmlns:a16="http://schemas.microsoft.com/office/drawing/2014/main" id="{58543253-0D2E-4287-A2F4-A628C8E169EF}"/>
+                <a16:creationId xmlns:a16="http://schemas.microsoft.com/office/drawing/2014/main" id="{88B952C8-EBFE-4936-AC60-CFF9B29DAB64}"/>
               </a:ext>
             </a:extLst>
           </p:cNvPr>
@@ -6275,7 +8288,7 @@
           <p:cNvPr id="5" name="">
             <a:extLst xmlns:a="http://schemas.openxmlformats.org/drawingml/2006/main">
               <a:ext uri="{FF2B5EF4-FFF2-40B4-BE49-F238E27FC236}">
-                <a16:creationId xmlns:a16="http://schemas.microsoft.com/office/drawing/2014/main" id="{7092FD2A-E3A3-4B2F-88C8-6F66E5CB67BD}"/>
+                <a16:creationId xmlns:a16="http://schemas.microsoft.com/office/drawing/2014/main" id="{491A7474-9469-457A-A184-1C4BC2DF5C2C}"/>
               </a:ext>
             </a:extLst>
           </p:cNvPr>
@@ -6407,7 +8420,7 @@
                 <a:ea typeface="Microsoft YaHei"/>
                 <a:cs typeface="Microsoft YaHei"/>
               </a:rPr>
-              <a:t>如何交付：不同岗位怎样围绕同一位患者协作</a:t>
+              <a:t>如何交付：六类责任怎样协作，现场由谁承担</a:t>
             </a:r>
           </a:p>
           <a:p xmlns:a="http://schemas.openxmlformats.org/drawingml/2006/main">
@@ -6442,7 +8455,7 @@
     </p:spTree>
     <p:extLst>
       <p:ext uri="{BB962C8B-B14F-4D97-AF65-F5344CB8AC3E}">
-        <p14:creationId xmlns:p14="http://schemas.microsoft.com/office/powerpoint/2010/main" val="112442974"/>
+        <p14:creationId xmlns:p14="http://schemas.microsoft.com/office/powerpoint/2010/main" val="1180165304"/>
       </p:ext>
     </p:extLst>
   </p:cSld>
@@ -6473,7 +8486,7 @@
           <p:cNvPr id="8" name="">
             <a:extLst xmlns:a="http://schemas.openxmlformats.org/drawingml/2006/main">
               <a:ext uri="{FF2B5EF4-FFF2-40B4-BE49-F238E27FC236}">
-                <a16:creationId xmlns:a16="http://schemas.microsoft.com/office/drawing/2014/main" id="{2E139BAD-03D7-4F42-93D0-051363441215}"/>
+                <a16:creationId xmlns:a16="http://schemas.microsoft.com/office/drawing/2014/main" id="{525CD6F7-E5AB-4822-977C-F877880933B8}"/>
               </a:ext>
             </a:extLst>
           </p:cNvPr>
@@ -6505,7 +8518,7 @@
           <p:cNvPr id="2" name="">
             <a:extLst xmlns:a="http://schemas.openxmlformats.org/drawingml/2006/main">
               <a:ext uri="{FF2B5EF4-FFF2-40B4-BE49-F238E27FC236}">
-                <a16:creationId xmlns:a16="http://schemas.microsoft.com/office/drawing/2014/main" id="{C1B839E2-CDAD-4851-AC8D-9A74AC36A358}"/>
+                <a16:creationId xmlns:a16="http://schemas.microsoft.com/office/drawing/2014/main" id="{ADBF8ACE-1B61-4DE0-89A4-FF43C0195675}"/>
               </a:ext>
             </a:extLst>
           </p:cNvPr>
@@ -6566,16 +8579,13 @@
           <p:nvPr/>
         </p:nvPicPr>
         <p:blipFill>
-          <a:blip xmlns:r="http://schemas.openxmlformats.org/officeDocument/2006/relationships" xmlns:a="http://schemas.openxmlformats.org/drawingml/2006/main" r:embed="R50da67e711a0488a"/>
-          <a:srcRect xmlns:a="http://schemas.openxmlformats.org/drawingml/2006/main" l="0" t="15663" r="0" b="15663"/>
-          <a:stretch xmlns:a="http://schemas.openxmlformats.org/drawingml/2006/main">
-            <a:fillRect l="0" t="0" r="0" b="0"/>
-          </a:stretch>
+          <a:blip xmlns:r="http://schemas.openxmlformats.org/officeDocument/2006/relationships" xmlns:a="http://schemas.openxmlformats.org/drawingml/2006/main" r:embed="R349be1739d634f9b"/>
+          <a:stretch xmlns:a="http://schemas.openxmlformats.org/drawingml/2006/main"/>
         </p:blipFill>
         <p:spPr>
           <a:xfrm xmlns:a="http://schemas.openxmlformats.org/drawingml/2006/main">
-            <a:off x="10039350" y="323850"/>
-            <a:ext cx="1581150" cy="361950"/>
+            <a:off x="10287000" y="352758"/>
+            <a:ext cx="1333500" cy="380333"/>
           </a:xfrm>
           <a:prstGeom xmlns:a="http://schemas.openxmlformats.org/drawingml/2006/main" prst="rect">
             <a:avLst/>
@@ -6587,7 +8597,7 @@
           <p:cNvPr id="4" name="">
             <a:extLst xmlns:a="http://schemas.openxmlformats.org/drawingml/2006/main">
               <a:ext uri="{FF2B5EF4-FFF2-40B4-BE49-F238E27FC236}">
-                <a16:creationId xmlns:a16="http://schemas.microsoft.com/office/drawing/2014/main" id="{298F52C3-107B-4201-A27F-3D9E3D5C33A1}"/>
+                <a16:creationId xmlns:a16="http://schemas.microsoft.com/office/drawing/2014/main" id="{E54AD835-8A93-4EFE-A610-A95569BA093B}"/>
               </a:ext>
             </a:extLst>
           </p:cNvPr>
@@ -6644,7 +8654,7 @@
           <p:cNvPr id="5" name="">
             <a:extLst xmlns:a="http://schemas.openxmlformats.org/drawingml/2006/main">
               <a:ext uri="{FF2B5EF4-FFF2-40B4-BE49-F238E27FC236}">
-                <a16:creationId xmlns:a16="http://schemas.microsoft.com/office/drawing/2014/main" id="{3DB9DE29-F46B-45BC-BAEE-CBC4DB09AE62}"/>
+                <a16:creationId xmlns:a16="http://schemas.microsoft.com/office/drawing/2014/main" id="{13341B5C-AD32-4B46-95E3-5CFE6DD1B183}"/>
               </a:ext>
             </a:extLst>
           </p:cNvPr>
@@ -6701,7 +8711,7 @@
           <p:cNvPr id="6" name="">
             <a:extLst xmlns:a="http://schemas.openxmlformats.org/drawingml/2006/main">
               <a:ext uri="{FF2B5EF4-FFF2-40B4-BE49-F238E27FC236}">
-                <a16:creationId xmlns:a16="http://schemas.microsoft.com/office/drawing/2014/main" id="{5E79B7F8-5901-4A17-8D31-B5DE5E9709ED}"/>
+                <a16:creationId xmlns:a16="http://schemas.microsoft.com/office/drawing/2014/main" id="{859ED9ED-72D1-4135-8EE9-D9B369079B9E}"/>
               </a:ext>
             </a:extLst>
           </p:cNvPr>
@@ -6758,7 +8768,7 @@
           <p:cNvPr id="7" name="">
             <a:extLst xmlns:a="http://schemas.openxmlformats.org/drawingml/2006/main">
               <a:ext uri="{FF2B5EF4-FFF2-40B4-BE49-F238E27FC236}">
-                <a16:creationId xmlns:a16="http://schemas.microsoft.com/office/drawing/2014/main" id="{EBCBF912-638A-4423-B9E7-8EBCFEF46F97}"/>
+                <a16:creationId xmlns:a16="http://schemas.microsoft.com/office/drawing/2014/main" id="{168E2972-D9D3-4424-9F03-8CAF94A22610}"/>
               </a:ext>
             </a:extLst>
           </p:cNvPr>
@@ -6817,7 +8827,7 @@
     </p:spTree>
     <p:extLst>
       <p:ext uri="{BB962C8B-B14F-4D97-AF65-F5344CB8AC3E}">
-        <p14:creationId xmlns:p14="http://schemas.microsoft.com/office/powerpoint/2010/main" val="1160099421"/>
+        <p14:creationId xmlns:p14="http://schemas.microsoft.com/office/powerpoint/2010/main" val="1104331213"/>
       </p:ext>
     </p:extLst>
   </p:cSld>
@@ -6848,7 +8858,7 @@
           <p:cNvPr id="6" name="">
             <a:extLst xmlns:a="http://schemas.openxmlformats.org/drawingml/2006/main">
               <a:ext uri="{FF2B5EF4-FFF2-40B4-BE49-F238E27FC236}">
-                <a16:creationId xmlns:a16="http://schemas.microsoft.com/office/drawing/2014/main" id="{120914EF-A770-4802-BE8D-DB2B4738E7C5}"/>
+                <a16:creationId xmlns:a16="http://schemas.microsoft.com/office/drawing/2014/main" id="{8582C977-5C0C-4FED-8E04-DDB6AE58D9E1}"/>
               </a:ext>
             </a:extLst>
           </p:cNvPr>
@@ -6880,7 +8890,7 @@
           <p:cNvPr id="2" name="">
             <a:extLst xmlns:a="http://schemas.openxmlformats.org/drawingml/2006/main">
               <a:ext uri="{FF2B5EF4-FFF2-40B4-BE49-F238E27FC236}">
-                <a16:creationId xmlns:a16="http://schemas.microsoft.com/office/drawing/2014/main" id="{23D03FFB-EB21-406E-9F45-C1DE73EC2D29}"/>
+                <a16:creationId xmlns:a16="http://schemas.microsoft.com/office/drawing/2014/main" id="{B3AC1FDF-368A-489B-9734-CBAB2CFB7558}"/>
               </a:ext>
             </a:extLst>
           </p:cNvPr>
@@ -6941,16 +8951,13 @@
           <p:nvPr/>
         </p:nvPicPr>
         <p:blipFill>
-          <a:blip xmlns:r="http://schemas.openxmlformats.org/officeDocument/2006/relationships" xmlns:a="http://schemas.openxmlformats.org/drawingml/2006/main" r:embed="Rfb2a88aa7c704426"/>
-          <a:srcRect xmlns:a="http://schemas.openxmlformats.org/drawingml/2006/main" l="0" t="15663" r="0" b="15663"/>
-          <a:stretch xmlns:a="http://schemas.openxmlformats.org/drawingml/2006/main">
-            <a:fillRect l="0" t="0" r="0" b="0"/>
-          </a:stretch>
+          <a:blip xmlns:r="http://schemas.openxmlformats.org/officeDocument/2006/relationships" xmlns:a="http://schemas.openxmlformats.org/drawingml/2006/main" r:embed="Rc8a30a6040be46cb"/>
+          <a:stretch xmlns:a="http://schemas.openxmlformats.org/drawingml/2006/main"/>
         </p:blipFill>
         <p:spPr>
           <a:xfrm xmlns:a="http://schemas.openxmlformats.org/drawingml/2006/main">
-            <a:off x="10039350" y="323850"/>
-            <a:ext cx="1581150" cy="361950"/>
+            <a:off x="10287000" y="352758"/>
+            <a:ext cx="1333500" cy="380333"/>
           </a:xfrm>
           <a:prstGeom xmlns:a="http://schemas.openxmlformats.org/drawingml/2006/main" prst="rect">
             <a:avLst/>
@@ -6962,7 +8969,7 @@
           <p:cNvPr id="4" name="">
             <a:extLst xmlns:a="http://schemas.openxmlformats.org/drawingml/2006/main">
               <a:ext uri="{FF2B5EF4-FFF2-40B4-BE49-F238E27FC236}">
-                <a16:creationId xmlns:a16="http://schemas.microsoft.com/office/drawing/2014/main" id="{F6F395FC-7C5B-4118-A965-4D670AC5E30E}"/>
+                <a16:creationId xmlns:a16="http://schemas.microsoft.com/office/drawing/2014/main" id="{9383F93B-4467-4AF3-A37D-726052A7EBD5}"/>
               </a:ext>
             </a:extLst>
           </p:cNvPr>
@@ -7019,7 +9026,7 @@
           <p:cNvPr id="5" name="">
             <a:extLst xmlns:a="http://schemas.openxmlformats.org/drawingml/2006/main">
               <a:ext uri="{FF2B5EF4-FFF2-40B4-BE49-F238E27FC236}">
-                <a16:creationId xmlns:a16="http://schemas.microsoft.com/office/drawing/2014/main" id="{00365A33-D7BA-47AC-A40D-0215148D2B8B}"/>
+                <a16:creationId xmlns:a16="http://schemas.microsoft.com/office/drawing/2014/main" id="{2B8B924B-C8A5-4569-91DA-F6C814071F9C}"/>
               </a:ext>
             </a:extLst>
           </p:cNvPr>
@@ -7132,7 +9139,7 @@
     </p:spTree>
     <p:extLst>
       <p:ext uri="{BB962C8B-B14F-4D97-AF65-F5344CB8AC3E}">
-        <p14:creationId xmlns:p14="http://schemas.microsoft.com/office/powerpoint/2010/main" val="1096304645"/>
+        <p14:creationId xmlns:p14="http://schemas.microsoft.com/office/powerpoint/2010/main" val="271922991"/>
       </p:ext>
     </p:extLst>
   </p:cSld>
@@ -7163,7 +9170,7 @@
           <p:cNvPr id="21" name="">
             <a:extLst xmlns:a="http://schemas.openxmlformats.org/drawingml/2006/main">
               <a:ext uri="{FF2B5EF4-FFF2-40B4-BE49-F238E27FC236}">
-                <a16:creationId xmlns:a16="http://schemas.microsoft.com/office/drawing/2014/main" id="{732B9DE7-8B80-4B81-BECD-3B420E803DCA}"/>
+                <a16:creationId xmlns:a16="http://schemas.microsoft.com/office/drawing/2014/main" id="{647AB6FC-9300-4CC8-9C7D-F6E8CA605B7D}"/>
               </a:ext>
             </a:extLst>
           </p:cNvPr>
@@ -7195,7 +9202,7 @@
           <p:cNvPr id="2" name="">
             <a:extLst xmlns:a="http://schemas.openxmlformats.org/drawingml/2006/main">
               <a:ext uri="{FF2B5EF4-FFF2-40B4-BE49-F238E27FC236}">
-                <a16:creationId xmlns:a16="http://schemas.microsoft.com/office/drawing/2014/main" id="{B4938079-BAC9-49E5-9F83-FBF216BF0CB9}"/>
+                <a16:creationId xmlns:a16="http://schemas.microsoft.com/office/drawing/2014/main" id="{8426FEA8-1349-439D-B09F-4F531BB84A4B}"/>
               </a:ext>
             </a:extLst>
           </p:cNvPr>
@@ -7256,16 +9263,13 @@
           <p:nvPr/>
         </p:nvPicPr>
         <p:blipFill>
-          <a:blip xmlns:r="http://schemas.openxmlformats.org/officeDocument/2006/relationships" xmlns:a="http://schemas.openxmlformats.org/drawingml/2006/main" r:embed="R96a3506c4b6f40f2"/>
-          <a:srcRect xmlns:a="http://schemas.openxmlformats.org/drawingml/2006/main" l="0" t="15663" r="0" b="15663"/>
-          <a:stretch xmlns:a="http://schemas.openxmlformats.org/drawingml/2006/main">
-            <a:fillRect l="0" t="0" r="0" b="0"/>
-          </a:stretch>
+          <a:blip xmlns:r="http://schemas.openxmlformats.org/officeDocument/2006/relationships" xmlns:a="http://schemas.openxmlformats.org/drawingml/2006/main" r:embed="R39e3dff3a953453f"/>
+          <a:stretch xmlns:a="http://schemas.openxmlformats.org/drawingml/2006/main"/>
         </p:blipFill>
         <p:spPr>
           <a:xfrm xmlns:a="http://schemas.openxmlformats.org/drawingml/2006/main">
-            <a:off x="10039350" y="323850"/>
-            <a:ext cx="1581150" cy="361950"/>
+            <a:off x="10287000" y="352758"/>
+            <a:ext cx="1333500" cy="380333"/>
           </a:xfrm>
           <a:prstGeom xmlns:a="http://schemas.openxmlformats.org/drawingml/2006/main" prst="rect">
             <a:avLst/>
@@ -7277,7 +9281,7 @@
           <p:cNvPr id="4" name="">
             <a:extLst xmlns:a="http://schemas.openxmlformats.org/drawingml/2006/main">
               <a:ext uri="{FF2B5EF4-FFF2-40B4-BE49-F238E27FC236}">
-                <a16:creationId xmlns:a16="http://schemas.microsoft.com/office/drawing/2014/main" id="{517CC6BD-8385-4ABC-8DF7-0AF8723A40C5}"/>
+                <a16:creationId xmlns:a16="http://schemas.microsoft.com/office/drawing/2014/main" id="{19395032-A536-4EBB-82DA-37CA31799316}"/>
               </a:ext>
             </a:extLst>
           </p:cNvPr>
@@ -7334,7 +9338,7 @@
           <p:cNvPr id="5" name="">
             <a:extLst xmlns:a="http://schemas.openxmlformats.org/drawingml/2006/main">
               <a:ext uri="{FF2B5EF4-FFF2-40B4-BE49-F238E27FC236}">
-                <a16:creationId xmlns:a16="http://schemas.microsoft.com/office/drawing/2014/main" id="{46D8344A-724E-40CE-82A9-14E81D54D480}"/>
+                <a16:creationId xmlns:a16="http://schemas.microsoft.com/office/drawing/2014/main" id="{B3FF2EB6-8C95-4994-AACD-0096C3A092CB}"/>
               </a:ext>
             </a:extLst>
           </p:cNvPr>
@@ -7366,7 +9370,7 @@
           <p:cNvPr id="6" name="">
             <a:extLst xmlns:a="http://schemas.openxmlformats.org/drawingml/2006/main">
               <a:ext uri="{FF2B5EF4-FFF2-40B4-BE49-F238E27FC236}">
-                <a16:creationId xmlns:a16="http://schemas.microsoft.com/office/drawing/2014/main" id="{81226130-BFDD-4513-85CA-9FE6735F8826}"/>
+                <a16:creationId xmlns:a16="http://schemas.microsoft.com/office/drawing/2014/main" id="{4C8D702F-8207-4D4F-9F67-7A0B13442927}"/>
               </a:ext>
             </a:extLst>
           </p:cNvPr>
@@ -7423,7 +9427,7 @@
           <p:cNvPr id="7" name="">
             <a:extLst xmlns:a="http://schemas.openxmlformats.org/drawingml/2006/main">
               <a:ext uri="{FF2B5EF4-FFF2-40B4-BE49-F238E27FC236}">
-                <a16:creationId xmlns:a16="http://schemas.microsoft.com/office/drawing/2014/main" id="{686BE27B-83CC-45B2-B87C-36169E224405}"/>
+                <a16:creationId xmlns:a16="http://schemas.microsoft.com/office/drawing/2014/main" id="{FD42E4FB-6E34-4D09-A5C6-E82E8EF74E7B}"/>
               </a:ext>
             </a:extLst>
           </p:cNvPr>
@@ -7480,7 +9484,7 @@
           <p:cNvPr id="8" name="">
             <a:extLst xmlns:a="http://schemas.openxmlformats.org/drawingml/2006/main">
               <a:ext uri="{FF2B5EF4-FFF2-40B4-BE49-F238E27FC236}">
-                <a16:creationId xmlns:a16="http://schemas.microsoft.com/office/drawing/2014/main" id="{4D06AE85-574D-45FC-90E7-51F2912C503E}"/>
+                <a16:creationId xmlns:a16="http://schemas.microsoft.com/office/drawing/2014/main" id="{6D463814-45B3-419C-8B34-5AA43685D4F8}"/>
               </a:ext>
             </a:extLst>
           </p:cNvPr>
@@ -7512,7 +9516,7 @@
           <p:cNvPr id="9" name="">
             <a:extLst xmlns:a="http://schemas.openxmlformats.org/drawingml/2006/main">
               <a:ext uri="{FF2B5EF4-FFF2-40B4-BE49-F238E27FC236}">
-                <a16:creationId xmlns:a16="http://schemas.microsoft.com/office/drawing/2014/main" id="{4D40FC67-0CEA-4E15-BF59-8F521AC940F2}"/>
+                <a16:creationId xmlns:a16="http://schemas.microsoft.com/office/drawing/2014/main" id="{DE31BC45-9B66-4144-9B0D-DE4F4F3BBAC5}"/>
               </a:ext>
             </a:extLst>
           </p:cNvPr>
@@ -7569,7 +9573,7 @@
           <p:cNvPr id="10" name="">
             <a:extLst xmlns:a="http://schemas.openxmlformats.org/drawingml/2006/main">
               <a:ext uri="{FF2B5EF4-FFF2-40B4-BE49-F238E27FC236}">
-                <a16:creationId xmlns:a16="http://schemas.microsoft.com/office/drawing/2014/main" id="{8C30A738-2C3B-4EF4-9C30-D60E5EF342A2}"/>
+                <a16:creationId xmlns:a16="http://schemas.microsoft.com/office/drawing/2014/main" id="{71F2F948-9478-412E-85E5-D05B49E981C4}"/>
               </a:ext>
             </a:extLst>
           </p:cNvPr>
@@ -7626,7 +9630,7 @@
           <p:cNvPr id="11" name="">
             <a:extLst xmlns:a="http://schemas.openxmlformats.org/drawingml/2006/main">
               <a:ext uri="{FF2B5EF4-FFF2-40B4-BE49-F238E27FC236}">
-                <a16:creationId xmlns:a16="http://schemas.microsoft.com/office/drawing/2014/main" id="{EE4D96D6-F16C-4C0D-8B0B-EA02F4F51E76}"/>
+                <a16:creationId xmlns:a16="http://schemas.microsoft.com/office/drawing/2014/main" id="{8A3CC7B1-D434-4D04-888C-08E8EF05B093}"/>
               </a:ext>
             </a:extLst>
           </p:cNvPr>
@@ -7658,7 +9662,7 @@
           <p:cNvPr id="12" name="">
             <a:extLst xmlns:a="http://schemas.openxmlformats.org/drawingml/2006/main">
               <a:ext uri="{FF2B5EF4-FFF2-40B4-BE49-F238E27FC236}">
-                <a16:creationId xmlns:a16="http://schemas.microsoft.com/office/drawing/2014/main" id="{84838814-A356-4A9E-890E-CCF6CC6228F4}"/>
+                <a16:creationId xmlns:a16="http://schemas.microsoft.com/office/drawing/2014/main" id="{03D6EA6E-63CF-4C93-BA33-C37E344ABF94}"/>
               </a:ext>
             </a:extLst>
           </p:cNvPr>
@@ -7715,7 +9719,7 @@
           <p:cNvPr id="13" name="">
             <a:extLst xmlns:a="http://schemas.openxmlformats.org/drawingml/2006/main">
               <a:ext uri="{FF2B5EF4-FFF2-40B4-BE49-F238E27FC236}">
-                <a16:creationId xmlns:a16="http://schemas.microsoft.com/office/drawing/2014/main" id="{84247A0B-3D0E-4046-99C0-999E8F267BD7}"/>
+                <a16:creationId xmlns:a16="http://schemas.microsoft.com/office/drawing/2014/main" id="{D148B3FD-97E6-4762-A053-A72109A522E8}"/>
               </a:ext>
             </a:extLst>
           </p:cNvPr>
@@ -7772,7 +9776,7 @@
           <p:cNvPr id="14" name="">
             <a:extLst xmlns:a="http://schemas.openxmlformats.org/drawingml/2006/main">
               <a:ext uri="{FF2B5EF4-FFF2-40B4-BE49-F238E27FC236}">
-                <a16:creationId xmlns:a16="http://schemas.microsoft.com/office/drawing/2014/main" id="{180D351B-127E-4A92-A98D-16556D941A6D}"/>
+                <a16:creationId xmlns:a16="http://schemas.microsoft.com/office/drawing/2014/main" id="{EA06D22D-5C72-4E7B-A8BD-1176D0E3A4A2}"/>
               </a:ext>
             </a:extLst>
           </p:cNvPr>
@@ -7804,7 +9808,7 @@
           <p:cNvPr id="15" name="">
             <a:extLst xmlns:a="http://schemas.openxmlformats.org/drawingml/2006/main">
               <a:ext uri="{FF2B5EF4-FFF2-40B4-BE49-F238E27FC236}">
-                <a16:creationId xmlns:a16="http://schemas.microsoft.com/office/drawing/2014/main" id="{6CEE30F1-4A3A-425D-94DA-51475F9D051F}"/>
+                <a16:creationId xmlns:a16="http://schemas.microsoft.com/office/drawing/2014/main" id="{FF7A4210-88D4-4E90-BDC6-C40C81854403}"/>
               </a:ext>
             </a:extLst>
           </p:cNvPr>
@@ -7861,7 +9865,7 @@
           <p:cNvPr id="16" name="">
             <a:extLst xmlns:a="http://schemas.openxmlformats.org/drawingml/2006/main">
               <a:ext uri="{FF2B5EF4-FFF2-40B4-BE49-F238E27FC236}">
-                <a16:creationId xmlns:a16="http://schemas.microsoft.com/office/drawing/2014/main" id="{101486F6-C8B6-4FEC-8971-D5F0AE2CF50B}"/>
+                <a16:creationId xmlns:a16="http://schemas.microsoft.com/office/drawing/2014/main" id="{3015B166-F7D1-421B-AE4D-5B0279DDA844}"/>
               </a:ext>
             </a:extLst>
           </p:cNvPr>
@@ -7918,7 +9922,7 @@
           <p:cNvPr id="17" name="">
             <a:extLst xmlns:a="http://schemas.openxmlformats.org/drawingml/2006/main">
               <a:ext uri="{FF2B5EF4-FFF2-40B4-BE49-F238E27FC236}">
-                <a16:creationId xmlns:a16="http://schemas.microsoft.com/office/drawing/2014/main" id="{995C0D4D-FCA7-4B67-8D49-3F9AA68774DB}"/>
+                <a16:creationId xmlns:a16="http://schemas.microsoft.com/office/drawing/2014/main" id="{06DA8B9A-F175-44E4-AF0E-0E49E6CEE921}"/>
               </a:ext>
             </a:extLst>
           </p:cNvPr>
@@ -7950,7 +9954,7 @@
           <p:cNvPr id="18" name="">
             <a:extLst xmlns:a="http://schemas.openxmlformats.org/drawingml/2006/main">
               <a:ext uri="{FF2B5EF4-FFF2-40B4-BE49-F238E27FC236}">
-                <a16:creationId xmlns:a16="http://schemas.microsoft.com/office/drawing/2014/main" id="{F4B525AC-D025-4F15-84FC-C30AC03CCF9A}"/>
+                <a16:creationId xmlns:a16="http://schemas.microsoft.com/office/drawing/2014/main" id="{AAD2AEE3-5404-4670-8055-113AF432ED40}"/>
               </a:ext>
             </a:extLst>
           </p:cNvPr>
@@ -8007,7 +10011,7 @@
           <p:cNvPr id="19" name="">
             <a:extLst xmlns:a="http://schemas.openxmlformats.org/drawingml/2006/main">
               <a:ext uri="{FF2B5EF4-FFF2-40B4-BE49-F238E27FC236}">
-                <a16:creationId xmlns:a16="http://schemas.microsoft.com/office/drawing/2014/main" id="{E798E431-35AE-4530-B679-B2F4A99F3D25}"/>
+                <a16:creationId xmlns:a16="http://schemas.microsoft.com/office/drawing/2014/main" id="{86DB5C05-4085-47FC-872E-5DE74C118F9E}"/>
               </a:ext>
             </a:extLst>
           </p:cNvPr>
@@ -8064,7 +10068,7 @@
           <p:cNvPr id="20" name="">
             <a:extLst xmlns:a="http://schemas.openxmlformats.org/drawingml/2006/main">
               <a:ext uri="{FF2B5EF4-FFF2-40B4-BE49-F238E27FC236}">
-                <a16:creationId xmlns:a16="http://schemas.microsoft.com/office/drawing/2014/main" id="{22B56C4B-F199-4684-994A-3046675C254F}"/>
+                <a16:creationId xmlns:a16="http://schemas.microsoft.com/office/drawing/2014/main" id="{400BA72C-CF6F-4314-B0B8-D66ABA3D2299}"/>
               </a:ext>
             </a:extLst>
           </p:cNvPr>
@@ -8119,7 +10123,7 @@
     </p:spTree>
     <p:extLst>
       <p:ext uri="{BB962C8B-B14F-4D97-AF65-F5344CB8AC3E}">
-        <p14:creationId xmlns:p14="http://schemas.microsoft.com/office/powerpoint/2010/main" val="1156288896"/>
+        <p14:creationId xmlns:p14="http://schemas.microsoft.com/office/powerpoint/2010/main" val="401427083"/>
       </p:ext>
     </p:extLst>
   </p:cSld>
@@ -8150,7 +10154,7 @@
           <p:cNvPr id="11" name="">
             <a:extLst xmlns:a="http://schemas.openxmlformats.org/drawingml/2006/main">
               <a:ext uri="{FF2B5EF4-FFF2-40B4-BE49-F238E27FC236}">
-                <a16:creationId xmlns:a16="http://schemas.microsoft.com/office/drawing/2014/main" id="{218C52A2-8656-4A92-B337-F5B32E980E5B}"/>
+                <a16:creationId xmlns:a16="http://schemas.microsoft.com/office/drawing/2014/main" id="{C7A4DA2B-6C28-46A3-9F44-6375A92E9B65}"/>
               </a:ext>
             </a:extLst>
           </p:cNvPr>
@@ -8182,7 +10186,7 @@
           <p:cNvPr id="2" name="">
             <a:extLst xmlns:a="http://schemas.openxmlformats.org/drawingml/2006/main">
               <a:ext uri="{FF2B5EF4-FFF2-40B4-BE49-F238E27FC236}">
-                <a16:creationId xmlns:a16="http://schemas.microsoft.com/office/drawing/2014/main" id="{959031A6-8F5F-4E8B-A716-9CA4BD3B79D8}"/>
+                <a16:creationId xmlns:a16="http://schemas.microsoft.com/office/drawing/2014/main" id="{5A097525-9A24-4FB0-ADDA-3BC43662EB5C}"/>
               </a:ext>
             </a:extLst>
           </p:cNvPr>
@@ -8243,16 +10247,13 @@
           <p:nvPr/>
         </p:nvPicPr>
         <p:blipFill>
-          <a:blip xmlns:r="http://schemas.openxmlformats.org/officeDocument/2006/relationships" xmlns:a="http://schemas.openxmlformats.org/drawingml/2006/main" r:embed="R680035365128470b"/>
-          <a:srcRect xmlns:a="http://schemas.openxmlformats.org/drawingml/2006/main" l="0" t="15663" r="0" b="15663"/>
-          <a:stretch xmlns:a="http://schemas.openxmlformats.org/drawingml/2006/main">
-            <a:fillRect l="0" t="0" r="0" b="0"/>
-          </a:stretch>
+          <a:blip xmlns:r="http://schemas.openxmlformats.org/officeDocument/2006/relationships" xmlns:a="http://schemas.openxmlformats.org/drawingml/2006/main" r:embed="Rd65099e283ed47c7"/>
+          <a:stretch xmlns:a="http://schemas.openxmlformats.org/drawingml/2006/main"/>
         </p:blipFill>
         <p:spPr>
           <a:xfrm xmlns:a="http://schemas.openxmlformats.org/drawingml/2006/main">
-            <a:off x="10039350" y="323850"/>
-            <a:ext cx="1581150" cy="361950"/>
+            <a:off x="10287000" y="352758"/>
+            <a:ext cx="1333500" cy="380333"/>
           </a:xfrm>
           <a:prstGeom xmlns:a="http://schemas.openxmlformats.org/drawingml/2006/main" prst="rect">
             <a:avLst/>
@@ -8264,7 +10265,7 @@
           <p:cNvPr id="4" name="">
             <a:extLst xmlns:a="http://schemas.openxmlformats.org/drawingml/2006/main">
               <a:ext uri="{FF2B5EF4-FFF2-40B4-BE49-F238E27FC236}">
-                <a16:creationId xmlns:a16="http://schemas.microsoft.com/office/drawing/2014/main" id="{8777036A-AD99-4AC3-8191-997F39925BCA}"/>
+                <a16:creationId xmlns:a16="http://schemas.microsoft.com/office/drawing/2014/main" id="{3DD18754-1538-458D-B4A9-6C5626AA8017}"/>
               </a:ext>
             </a:extLst>
           </p:cNvPr>
@@ -8321,7 +10322,7 @@
           <p:cNvPr id="5" name="">
             <a:extLst xmlns:a="http://schemas.openxmlformats.org/drawingml/2006/main">
               <a:ext uri="{FF2B5EF4-FFF2-40B4-BE49-F238E27FC236}">
-                <a16:creationId xmlns:a16="http://schemas.microsoft.com/office/drawing/2014/main" id="{ED56BBC8-3C37-479C-AC30-F55D3883B154}"/>
+                <a16:creationId xmlns:a16="http://schemas.microsoft.com/office/drawing/2014/main" id="{3B21A629-A77D-413E-82F5-B410829675F1}"/>
               </a:ext>
             </a:extLst>
           </p:cNvPr>
@@ -8382,7 +10383,7 @@
           <p:cNvPr id="6" name="">
             <a:extLst xmlns:a="http://schemas.openxmlformats.org/drawingml/2006/main">
               <a:ext uri="{FF2B5EF4-FFF2-40B4-BE49-F238E27FC236}">
-                <a16:creationId xmlns:a16="http://schemas.microsoft.com/office/drawing/2014/main" id="{9C2F849F-1713-476F-8423-22B0BFB5AF67}"/>
+                <a16:creationId xmlns:a16="http://schemas.microsoft.com/office/drawing/2014/main" id="{21F5BFEE-DC00-40A1-B474-2B6D0F9592B7}"/>
               </a:ext>
             </a:extLst>
           </p:cNvPr>
@@ -8439,7 +10440,7 @@
           <p:cNvPr id="7" name="">
             <a:extLst xmlns:a="http://schemas.openxmlformats.org/drawingml/2006/main">
               <a:ext uri="{FF2B5EF4-FFF2-40B4-BE49-F238E27FC236}">
-                <a16:creationId xmlns:a16="http://schemas.microsoft.com/office/drawing/2014/main" id="{D1D0D462-933F-4689-A08C-16FDB8BBBF9B}"/>
+                <a16:creationId xmlns:a16="http://schemas.microsoft.com/office/drawing/2014/main" id="{07948AE8-1A8A-404A-B011-575E94C6D2A3}"/>
               </a:ext>
             </a:extLst>
           </p:cNvPr>
@@ -8500,7 +10501,7 @@
           <p:cNvPr id="8" name="">
             <a:extLst xmlns:a="http://schemas.openxmlformats.org/drawingml/2006/main">
               <a:ext uri="{FF2B5EF4-FFF2-40B4-BE49-F238E27FC236}">
-                <a16:creationId xmlns:a16="http://schemas.microsoft.com/office/drawing/2014/main" id="{72C73318-5750-49BC-9D1D-D1EC907DA01D}"/>
+                <a16:creationId xmlns:a16="http://schemas.microsoft.com/office/drawing/2014/main" id="{E6B79E07-A807-475C-8DF0-BB08AA9C6413}"/>
               </a:ext>
             </a:extLst>
           </p:cNvPr>
@@ -8557,7 +10558,7 @@
           <p:cNvPr id="9" name="">
             <a:extLst xmlns:a="http://schemas.openxmlformats.org/drawingml/2006/main">
               <a:ext uri="{FF2B5EF4-FFF2-40B4-BE49-F238E27FC236}">
-                <a16:creationId xmlns:a16="http://schemas.microsoft.com/office/drawing/2014/main" id="{55626AC0-7677-4EF0-8B91-BF9C5E4BC25E}"/>
+                <a16:creationId xmlns:a16="http://schemas.microsoft.com/office/drawing/2014/main" id="{4B3E99E9-801F-404B-B0EE-3F8261D5F59C}"/>
               </a:ext>
             </a:extLst>
           </p:cNvPr>
@@ -8618,7 +10619,7 @@
           <p:cNvPr id="10" name="">
             <a:extLst xmlns:a="http://schemas.openxmlformats.org/drawingml/2006/main">
               <a:ext uri="{FF2B5EF4-FFF2-40B4-BE49-F238E27FC236}">
-                <a16:creationId xmlns:a16="http://schemas.microsoft.com/office/drawing/2014/main" id="{23B37E2C-865A-4232-8FC4-9B1592B410C7}"/>
+                <a16:creationId xmlns:a16="http://schemas.microsoft.com/office/drawing/2014/main" id="{36FE92EB-BEE6-4E23-B9C5-130E0A1FA9BC}"/>
               </a:ext>
             </a:extLst>
           </p:cNvPr>
@@ -8673,7 +10674,7 @@
     </p:spTree>
     <p:extLst>
       <p:ext uri="{BB962C8B-B14F-4D97-AF65-F5344CB8AC3E}">
-        <p14:creationId xmlns:p14="http://schemas.microsoft.com/office/powerpoint/2010/main" val="582366797"/>
+        <p14:creationId xmlns:p14="http://schemas.microsoft.com/office/powerpoint/2010/main" val="1411539111"/>
       </p:ext>
     </p:extLst>
   </p:cSld>
@@ -8704,7 +10705,7 @@
           <p:cNvPr id="11" name="">
             <a:extLst xmlns:a="http://schemas.openxmlformats.org/drawingml/2006/main">
               <a:ext uri="{FF2B5EF4-FFF2-40B4-BE49-F238E27FC236}">
-                <a16:creationId xmlns:a16="http://schemas.microsoft.com/office/drawing/2014/main" id="{BDBBCB99-AEBB-4003-9257-51EBCCECCBD9}"/>
+                <a16:creationId xmlns:a16="http://schemas.microsoft.com/office/drawing/2014/main" id="{5B967968-002A-4D4A-8E98-D62FB2E04C07}"/>
               </a:ext>
             </a:extLst>
           </p:cNvPr>
@@ -8736,7 +10737,7 @@
           <p:cNvPr id="2" name="">
             <a:extLst xmlns:a="http://schemas.openxmlformats.org/drawingml/2006/main">
               <a:ext uri="{FF2B5EF4-FFF2-40B4-BE49-F238E27FC236}">
-                <a16:creationId xmlns:a16="http://schemas.microsoft.com/office/drawing/2014/main" id="{826D6BD1-7699-4215-BB9D-79DBE9B46C7B}"/>
+                <a16:creationId xmlns:a16="http://schemas.microsoft.com/office/drawing/2014/main" id="{08143DF1-E78F-4E95-9757-45C01606E0C7}"/>
               </a:ext>
             </a:extLst>
           </p:cNvPr>
@@ -8797,16 +10798,13 @@
           <p:nvPr/>
         </p:nvPicPr>
         <p:blipFill>
-          <a:blip xmlns:r="http://schemas.openxmlformats.org/officeDocument/2006/relationships" xmlns:a="http://schemas.openxmlformats.org/drawingml/2006/main" r:embed="Rd9f156f6fbbc4b28"/>
-          <a:srcRect xmlns:a="http://schemas.openxmlformats.org/drawingml/2006/main" l="0" t="15663" r="0" b="15663"/>
-          <a:stretch xmlns:a="http://schemas.openxmlformats.org/drawingml/2006/main">
-            <a:fillRect l="0" t="0" r="0" b="0"/>
-          </a:stretch>
+          <a:blip xmlns:r="http://schemas.openxmlformats.org/officeDocument/2006/relationships" xmlns:a="http://schemas.openxmlformats.org/drawingml/2006/main" r:embed="Rca828d6237ad42d1"/>
+          <a:stretch xmlns:a="http://schemas.openxmlformats.org/drawingml/2006/main"/>
         </p:blipFill>
         <p:spPr>
           <a:xfrm xmlns:a="http://schemas.openxmlformats.org/drawingml/2006/main">
-            <a:off x="10039350" y="323850"/>
-            <a:ext cx="1581150" cy="361950"/>
+            <a:off x="10287000" y="352758"/>
+            <a:ext cx="1333500" cy="380333"/>
           </a:xfrm>
           <a:prstGeom xmlns:a="http://schemas.openxmlformats.org/drawingml/2006/main" prst="rect">
             <a:avLst/>
@@ -8818,7 +10816,7 @@
           <p:cNvPr id="4" name="">
             <a:extLst xmlns:a="http://schemas.openxmlformats.org/drawingml/2006/main">
               <a:ext uri="{FF2B5EF4-FFF2-40B4-BE49-F238E27FC236}">
-                <a16:creationId xmlns:a16="http://schemas.microsoft.com/office/drawing/2014/main" id="{CC602294-4DBF-4EE8-9990-B46DC834C915}"/>
+                <a16:creationId xmlns:a16="http://schemas.microsoft.com/office/drawing/2014/main" id="{944268CA-2AE1-4B36-B342-0138515198F4}"/>
               </a:ext>
             </a:extLst>
           </p:cNvPr>
@@ -8875,7 +10873,7 @@
           <p:cNvPr id="5" name="">
             <a:extLst xmlns:a="http://schemas.openxmlformats.org/drawingml/2006/main">
               <a:ext uri="{FF2B5EF4-FFF2-40B4-BE49-F238E27FC236}">
-                <a16:creationId xmlns:a16="http://schemas.microsoft.com/office/drawing/2014/main" id="{99B12369-C7F7-4AE6-A585-9017915915C1}"/>
+                <a16:creationId xmlns:a16="http://schemas.microsoft.com/office/drawing/2014/main" id="{7F05B68A-6008-4DCF-A07C-5E1138F5F777}"/>
               </a:ext>
             </a:extLst>
           </p:cNvPr>
@@ -8936,7 +10934,7 @@
           <p:cNvPr id="6" name="">
             <a:extLst xmlns:a="http://schemas.openxmlformats.org/drawingml/2006/main">
               <a:ext uri="{FF2B5EF4-FFF2-40B4-BE49-F238E27FC236}">
-                <a16:creationId xmlns:a16="http://schemas.microsoft.com/office/drawing/2014/main" id="{EE5DEC0C-661E-437B-A078-45EF26AF9755}"/>
+                <a16:creationId xmlns:a16="http://schemas.microsoft.com/office/drawing/2014/main" id="{0724901B-AAA2-4F31-9768-E1E058D27E61}"/>
               </a:ext>
             </a:extLst>
           </p:cNvPr>
@@ -8993,7 +10991,7 @@
           <p:cNvPr id="7" name="">
             <a:extLst xmlns:a="http://schemas.openxmlformats.org/drawingml/2006/main">
               <a:ext uri="{FF2B5EF4-FFF2-40B4-BE49-F238E27FC236}">
-                <a16:creationId xmlns:a16="http://schemas.microsoft.com/office/drawing/2014/main" id="{36EE8B73-6CEA-4929-89ED-A76153F53142}"/>
+                <a16:creationId xmlns:a16="http://schemas.microsoft.com/office/drawing/2014/main" id="{6AF08351-93EA-41A6-8681-C6CDE8518273}"/>
               </a:ext>
             </a:extLst>
           </p:cNvPr>
@@ -9054,7 +11052,7 @@
           <p:cNvPr id="8" name="">
             <a:extLst xmlns:a="http://schemas.openxmlformats.org/drawingml/2006/main">
               <a:ext uri="{FF2B5EF4-FFF2-40B4-BE49-F238E27FC236}">
-                <a16:creationId xmlns:a16="http://schemas.microsoft.com/office/drawing/2014/main" id="{00346EBA-5709-4C60-92E7-70C94E0E5B1F}"/>
+                <a16:creationId xmlns:a16="http://schemas.microsoft.com/office/drawing/2014/main" id="{10136634-0988-4839-9A5B-6F22E632C464}"/>
               </a:ext>
             </a:extLst>
           </p:cNvPr>
@@ -9111,7 +11109,7 @@
           <p:cNvPr id="9" name="">
             <a:extLst xmlns:a="http://schemas.openxmlformats.org/drawingml/2006/main">
               <a:ext uri="{FF2B5EF4-FFF2-40B4-BE49-F238E27FC236}">
-                <a16:creationId xmlns:a16="http://schemas.microsoft.com/office/drawing/2014/main" id="{484DFBA5-69DB-4758-AF44-3F729EA0C64A}"/>
+                <a16:creationId xmlns:a16="http://schemas.microsoft.com/office/drawing/2014/main" id="{C1BED443-0469-4517-B0AF-36FD90DB7FE8}"/>
               </a:ext>
             </a:extLst>
           </p:cNvPr>
@@ -9172,7 +11170,7 @@
           <p:cNvPr id="10" name="">
             <a:extLst xmlns:a="http://schemas.openxmlformats.org/drawingml/2006/main">
               <a:ext uri="{FF2B5EF4-FFF2-40B4-BE49-F238E27FC236}">
-                <a16:creationId xmlns:a16="http://schemas.microsoft.com/office/drawing/2014/main" id="{FCD85902-85C4-4E97-981B-78B2F782B8D8}"/>
+                <a16:creationId xmlns:a16="http://schemas.microsoft.com/office/drawing/2014/main" id="{27AD73F0-79BF-4713-88A5-074847FF15F3}"/>
               </a:ext>
             </a:extLst>
           </p:cNvPr>
@@ -9227,7 +11225,7 @@
     </p:spTree>
     <p:extLst>
       <p:ext uri="{BB962C8B-B14F-4D97-AF65-F5344CB8AC3E}">
-        <p14:creationId xmlns:p14="http://schemas.microsoft.com/office/powerpoint/2010/main" val="622291078"/>
+        <p14:creationId xmlns:p14="http://schemas.microsoft.com/office/powerpoint/2010/main" val="848542690"/>
       </p:ext>
     </p:extLst>
   </p:cSld>
@@ -9258,7 +11256,7 @@
           <p:cNvPr id="11" name="">
             <a:extLst xmlns:a="http://schemas.openxmlformats.org/drawingml/2006/main">
               <a:ext uri="{FF2B5EF4-FFF2-40B4-BE49-F238E27FC236}">
-                <a16:creationId xmlns:a16="http://schemas.microsoft.com/office/drawing/2014/main" id="{3E687D4B-B380-4DD6-BBC4-DE72C53F5A85}"/>
+                <a16:creationId xmlns:a16="http://schemas.microsoft.com/office/drawing/2014/main" id="{A55D781B-0FE0-4E96-A2C2-23B5AB2F641D}"/>
               </a:ext>
             </a:extLst>
           </p:cNvPr>
@@ -9290,7 +11288,7 @@
           <p:cNvPr id="2" name="">
             <a:extLst xmlns:a="http://schemas.openxmlformats.org/drawingml/2006/main">
               <a:ext uri="{FF2B5EF4-FFF2-40B4-BE49-F238E27FC236}">
-                <a16:creationId xmlns:a16="http://schemas.microsoft.com/office/drawing/2014/main" id="{9FC98242-142E-4696-A56C-D119C8682F2A}"/>
+                <a16:creationId xmlns:a16="http://schemas.microsoft.com/office/drawing/2014/main" id="{7E875EC3-2813-45F6-A3FA-7EC95C73A945}"/>
               </a:ext>
             </a:extLst>
           </p:cNvPr>
@@ -9351,16 +11349,13 @@
           <p:nvPr/>
         </p:nvPicPr>
         <p:blipFill>
-          <a:blip xmlns:r="http://schemas.openxmlformats.org/officeDocument/2006/relationships" xmlns:a="http://schemas.openxmlformats.org/drawingml/2006/main" r:embed="Re1bc4f6fe51a4b50"/>
-          <a:srcRect xmlns:a="http://schemas.openxmlformats.org/drawingml/2006/main" l="0" t="15663" r="0" b="15663"/>
-          <a:stretch xmlns:a="http://schemas.openxmlformats.org/drawingml/2006/main">
-            <a:fillRect l="0" t="0" r="0" b="0"/>
-          </a:stretch>
+          <a:blip xmlns:r="http://schemas.openxmlformats.org/officeDocument/2006/relationships" xmlns:a="http://schemas.openxmlformats.org/drawingml/2006/main" r:embed="R1c46b8a5e4f84928"/>
+          <a:stretch xmlns:a="http://schemas.openxmlformats.org/drawingml/2006/main"/>
         </p:blipFill>
         <p:spPr>
           <a:xfrm xmlns:a="http://schemas.openxmlformats.org/drawingml/2006/main">
-            <a:off x="10039350" y="323850"/>
-            <a:ext cx="1581150" cy="361950"/>
+            <a:off x="10287000" y="352758"/>
+            <a:ext cx="1333500" cy="380333"/>
           </a:xfrm>
           <a:prstGeom xmlns:a="http://schemas.openxmlformats.org/drawingml/2006/main" prst="rect">
             <a:avLst/>
@@ -9372,7 +11367,7 @@
           <p:cNvPr id="4" name="">
             <a:extLst xmlns:a="http://schemas.openxmlformats.org/drawingml/2006/main">
               <a:ext uri="{FF2B5EF4-FFF2-40B4-BE49-F238E27FC236}">
-                <a16:creationId xmlns:a16="http://schemas.microsoft.com/office/drawing/2014/main" id="{6D2BB6F6-91C3-4078-974B-5171CDFFFC3E}"/>
+                <a16:creationId xmlns:a16="http://schemas.microsoft.com/office/drawing/2014/main" id="{0368806B-6561-4D0A-ADAA-90D6CEC791C3}"/>
               </a:ext>
             </a:extLst>
           </p:cNvPr>
@@ -9429,7 +11424,7 @@
           <p:cNvPr id="5" name="">
             <a:extLst xmlns:a="http://schemas.openxmlformats.org/drawingml/2006/main">
               <a:ext uri="{FF2B5EF4-FFF2-40B4-BE49-F238E27FC236}">
-                <a16:creationId xmlns:a16="http://schemas.microsoft.com/office/drawing/2014/main" id="{71209B52-2AC5-4D6B-BC8F-741DBA724F30}"/>
+                <a16:creationId xmlns:a16="http://schemas.microsoft.com/office/drawing/2014/main" id="{255660FD-6C0D-45CE-A9F4-100E59C75061}"/>
               </a:ext>
             </a:extLst>
           </p:cNvPr>
@@ -9490,7 +11485,7 @@
           <p:cNvPr id="6" name="">
             <a:extLst xmlns:a="http://schemas.openxmlformats.org/drawingml/2006/main">
               <a:ext uri="{FF2B5EF4-FFF2-40B4-BE49-F238E27FC236}">
-                <a16:creationId xmlns:a16="http://schemas.microsoft.com/office/drawing/2014/main" id="{1720A412-4E6D-479B-9271-0FA7548DA567}"/>
+                <a16:creationId xmlns:a16="http://schemas.microsoft.com/office/drawing/2014/main" id="{9658B0E9-7D35-4F53-8916-5E40DCC6C160}"/>
               </a:ext>
             </a:extLst>
           </p:cNvPr>
@@ -9547,7 +11542,7 @@
           <p:cNvPr id="7" name="">
             <a:extLst xmlns:a="http://schemas.openxmlformats.org/drawingml/2006/main">
               <a:ext uri="{FF2B5EF4-FFF2-40B4-BE49-F238E27FC236}">
-                <a16:creationId xmlns:a16="http://schemas.microsoft.com/office/drawing/2014/main" id="{AB50B60B-5574-4D34-8CE7-754139D0F330}"/>
+                <a16:creationId xmlns:a16="http://schemas.microsoft.com/office/drawing/2014/main" id="{B2860DD2-801A-45F4-A673-243ECE1DB88C}"/>
               </a:ext>
             </a:extLst>
           </p:cNvPr>
@@ -9608,7 +11603,7 @@
           <p:cNvPr id="8" name="">
             <a:extLst xmlns:a="http://schemas.openxmlformats.org/drawingml/2006/main">
               <a:ext uri="{FF2B5EF4-FFF2-40B4-BE49-F238E27FC236}">
-                <a16:creationId xmlns:a16="http://schemas.microsoft.com/office/drawing/2014/main" id="{435B24DF-15C8-49A0-B0B2-1ED7DFF84522}"/>
+                <a16:creationId xmlns:a16="http://schemas.microsoft.com/office/drawing/2014/main" id="{9FF30D58-3161-4FFC-8A9E-74E6A0E25E42}"/>
               </a:ext>
             </a:extLst>
           </p:cNvPr>
@@ -9665,7 +11660,7 @@
           <p:cNvPr id="9" name="">
             <a:extLst xmlns:a="http://schemas.openxmlformats.org/drawingml/2006/main">
               <a:ext uri="{FF2B5EF4-FFF2-40B4-BE49-F238E27FC236}">
-                <a16:creationId xmlns:a16="http://schemas.microsoft.com/office/drawing/2014/main" id="{6E539DB6-3AA5-4D6F-B897-AB3489412517}"/>
+                <a16:creationId xmlns:a16="http://schemas.microsoft.com/office/drawing/2014/main" id="{5A51DED6-6703-434A-B4C9-4B4AAB8F2CF6}"/>
               </a:ext>
             </a:extLst>
           </p:cNvPr>
@@ -9726,7 +11721,7 @@
           <p:cNvPr id="10" name="">
             <a:extLst xmlns:a="http://schemas.openxmlformats.org/drawingml/2006/main">
               <a:ext uri="{FF2B5EF4-FFF2-40B4-BE49-F238E27FC236}">
-                <a16:creationId xmlns:a16="http://schemas.microsoft.com/office/drawing/2014/main" id="{4E304DB7-302E-4225-B013-FE3CB6111A14}"/>
+                <a16:creationId xmlns:a16="http://schemas.microsoft.com/office/drawing/2014/main" id="{E312B759-7374-4331-807C-F8016AFB809A}"/>
               </a:ext>
             </a:extLst>
           </p:cNvPr>
@@ -9781,7 +11776,7 @@
     </p:spTree>
     <p:extLst>
       <p:ext uri="{BB962C8B-B14F-4D97-AF65-F5344CB8AC3E}">
-        <p14:creationId xmlns:p14="http://schemas.microsoft.com/office/powerpoint/2010/main" val="520119601"/>
+        <p14:creationId xmlns:p14="http://schemas.microsoft.com/office/powerpoint/2010/main" val="418117116"/>
       </p:ext>
     </p:extLst>
   </p:cSld>
@@ -9812,7 +11807,7 @@
           <p:cNvPr id="23" name="">
             <a:extLst xmlns:a="http://schemas.openxmlformats.org/drawingml/2006/main">
               <a:ext uri="{FF2B5EF4-FFF2-40B4-BE49-F238E27FC236}">
-                <a16:creationId xmlns:a16="http://schemas.microsoft.com/office/drawing/2014/main" id="{1DC4D683-09B9-469E-B557-5A9203E55F16}"/>
+                <a16:creationId xmlns:a16="http://schemas.microsoft.com/office/drawing/2014/main" id="{CB1441E9-D2E1-4BF4-A1FB-3726E7FD5D40}"/>
               </a:ext>
             </a:extLst>
           </p:cNvPr>
@@ -9844,7 +11839,7 @@
           <p:cNvPr id="2" name="">
             <a:extLst xmlns:a="http://schemas.openxmlformats.org/drawingml/2006/main">
               <a:ext uri="{FF2B5EF4-FFF2-40B4-BE49-F238E27FC236}">
-                <a16:creationId xmlns:a16="http://schemas.microsoft.com/office/drawing/2014/main" id="{B1BE1728-BB65-4164-8662-2FA4AEC428E7}"/>
+                <a16:creationId xmlns:a16="http://schemas.microsoft.com/office/drawing/2014/main" id="{8003DC30-B884-4766-A85C-1966E27C8691}"/>
               </a:ext>
             </a:extLst>
           </p:cNvPr>
@@ -9905,16 +11900,13 @@
           <p:nvPr/>
         </p:nvPicPr>
         <p:blipFill>
-          <a:blip xmlns:r="http://schemas.openxmlformats.org/officeDocument/2006/relationships" xmlns:a="http://schemas.openxmlformats.org/drawingml/2006/main" r:embed="Reab058e101f54ef7"/>
-          <a:srcRect xmlns:a="http://schemas.openxmlformats.org/drawingml/2006/main" l="0" t="15663" r="0" b="15663"/>
-          <a:stretch xmlns:a="http://schemas.openxmlformats.org/drawingml/2006/main">
-            <a:fillRect l="0" t="0" r="0" b="0"/>
-          </a:stretch>
+          <a:blip xmlns:r="http://schemas.openxmlformats.org/officeDocument/2006/relationships" xmlns:a="http://schemas.openxmlformats.org/drawingml/2006/main" r:embed="Rb689b0b260434f90"/>
+          <a:stretch xmlns:a="http://schemas.openxmlformats.org/drawingml/2006/main"/>
         </p:blipFill>
         <p:spPr>
           <a:xfrm xmlns:a="http://schemas.openxmlformats.org/drawingml/2006/main">
-            <a:off x="10039350" y="323850"/>
-            <a:ext cx="1581150" cy="361950"/>
+            <a:off x="10287000" y="352758"/>
+            <a:ext cx="1333500" cy="380333"/>
           </a:xfrm>
           <a:prstGeom xmlns:a="http://schemas.openxmlformats.org/drawingml/2006/main" prst="rect">
             <a:avLst/>
@@ -9926,7 +11918,7 @@
           <p:cNvPr id="4" name="">
             <a:extLst xmlns:a="http://schemas.openxmlformats.org/drawingml/2006/main">
               <a:ext uri="{FF2B5EF4-FFF2-40B4-BE49-F238E27FC236}">
-                <a16:creationId xmlns:a16="http://schemas.microsoft.com/office/drawing/2014/main" id="{04FA7CB4-477C-4278-9A11-F81CC204DF1A}"/>
+                <a16:creationId xmlns:a16="http://schemas.microsoft.com/office/drawing/2014/main" id="{A563AE9E-566B-4332-93F4-D7384DDE38B3}"/>
               </a:ext>
             </a:extLst>
           </p:cNvPr>
@@ -9983,7 +11975,7 @@
           <p:cNvPr id="5" name="">
             <a:extLst xmlns:a="http://schemas.openxmlformats.org/drawingml/2006/main">
               <a:ext uri="{FF2B5EF4-FFF2-40B4-BE49-F238E27FC236}">
-                <a16:creationId xmlns:a16="http://schemas.microsoft.com/office/drawing/2014/main" id="{981D990B-CA4E-4826-8486-B9983F48FB2C}"/>
+                <a16:creationId xmlns:a16="http://schemas.microsoft.com/office/drawing/2014/main" id="{7512BF92-DE7A-4576-ADEE-69AB6DE3F0DB}"/>
               </a:ext>
             </a:extLst>
           </p:cNvPr>
@@ -10015,7 +12007,7 @@
           <p:cNvPr id="6" name="">
             <a:extLst xmlns:a="http://schemas.openxmlformats.org/drawingml/2006/main">
               <a:ext uri="{FF2B5EF4-FFF2-40B4-BE49-F238E27FC236}">
-                <a16:creationId xmlns:a16="http://schemas.microsoft.com/office/drawing/2014/main" id="{6C6F17D7-79AD-496D-8573-173C97A909AD}"/>
+                <a16:creationId xmlns:a16="http://schemas.microsoft.com/office/drawing/2014/main" id="{E79A7025-EB56-4BFF-8B32-9FB60043175B}"/>
               </a:ext>
             </a:extLst>
           </p:cNvPr>
@@ -10072,7 +12064,7 @@
           <p:cNvPr id="7" name="">
             <a:extLst xmlns:a="http://schemas.openxmlformats.org/drawingml/2006/main">
               <a:ext uri="{FF2B5EF4-FFF2-40B4-BE49-F238E27FC236}">
-                <a16:creationId xmlns:a16="http://schemas.microsoft.com/office/drawing/2014/main" id="{F0EC3DB5-7CB7-482D-8773-5EA00AEFAA8C}"/>
+                <a16:creationId xmlns:a16="http://schemas.microsoft.com/office/drawing/2014/main" id="{2378AB70-93B2-4E24-8817-D96A044E2F00}"/>
               </a:ext>
             </a:extLst>
           </p:cNvPr>
@@ -10129,7 +12121,7 @@
           <p:cNvPr id="8" name="">
             <a:extLst xmlns:a="http://schemas.openxmlformats.org/drawingml/2006/main">
               <a:ext uri="{FF2B5EF4-FFF2-40B4-BE49-F238E27FC236}">
-                <a16:creationId xmlns:a16="http://schemas.microsoft.com/office/drawing/2014/main" id="{24936FCD-CF07-45C9-B2EF-496B1154180C}"/>
+                <a16:creationId xmlns:a16="http://schemas.microsoft.com/office/drawing/2014/main" id="{5D6A3097-22AA-4142-BDEA-F025406B17CC}"/>
               </a:ext>
             </a:extLst>
           </p:cNvPr>
@@ -10161,7 +12153,7 @@
           <p:cNvPr id="9" name="">
             <a:extLst xmlns:a="http://schemas.openxmlformats.org/drawingml/2006/main">
               <a:ext uri="{FF2B5EF4-FFF2-40B4-BE49-F238E27FC236}">
-                <a16:creationId xmlns:a16="http://schemas.microsoft.com/office/drawing/2014/main" id="{9040A409-3A0B-4410-ADFA-771C841E887E}"/>
+                <a16:creationId xmlns:a16="http://schemas.microsoft.com/office/drawing/2014/main" id="{1D819C51-C48D-4ADC-88E1-81A45C15168B}"/>
               </a:ext>
             </a:extLst>
           </p:cNvPr>
@@ -10218,7 +12210,7 @@
           <p:cNvPr id="10" name="">
             <a:extLst xmlns:a="http://schemas.openxmlformats.org/drawingml/2006/main">
               <a:ext uri="{FF2B5EF4-FFF2-40B4-BE49-F238E27FC236}">
-                <a16:creationId xmlns:a16="http://schemas.microsoft.com/office/drawing/2014/main" id="{01C70D21-4449-416B-940B-73847CC02DDA}"/>
+                <a16:creationId xmlns:a16="http://schemas.microsoft.com/office/drawing/2014/main" id="{ED88B785-BA69-4A23-B215-DCCF2DD55752}"/>
               </a:ext>
             </a:extLst>
           </p:cNvPr>
@@ -10275,7 +12267,7 @@
           <p:cNvPr id="11" name="">
             <a:extLst xmlns:a="http://schemas.openxmlformats.org/drawingml/2006/main">
               <a:ext uri="{FF2B5EF4-FFF2-40B4-BE49-F238E27FC236}">
-                <a16:creationId xmlns:a16="http://schemas.microsoft.com/office/drawing/2014/main" id="{183778E6-A5A4-449E-B66C-68F424313474}"/>
+                <a16:creationId xmlns:a16="http://schemas.microsoft.com/office/drawing/2014/main" id="{1AC16738-5B82-42B6-A40F-60F2C4C6EC4C}"/>
               </a:ext>
             </a:extLst>
           </p:cNvPr>
@@ -10307,7 +12299,7 @@
           <p:cNvPr id="12" name="">
             <a:extLst xmlns:a="http://schemas.openxmlformats.org/drawingml/2006/main">
               <a:ext uri="{FF2B5EF4-FFF2-40B4-BE49-F238E27FC236}">
-                <a16:creationId xmlns:a16="http://schemas.microsoft.com/office/drawing/2014/main" id="{629AF23C-3F71-41B1-A32B-498BF8A6A8C9}"/>
+                <a16:creationId xmlns:a16="http://schemas.microsoft.com/office/drawing/2014/main" id="{F25AA779-E36B-40A6-BDF5-E394A71DEB5C}"/>
               </a:ext>
             </a:extLst>
           </p:cNvPr>
@@ -10364,7 +12356,7 @@
           <p:cNvPr id="13" name="">
             <a:extLst xmlns:a="http://schemas.openxmlformats.org/drawingml/2006/main">
               <a:ext uri="{FF2B5EF4-FFF2-40B4-BE49-F238E27FC236}">
-                <a16:creationId xmlns:a16="http://schemas.microsoft.com/office/drawing/2014/main" id="{D3003B9C-C7A8-4D71-BD86-08FEC1E0B25A}"/>
+                <a16:creationId xmlns:a16="http://schemas.microsoft.com/office/drawing/2014/main" id="{DD4476E9-9C51-4352-8CC0-38F9B690BEFC}"/>
               </a:ext>
             </a:extLst>
           </p:cNvPr>
@@ -10421,7 +12413,7 @@
           <p:cNvPr id="14" name="">
             <a:extLst xmlns:a="http://schemas.openxmlformats.org/drawingml/2006/main">
               <a:ext uri="{FF2B5EF4-FFF2-40B4-BE49-F238E27FC236}">
-                <a16:creationId xmlns:a16="http://schemas.microsoft.com/office/drawing/2014/main" id="{AD0F0529-2F28-425F-843A-D49908E308E3}"/>
+                <a16:creationId xmlns:a16="http://schemas.microsoft.com/office/drawing/2014/main" id="{6F11691C-BB6D-4A1F-BF04-BECEDD125CFB}"/>
               </a:ext>
             </a:extLst>
           </p:cNvPr>
@@ -10453,7 +12445,7 @@
           <p:cNvPr id="15" name="">
             <a:extLst xmlns:a="http://schemas.openxmlformats.org/drawingml/2006/main">
               <a:ext uri="{FF2B5EF4-FFF2-40B4-BE49-F238E27FC236}">
-                <a16:creationId xmlns:a16="http://schemas.microsoft.com/office/drawing/2014/main" id="{CF59D990-C540-4DFE-A246-FE3CA6C0E5D3}"/>
+                <a16:creationId xmlns:a16="http://schemas.microsoft.com/office/drawing/2014/main" id="{16F79715-4B27-427E-9FBC-3F599AE0DEB6}"/>
               </a:ext>
             </a:extLst>
           </p:cNvPr>
@@ -10510,7 +12502,7 @@
           <p:cNvPr id="16" name="">
             <a:extLst xmlns:a="http://schemas.openxmlformats.org/drawingml/2006/main">
               <a:ext uri="{FF2B5EF4-FFF2-40B4-BE49-F238E27FC236}">
-                <a16:creationId xmlns:a16="http://schemas.microsoft.com/office/drawing/2014/main" id="{4C4D5ADC-FCAC-4A09-94F9-E445964C86CB}"/>
+                <a16:creationId xmlns:a16="http://schemas.microsoft.com/office/drawing/2014/main" id="{68A5E867-9B58-44A4-A4E4-E558AF100B5F}"/>
               </a:ext>
             </a:extLst>
           </p:cNvPr>
@@ -10567,7 +12559,7 @@
           <p:cNvPr id="17" name="">
             <a:extLst xmlns:a="http://schemas.openxmlformats.org/drawingml/2006/main">
               <a:ext uri="{FF2B5EF4-FFF2-40B4-BE49-F238E27FC236}">
-                <a16:creationId xmlns:a16="http://schemas.microsoft.com/office/drawing/2014/main" id="{94088112-0471-45F8-8188-1D0092DD23A8}"/>
+                <a16:creationId xmlns:a16="http://schemas.microsoft.com/office/drawing/2014/main" id="{D6B85984-F2D6-4FA9-9681-E4ADE704B1BD}"/>
               </a:ext>
             </a:extLst>
           </p:cNvPr>
@@ -10599,7 +12591,7 @@
           <p:cNvPr id="18" name="">
             <a:extLst xmlns:a="http://schemas.openxmlformats.org/drawingml/2006/main">
               <a:ext uri="{FF2B5EF4-FFF2-40B4-BE49-F238E27FC236}">
-                <a16:creationId xmlns:a16="http://schemas.microsoft.com/office/drawing/2014/main" id="{7A1E384F-E4CB-4FF3-9456-DC779BA50E7A}"/>
+                <a16:creationId xmlns:a16="http://schemas.microsoft.com/office/drawing/2014/main" id="{11316656-C544-49FE-8B62-66511C84E870}"/>
               </a:ext>
             </a:extLst>
           </p:cNvPr>
@@ -10656,7 +12648,7 @@
           <p:cNvPr id="19" name="">
             <a:extLst xmlns:a="http://schemas.openxmlformats.org/drawingml/2006/main">
               <a:ext uri="{FF2B5EF4-FFF2-40B4-BE49-F238E27FC236}">
-                <a16:creationId xmlns:a16="http://schemas.microsoft.com/office/drawing/2014/main" id="{7EBA18C4-D945-4631-A80F-35F13971AE88}"/>
+                <a16:creationId xmlns:a16="http://schemas.microsoft.com/office/drawing/2014/main" id="{704F0406-C361-400F-BD25-91C9191B6EB4}"/>
               </a:ext>
             </a:extLst>
           </p:cNvPr>
@@ -10713,7 +12705,7 @@
           <p:cNvPr id="20" name="">
             <a:extLst xmlns:a="http://schemas.openxmlformats.org/drawingml/2006/main">
               <a:ext uri="{FF2B5EF4-FFF2-40B4-BE49-F238E27FC236}">
-                <a16:creationId xmlns:a16="http://schemas.microsoft.com/office/drawing/2014/main" id="{AE61658B-E056-4347-A9E6-10AE732A3D69}"/>
+                <a16:creationId xmlns:a16="http://schemas.microsoft.com/office/drawing/2014/main" id="{48E8E4FF-82BE-4CED-AED6-10B5D674216E}"/>
               </a:ext>
             </a:extLst>
           </p:cNvPr>
@@ -10745,7 +12737,7 @@
           <p:cNvPr id="21" name="">
             <a:extLst xmlns:a="http://schemas.openxmlformats.org/drawingml/2006/main">
               <a:ext uri="{FF2B5EF4-FFF2-40B4-BE49-F238E27FC236}">
-                <a16:creationId xmlns:a16="http://schemas.microsoft.com/office/drawing/2014/main" id="{4D278C16-DA4C-40F3-A42F-B19433DEDBA3}"/>
+                <a16:creationId xmlns:a16="http://schemas.microsoft.com/office/drawing/2014/main" id="{BF7DB160-4833-44D1-84E7-E0A2B3AE2FAB}"/>
               </a:ext>
             </a:extLst>
           </p:cNvPr>
@@ -10802,7 +12794,7 @@
           <p:cNvPr id="22" name="">
             <a:extLst xmlns:a="http://schemas.openxmlformats.org/drawingml/2006/main">
               <a:ext uri="{FF2B5EF4-FFF2-40B4-BE49-F238E27FC236}">
-                <a16:creationId xmlns:a16="http://schemas.microsoft.com/office/drawing/2014/main" id="{027CF209-A1BD-4E31-AD75-958FCC138FCF}"/>
+                <a16:creationId xmlns:a16="http://schemas.microsoft.com/office/drawing/2014/main" id="{4B8579E1-72E4-40E4-B928-82F8573F7B95}"/>
               </a:ext>
             </a:extLst>
           </p:cNvPr>
@@ -10857,7 +12849,7 @@
     </p:spTree>
     <p:extLst>
       <p:ext uri="{BB962C8B-B14F-4D97-AF65-F5344CB8AC3E}">
-        <p14:creationId xmlns:p14="http://schemas.microsoft.com/office/powerpoint/2010/main" val="1623479988"/>
+        <p14:creationId xmlns:p14="http://schemas.microsoft.com/office/powerpoint/2010/main" val="264683851"/>
       </p:ext>
     </p:extLst>
   </p:cSld>
